--- a/Session 11/Session_11_Segmentation.pptx
+++ b/Session 11/Session_11_Segmentation.pptx
@@ -4,6 +4,9 @@
   <p:sldMasterIdLst>
     <p:sldMasterId id="2147483648" r:id="rId1"/>
   </p:sldMasterIdLst>
+  <p:notesMasterIdLst>
+    <p:notesMasterId r:id="rId20"/>
+  </p:notesMasterIdLst>
   <p:sldIdLst>
     <p:sldId id="256" r:id="rId2"/>
     <p:sldId id="257" r:id="rId3"/>
@@ -24,10 +27,7 @@
     <p:sldId id="272" r:id="rId18"/>
     <p:sldId id="273" r:id="rId19"/>
   </p:sldIdLst>
-  <p:notesMasterIdLst>
-    <p:notesMasterId r:id="rId20"/>
-  </p:notesMasterIdLst>
-  <p:sldSz cx="9144000" cy="5143500"/>
+  <p:sldSz cx="9144000" cy="5143500" type="screen16x9"/>
   <p:notesSz cx="5143500" cy="9144000"/>
   <p:defaultTextStyle>
     <a:lvl1pPr marL="0" algn="l" defTabSz="914400" rtl="0" eaLnBrk="1" latinLnBrk="0" hangingPunct="1">
@@ -121,6 +121,11 @@
       </a:defRPr>
     </a:lvl9pPr>
   </p:defaultTextStyle>
+  <p:extLst>
+    <p:ext uri="{EFAFB233-063F-42B5-8137-9DF3F51BA10A}">
+      <p15:sldGuideLst xmlns:p15="http://schemas.microsoft.com/office/powerpoint/2012/main"/>
+    </p:ext>
+  </p:extLst>
 </p:presentation>
 </file>
 
@@ -146,234 +151,10 @@
           <a:chExt cx="0" cy="0"/>
         </a:xfrm>
       </p:grpSpPr>
-      <p:sp>
-        <p:nvSpPr>
-          <p:cNvPr id="2" name="Header Placeholder 1"/>
-          <p:cNvSpPr>
-            <a:spLocks noGrp="1"/>
-          </p:cNvSpPr>
-          <p:nvPr>
-            <p:ph type="hdr" sz="quarter"/>
-          </p:nvPr>
-        </p:nvSpPr>
-        <p:spPr>
-          <a:xfrm>
-            <a:off x="0" y="0"/>
-            <a:ext cx="2971800" cy="458788"/>
-          </a:xfrm>
-          <a:prstGeom prst="rect">
-            <a:avLst/>
-          </a:prstGeom>
-        </p:spPr>
-        <p:txBody>
-          <a:bodyPr vert="horz" lIns="91440" tIns="45720" rIns="91440" bIns="45720" rtlCol="0"/>
-          <a:lstStyle>
-            <a:lvl1pPr algn="l">
-              <a:defRPr sz="1200"/>
-            </a:lvl1pPr>
-          </a:lstStyle>
-          <a:p>
-            <a:endParaRPr lang="en-US"/>
-          </a:p>
-        </p:txBody>
-      </p:sp>
-      <p:sp>
-        <p:nvSpPr>
-          <p:cNvPr id="3" name="Date Placeholder 2"/>
-          <p:cNvSpPr>
-            <a:spLocks noGrp="1"/>
-          </p:cNvSpPr>
-          <p:nvPr>
-            <p:ph type="dt" idx="1"/>
-          </p:nvPr>
-        </p:nvSpPr>
-        <p:spPr>
-          <a:xfrm>
-            <a:off x="3884613" y="0"/>
-            <a:ext cx="2971800" cy="458788"/>
-          </a:xfrm>
-          <a:prstGeom prst="rect">
-            <a:avLst/>
-          </a:prstGeom>
-        </p:spPr>
-        <p:txBody>
-          <a:bodyPr vert="horz" lIns="91440" tIns="45720" rIns="91440" bIns="45720" rtlCol="0"/>
-          <a:lstStyle>
-            <a:lvl1pPr algn="r">
-              <a:defRPr sz="1200"/>
-            </a:lvl1pPr>
-          </a:lstStyle>
-          <a:p>
-            <a:fld id="{5282F153-3F37-0F45-9E97-73ACFA13230C}" type="datetimeFigureOut">
-              <a:rPr lang="en-US"/>
-              <a:t>7/23/19</a:t>
-            </a:fld>
-            <a:endParaRPr lang="en-US"/>
-          </a:p>
-        </p:txBody>
-      </p:sp>
-      <p:sp>
-        <p:nvSpPr>
-          <p:cNvPr id="4" name="Slide Image Placeholder 3"/>
-          <p:cNvSpPr>
-            <a:spLocks noGrp="1" noRot="1" noChangeAspect="1"/>
-          </p:cNvSpPr>
-          <p:nvPr>
-            <p:ph type="sldImg" idx="2"/>
-          </p:nvPr>
-        </p:nvSpPr>
-        <p:spPr>
-          <a:xfrm>
-            <a:off x="685800" y="1143000"/>
-            <a:ext cx="5486400" cy="3086100"/>
-          </a:xfrm>
-          <a:prstGeom prst="rect">
-            <a:avLst/>
-          </a:prstGeom>
-          <a:noFill/>
-          <a:ln w="12700">
-            <a:solidFill>
-              <a:prstClr val="black"/>
-            </a:solidFill>
-          </a:ln>
-        </p:spPr>
-        <p:txBody>
-          <a:bodyPr vert="horz" lIns="91440" tIns="45720" rIns="91440" bIns="45720" rtlCol="0" anchor="ctr"/>
-          <a:lstStyle/>
-          <a:p>
-            <a:endParaRPr lang="en-US"/>
-          </a:p>
-        </p:txBody>
-      </p:sp>
-      <p:sp>
-        <p:nvSpPr>
-          <p:cNvPr id="5" name="Notes Placeholder 4"/>
-          <p:cNvSpPr>
-            <a:spLocks noGrp="1"/>
-          </p:cNvSpPr>
-          <p:nvPr>
-            <p:ph type="body" sz="quarter" idx="3"/>
-          </p:nvPr>
-        </p:nvSpPr>
-        <p:spPr>
-          <a:xfrm>
-            <a:off x="685800" y="4400550"/>
-            <a:ext cx="5486400" cy="3600450"/>
-          </a:xfrm>
-          <a:prstGeom prst="rect">
-            <a:avLst/>
-          </a:prstGeom>
-        </p:spPr>
-        <p:txBody>
-          <a:bodyPr vert="horz" lIns="91440" tIns="45720" rIns="91440" bIns="45720" rtlCol="0"/>
-          <a:lstStyle/>
-          <a:p>
-            <a:pPr lvl="0"/>
-            <a:r>
-              <a:rPr lang="en-US"/>
-              <a:t>Click to edit Master text styles</a:t>
-            </a:r>
-          </a:p>
-          <a:p>
-            <a:pPr lvl="1"/>
-            <a:r>
-              <a:rPr lang="en-US"/>
-              <a:t>Second level</a:t>
-            </a:r>
-          </a:p>
-          <a:p>
-            <a:pPr lvl="2"/>
-            <a:r>
-              <a:rPr lang="en-US"/>
-              <a:t>Third level</a:t>
-            </a:r>
-          </a:p>
-          <a:p>
-            <a:pPr lvl="3"/>
-            <a:r>
-              <a:rPr lang="en-US"/>
-              <a:t>Fourth level</a:t>
-            </a:r>
-          </a:p>
-          <a:p>
-            <a:pPr lvl="4"/>
-            <a:r>
-              <a:rPr lang="en-US"/>
-              <a:t>Fifth level</a:t>
-            </a:r>
-          </a:p>
-        </p:txBody>
-      </p:sp>
-      <p:sp>
-        <p:nvSpPr>
-          <p:cNvPr id="6" name="Footer Placeholder 5"/>
-          <p:cNvSpPr>
-            <a:spLocks noGrp="1"/>
-          </p:cNvSpPr>
-          <p:nvPr>
-            <p:ph type="ftr" sz="quarter" idx="4"/>
-          </p:nvPr>
-        </p:nvSpPr>
-        <p:spPr>
-          <a:xfrm>
-            <a:off x="0" y="8685213"/>
-            <a:ext cx="2971800" cy="458787"/>
-          </a:xfrm>
-          <a:prstGeom prst="rect">
-            <a:avLst/>
-          </a:prstGeom>
-        </p:spPr>
-        <p:txBody>
-          <a:bodyPr vert="horz" lIns="91440" tIns="45720" rIns="91440" bIns="45720" rtlCol="0" anchor="b"/>
-          <a:lstStyle>
-            <a:lvl1pPr algn="l">
-              <a:defRPr sz="1200"/>
-            </a:lvl1pPr>
-          </a:lstStyle>
-          <a:p>
-            <a:endParaRPr lang="en-US"/>
-          </a:p>
-        </p:txBody>
-      </p:sp>
-      <p:sp>
-        <p:nvSpPr>
-          <p:cNvPr id="7" name="Slide Number Placeholder 6"/>
-          <p:cNvSpPr>
-            <a:spLocks noGrp="1"/>
-          </p:cNvSpPr>
-          <p:nvPr>
-            <p:ph type="sldNum" sz="quarter" idx="5"/>
-          </p:nvPr>
-        </p:nvSpPr>
-        <p:spPr>
-          <a:xfrm>
-            <a:off x="3884613" y="8685213"/>
-            <a:ext cx="2971800" cy="458787"/>
-          </a:xfrm>
-          <a:prstGeom prst="rect">
-            <a:avLst/>
-          </a:prstGeom>
-        </p:spPr>
-        <p:txBody>
-          <a:bodyPr vert="horz" lIns="91440" tIns="45720" rIns="91440" bIns="45720" rtlCol="0" anchor="b"/>
-          <a:lstStyle>
-            <a:lvl1pPr algn="r">
-              <a:defRPr sz="1200"/>
-            </a:lvl1pPr>
-          </a:lstStyle>
-          <a:p>
-            <a:fld id="{CE5E9CC1-C706-0F49-92D6-E571CC5EEA8F}" type="slidenum">
-              <a:rPr lang="en-US"/>
-              <a:t>‹#›</a:t>
-            </a:fld>
-            <a:endParaRPr lang="en-US"/>
-          </a:p>
-        </p:txBody>
-      </p:sp>
     </p:spTree>
     <p:extLst>
       <p:ext uri="{BB962C8B-B14F-4D97-AF65-F5344CB8AC3E}">
-        <p14:creationId xmlns:p14="http://schemas.microsoft.com/office/powerpoint/2010/main" val="1024086991"/>
+        <p14:creationId xmlns:p14="http://schemas.microsoft.com/office/powerpoint/2010/main" val="1017878671"/>
       </p:ext>
     </p:extLst>
   </p:cSld>
@@ -517,10 +298,6 @@
           <a:bodyPr/>
           <a:lstStyle/>
           <a:p>
-            <a:r>
-              <a:rPr lang="en-US" dirty="0"/>
-              <a:t/>
-            </a:r>
             <a:endParaRPr lang="en-US" dirty="0"/>
           </a:p>
         </p:txBody>
@@ -605,10 +382,6 @@
           <a:bodyPr/>
           <a:lstStyle/>
           <a:p>
-            <a:r>
-              <a:rPr lang="en-US" dirty="0"/>
-              <a:t/>
-            </a:r>
             <a:endParaRPr lang="en-US" dirty="0"/>
           </a:p>
         </p:txBody>
@@ -693,10 +466,6 @@
           <a:bodyPr/>
           <a:lstStyle/>
           <a:p>
-            <a:r>
-              <a:rPr lang="en-US" dirty="0"/>
-              <a:t/>
-            </a:r>
             <a:endParaRPr lang="en-US" dirty="0"/>
           </a:p>
         </p:txBody>
@@ -781,10 +550,6 @@
           <a:bodyPr/>
           <a:lstStyle/>
           <a:p>
-            <a:r>
-              <a:rPr lang="en-US" dirty="0"/>
-              <a:t/>
-            </a:r>
             <a:endParaRPr lang="en-US" dirty="0"/>
           </a:p>
         </p:txBody>
@@ -869,10 +634,6 @@
           <a:bodyPr/>
           <a:lstStyle/>
           <a:p>
-            <a:r>
-              <a:rPr lang="en-US" dirty="0"/>
-              <a:t/>
-            </a:r>
             <a:endParaRPr lang="en-US" dirty="0"/>
           </a:p>
         </p:txBody>
@@ -957,10 +718,6 @@
           <a:bodyPr/>
           <a:lstStyle/>
           <a:p>
-            <a:r>
-              <a:rPr lang="en-US" dirty="0"/>
-              <a:t/>
-            </a:r>
             <a:endParaRPr lang="en-US" dirty="0"/>
           </a:p>
         </p:txBody>
@@ -1045,10 +802,6 @@
           <a:bodyPr/>
           <a:lstStyle/>
           <a:p>
-            <a:r>
-              <a:rPr lang="en-US" dirty="0"/>
-              <a:t/>
-            </a:r>
             <a:endParaRPr lang="en-US" dirty="0"/>
           </a:p>
         </p:txBody>
@@ -1133,10 +886,6 @@
           <a:bodyPr/>
           <a:lstStyle/>
           <a:p>
-            <a:r>
-              <a:rPr lang="en-US" dirty="0"/>
-              <a:t/>
-            </a:r>
             <a:endParaRPr lang="en-US" dirty="0"/>
           </a:p>
         </p:txBody>
@@ -1221,10 +970,6 @@
           <a:bodyPr/>
           <a:lstStyle/>
           <a:p>
-            <a:r>
-              <a:rPr lang="en-US" dirty="0"/>
-              <a:t/>
-            </a:r>
             <a:endParaRPr lang="en-US" dirty="0"/>
           </a:p>
         </p:txBody>
@@ -1309,10 +1054,6 @@
           <a:bodyPr/>
           <a:lstStyle/>
           <a:p>
-            <a:r>
-              <a:rPr lang="en-US" dirty="0"/>
-              <a:t/>
-            </a:r>
             <a:endParaRPr lang="en-US" dirty="0"/>
           </a:p>
         </p:txBody>
@@ -1397,10 +1138,6 @@
           <a:bodyPr/>
           <a:lstStyle/>
           <a:p>
-            <a:r>
-              <a:rPr lang="en-US" dirty="0"/>
-              <a:t/>
-            </a:r>
             <a:endParaRPr lang="en-US" dirty="0"/>
           </a:p>
         </p:txBody>
@@ -1485,10 +1222,6 @@
           <a:bodyPr/>
           <a:lstStyle/>
           <a:p>
-            <a:r>
-              <a:rPr lang="en-US" dirty="0"/>
-              <a:t/>
-            </a:r>
             <a:endParaRPr lang="en-US" dirty="0"/>
           </a:p>
         </p:txBody>
@@ -1573,10 +1306,6 @@
           <a:bodyPr/>
           <a:lstStyle/>
           <a:p>
-            <a:r>
-              <a:rPr lang="en-US" dirty="0"/>
-              <a:t/>
-            </a:r>
             <a:endParaRPr lang="en-US" dirty="0"/>
           </a:p>
         </p:txBody>
@@ -1661,10 +1390,6 @@
           <a:bodyPr/>
           <a:lstStyle/>
           <a:p>
-            <a:r>
-              <a:rPr lang="en-US" dirty="0"/>
-              <a:t/>
-            </a:r>
             <a:endParaRPr lang="en-US" dirty="0"/>
           </a:p>
         </p:txBody>
@@ -1749,10 +1474,6 @@
           <a:bodyPr/>
           <a:lstStyle/>
           <a:p>
-            <a:r>
-              <a:rPr lang="en-US" dirty="0"/>
-              <a:t/>
-            </a:r>
             <a:endParaRPr lang="en-US" dirty="0"/>
           </a:p>
         </p:txBody>
@@ -1837,10 +1558,6 @@
           <a:bodyPr/>
           <a:lstStyle/>
           <a:p>
-            <a:r>
-              <a:rPr lang="en-US" dirty="0"/>
-              <a:t/>
-            </a:r>
             <a:endParaRPr lang="en-US" dirty="0"/>
           </a:p>
         </p:txBody>
@@ -1925,10 +1642,6 @@
           <a:bodyPr/>
           <a:lstStyle/>
           <a:p>
-            <a:r>
-              <a:rPr lang="en-US" dirty="0"/>
-              <a:t/>
-            </a:r>
             <a:endParaRPr lang="en-US" dirty="0"/>
           </a:p>
         </p:txBody>
@@ -2013,10 +1726,6 @@
           <a:bodyPr/>
           <a:lstStyle/>
           <a:p>
-            <a:r>
-              <a:rPr lang="en-US" dirty="0"/>
-              <a:t/>
-            </a:r>
             <a:endParaRPr lang="en-US" dirty="0"/>
           </a:p>
         </p:txBody>
@@ -2090,6 +1799,11 @@
 <file path=ppt/slideMasters/slideMaster1.xml><?xml version="1.0" encoding="utf-8"?>
 <p:sldMaster xmlns:a="http://schemas.openxmlformats.org/drawingml/2006/main" xmlns:r="http://schemas.openxmlformats.org/officeDocument/2006/relationships" xmlns:p="http://schemas.openxmlformats.org/presentationml/2006/main">
   <p:cSld>
+    <p:bg>
+      <p:bgRef idx="1001">
+        <a:schemeClr val="bg1"/>
+      </p:bgRef>
+    </p:bg>
     <p:spTree>
       <p:nvGrpSpPr>
         <p:cNvPr id="1" name=""/>
@@ -2372,6 +2086,7 @@
         <a:solidFill>
           <a:srgbClr val="081930"/>
         </a:solidFill>
+        <a:effectLst/>
       </p:bgPr>
     </p:bg>
     <p:spTree>
@@ -2428,437 +2143,444 @@
           <a:ln/>
         </p:spPr>
       </p:sp>
+      <p:sp>
+        <p:nvSpPr>
+          <p:cNvPr id="5" name="Text 2"/>
+          <p:cNvSpPr/>
+          <p:nvPr/>
+        </p:nvSpPr>
+        <p:spPr>
+          <a:xfrm>
+            <a:off x="5212080" y="3035808"/>
+            <a:ext cx="3566160" cy="274320"/>
+          </a:xfrm>
+          <a:prstGeom prst="rect">
+            <a:avLst/>
+          </a:prstGeom>
+          <a:noFill/>
+          <a:ln/>
+        </p:spPr>
+        <p:txBody>
+          <a:bodyPr wrap="square" lIns="0" tIns="0" rIns="0" bIns="0" rtlCol="0" anchor="ctr"/>
+          <a:lstStyle/>
+          <a:p>
+            <a:pPr marL="0" indent="0" algn="ctr">
+              <a:buNone/>
+            </a:pPr>
+            <a:r>
+              <a:rPr lang="en-US" sz="1000" i="1" dirty="0">
+                <a:solidFill>
+                  <a:srgbClr val="94A3B8"/>
+                </a:solidFill>
+                <a:latin typeface="Calibri" pitchFamily="34" charset="0"/>
+                <a:ea typeface="Calibri" pitchFamily="34" charset="-122"/>
+                <a:cs typeface="Calibri" pitchFamily="34" charset="-120"/>
+              </a:rPr>
+              <a:t>Instance segmentation — per-object masks</a:t>
+            </a:r>
+            <a:endParaRPr lang="en-US" sz="1000" dirty="0"/>
+          </a:p>
+        </p:txBody>
+      </p:sp>
+      <p:sp>
+        <p:nvSpPr>
+          <p:cNvPr id="6" name="Text 3"/>
+          <p:cNvSpPr/>
+          <p:nvPr/>
+        </p:nvSpPr>
+        <p:spPr>
+          <a:xfrm>
+            <a:off x="502920" y="502920"/>
+            <a:ext cx="3657600" cy="320040"/>
+          </a:xfrm>
+          <a:prstGeom prst="rect">
+            <a:avLst/>
+          </a:prstGeom>
+          <a:noFill/>
+          <a:ln/>
+        </p:spPr>
+        <p:txBody>
+          <a:bodyPr wrap="square" lIns="0" tIns="0" rIns="0" bIns="0" rtlCol="0" anchor="ctr"/>
+          <a:lstStyle/>
+          <a:p>
+            <a:pPr marL="0" indent="0">
+              <a:buNone/>
+            </a:pPr>
+            <a:r>
+              <a:rPr lang="en-US" sz="1200" b="1" kern="0" spc="800" dirty="0">
+                <a:solidFill>
+                  <a:srgbClr val="0D9488"/>
+                </a:solidFill>
+                <a:latin typeface="Calibri" pitchFamily="34" charset="0"/>
+                <a:ea typeface="Calibri" pitchFamily="34" charset="-122"/>
+                <a:cs typeface="Calibri" pitchFamily="34" charset="-120"/>
+              </a:rPr>
+              <a:t>SESSION 11</a:t>
+            </a:r>
+            <a:endParaRPr lang="en-US" sz="1200" dirty="0"/>
+          </a:p>
+        </p:txBody>
+      </p:sp>
+      <p:sp>
+        <p:nvSpPr>
+          <p:cNvPr id="7" name="Text 4"/>
+          <p:cNvSpPr/>
+          <p:nvPr/>
+        </p:nvSpPr>
+        <p:spPr>
+          <a:xfrm>
+            <a:off x="502920" y="868680"/>
+            <a:ext cx="4754880" cy="1645920"/>
+          </a:xfrm>
+          <a:prstGeom prst="rect">
+            <a:avLst/>
+          </a:prstGeom>
+          <a:noFill/>
+          <a:ln/>
+        </p:spPr>
+        <p:txBody>
+          <a:bodyPr wrap="square" lIns="0" tIns="0" rIns="0" bIns="0" rtlCol="0" anchor="ctr"/>
+          <a:lstStyle/>
+          <a:p>
+            <a:pPr marL="0" indent="0">
+              <a:buNone/>
+            </a:pPr>
+            <a:r>
+              <a:rPr lang="en-US" sz="4800" b="1" dirty="0">
+                <a:solidFill>
+                  <a:srgbClr val="FFFFFF"/>
+                </a:solidFill>
+                <a:latin typeface="Calibri" pitchFamily="34" charset="0"/>
+                <a:ea typeface="Calibri" pitchFamily="34" charset="-122"/>
+                <a:cs typeface="Calibri" pitchFamily="34" charset="-120"/>
+              </a:rPr>
+              <a:t>Image</a:t>
+            </a:r>
+            <a:endParaRPr lang="en-US" sz="4800" dirty="0"/>
+          </a:p>
+          <a:p>
+            <a:pPr marL="0" indent="0">
+              <a:buNone/>
+            </a:pPr>
+            <a:r>
+              <a:rPr lang="en-US" sz="4800" b="1" dirty="0">
+                <a:solidFill>
+                  <a:srgbClr val="FFFFFF"/>
+                </a:solidFill>
+                <a:latin typeface="Calibri" pitchFamily="34" charset="0"/>
+                <a:ea typeface="Calibri" pitchFamily="34" charset="-122"/>
+                <a:cs typeface="Calibri" pitchFamily="34" charset="-120"/>
+              </a:rPr>
+              <a:t>Segmentation</a:t>
+            </a:r>
+            <a:endParaRPr lang="en-US" sz="4800" dirty="0"/>
+          </a:p>
+        </p:txBody>
+      </p:sp>
+      <p:sp>
+        <p:nvSpPr>
+          <p:cNvPr id="8" name="Text 5"/>
+          <p:cNvSpPr/>
+          <p:nvPr/>
+        </p:nvSpPr>
+        <p:spPr>
+          <a:xfrm>
+            <a:off x="502920" y="2542032"/>
+            <a:ext cx="4754880" cy="457200"/>
+          </a:xfrm>
+          <a:prstGeom prst="rect">
+            <a:avLst/>
+          </a:prstGeom>
+          <a:noFill/>
+          <a:ln/>
+        </p:spPr>
+        <p:txBody>
+          <a:bodyPr wrap="square" lIns="0" tIns="0" rIns="0" bIns="0" rtlCol="0" anchor="ctr"/>
+          <a:lstStyle/>
+          <a:p>
+            <a:pPr marL="0" indent="0">
+              <a:buNone/>
+            </a:pPr>
+            <a:r>
+              <a:rPr lang="en-US" sz="1500" i="1" dirty="0">
+                <a:solidFill>
+                  <a:srgbClr val="94A3B8"/>
+                </a:solidFill>
+                <a:latin typeface="Calibri" pitchFamily="34" charset="0"/>
+                <a:ea typeface="Calibri" pitchFamily="34" charset="-122"/>
+                <a:cs typeface="Calibri" pitchFamily="34" charset="-120"/>
+              </a:rPr>
+              <a:t>From semantic per-pixel labels to per-object masks</a:t>
+            </a:r>
+            <a:endParaRPr lang="en-US" sz="1500" dirty="0"/>
+          </a:p>
+        </p:txBody>
+      </p:sp>
+      <p:sp>
+        <p:nvSpPr>
+          <p:cNvPr id="9" name="Shape 6"/>
+          <p:cNvSpPr/>
+          <p:nvPr/>
+        </p:nvSpPr>
+        <p:spPr>
+          <a:xfrm>
+            <a:off x="502920" y="3611880"/>
+            <a:ext cx="36576" cy="868680"/>
+          </a:xfrm>
+          <a:prstGeom prst="rect">
+            <a:avLst/>
+          </a:prstGeom>
+          <a:solidFill>
+            <a:srgbClr val="0D9488"/>
+          </a:solidFill>
+          <a:ln/>
+        </p:spPr>
+      </p:sp>
+      <p:sp>
+        <p:nvSpPr>
+          <p:cNvPr id="10" name="Text 7"/>
+          <p:cNvSpPr/>
+          <p:nvPr/>
+        </p:nvSpPr>
+        <p:spPr>
+          <a:xfrm>
+            <a:off x="685800" y="3611880"/>
+            <a:ext cx="2011680" cy="228600"/>
+          </a:xfrm>
+          <a:prstGeom prst="rect">
+            <a:avLst/>
+          </a:prstGeom>
+          <a:noFill/>
+          <a:ln/>
+        </p:spPr>
+        <p:txBody>
+          <a:bodyPr wrap="square" lIns="0" tIns="0" rIns="0" bIns="0" rtlCol="0" anchor="ctr"/>
+          <a:lstStyle/>
+          <a:p>
+            <a:pPr marL="0" indent="0">
+              <a:buNone/>
+            </a:pPr>
+            <a:r>
+              <a:rPr lang="en-US" sz="900" b="1" kern="0" spc="400" dirty="0">
+                <a:solidFill>
+                  <a:srgbClr val="94A3B8"/>
+                </a:solidFill>
+                <a:latin typeface="Calibri" pitchFamily="34" charset="0"/>
+                <a:ea typeface="Calibri" pitchFamily="34" charset="-122"/>
+                <a:cs typeface="Calibri" pitchFamily="34" charset="-120"/>
+              </a:rPr>
+              <a:t>TYPE</a:t>
+            </a:r>
+            <a:endParaRPr lang="en-US" sz="900" dirty="0"/>
+          </a:p>
+        </p:txBody>
+      </p:sp>
+      <p:sp>
+        <p:nvSpPr>
+          <p:cNvPr id="11" name="Text 8"/>
+          <p:cNvSpPr/>
+          <p:nvPr/>
+        </p:nvSpPr>
+        <p:spPr>
+          <a:xfrm>
+            <a:off x="685800" y="3822192"/>
+            <a:ext cx="2377440" cy="292608"/>
+          </a:xfrm>
+          <a:prstGeom prst="rect">
+            <a:avLst/>
+          </a:prstGeom>
+          <a:noFill/>
+          <a:ln/>
+        </p:spPr>
+        <p:txBody>
+          <a:bodyPr wrap="square" lIns="0" tIns="0" rIns="0" bIns="0" rtlCol="0" anchor="ctr"/>
+          <a:lstStyle/>
+          <a:p>
+            <a:pPr marL="0" indent="0">
+              <a:buNone/>
+            </a:pPr>
+            <a:r>
+              <a:rPr lang="en-US" sz="1400" b="1" dirty="0">
+                <a:solidFill>
+                  <a:srgbClr val="FFFFFF"/>
+                </a:solidFill>
+                <a:latin typeface="Calibri" pitchFamily="34" charset="0"/>
+                <a:ea typeface="Calibri" pitchFamily="34" charset="-122"/>
+                <a:cs typeface="Calibri" pitchFamily="34" charset="-120"/>
+              </a:rPr>
+              <a:t>Theory + Hands-On</a:t>
+            </a:r>
+            <a:endParaRPr lang="en-US" sz="1400" dirty="0"/>
+          </a:p>
+        </p:txBody>
+      </p:sp>
+      <p:sp>
+        <p:nvSpPr>
+          <p:cNvPr id="12" name="Shape 9"/>
+          <p:cNvSpPr/>
+          <p:nvPr/>
+        </p:nvSpPr>
+        <p:spPr>
+          <a:xfrm>
+            <a:off x="3108960" y="3611880"/>
+            <a:ext cx="36576" cy="868680"/>
+          </a:xfrm>
+          <a:prstGeom prst="rect">
+            <a:avLst/>
+          </a:prstGeom>
+          <a:solidFill>
+            <a:srgbClr val="E11D48"/>
+          </a:solidFill>
+          <a:ln/>
+        </p:spPr>
+      </p:sp>
+      <p:sp>
+        <p:nvSpPr>
+          <p:cNvPr id="13" name="Text 10"/>
+          <p:cNvSpPr/>
+          <p:nvPr/>
+        </p:nvSpPr>
+        <p:spPr>
+          <a:xfrm>
+            <a:off x="3291840" y="3611880"/>
+            <a:ext cx="2377440" cy="228600"/>
+          </a:xfrm>
+          <a:prstGeom prst="rect">
+            <a:avLst/>
+          </a:prstGeom>
+          <a:noFill/>
+          <a:ln/>
+        </p:spPr>
+        <p:txBody>
+          <a:bodyPr wrap="square" lIns="0" tIns="0" rIns="0" bIns="0" rtlCol="0" anchor="ctr"/>
+          <a:lstStyle/>
+          <a:p>
+            <a:pPr marL="0" indent="0">
+              <a:buNone/>
+            </a:pPr>
+            <a:r>
+              <a:rPr lang="en-US" sz="900" b="1" kern="0" spc="400" dirty="0">
+                <a:solidFill>
+                  <a:srgbClr val="94A3B8"/>
+                </a:solidFill>
+                <a:latin typeface="Calibri" pitchFamily="34" charset="0"/>
+                <a:ea typeface="Calibri" pitchFamily="34" charset="-122"/>
+                <a:cs typeface="Calibri" pitchFamily="34" charset="-120"/>
+              </a:rPr>
+              <a:t>COVERS</a:t>
+            </a:r>
+            <a:endParaRPr lang="en-US" sz="900" dirty="0"/>
+          </a:p>
+        </p:txBody>
+      </p:sp>
+      <p:sp>
+        <p:nvSpPr>
+          <p:cNvPr id="14" name="Text 11"/>
+          <p:cNvSpPr/>
+          <p:nvPr/>
+        </p:nvSpPr>
+        <p:spPr>
+          <a:xfrm>
+            <a:off x="3291840" y="3822192"/>
+            <a:ext cx="2468880" cy="292608"/>
+          </a:xfrm>
+          <a:prstGeom prst="rect">
+            <a:avLst/>
+          </a:prstGeom>
+          <a:noFill/>
+          <a:ln/>
+        </p:spPr>
+        <p:txBody>
+          <a:bodyPr wrap="square" lIns="0" tIns="0" rIns="0" bIns="0" rtlCol="0" anchor="ctr"/>
+          <a:lstStyle/>
+          <a:p>
+            <a:pPr marL="0" indent="0">
+              <a:buNone/>
+            </a:pPr>
+            <a:r>
+              <a:rPr lang="en-US" sz="1400" b="1" dirty="0">
+                <a:solidFill>
+                  <a:srgbClr val="FFFFFF"/>
+                </a:solidFill>
+                <a:latin typeface="Calibri" pitchFamily="34" charset="0"/>
+                <a:ea typeface="Calibri" pitchFamily="34" charset="-122"/>
+                <a:cs typeface="Calibri" pitchFamily="34" charset="-120"/>
+              </a:rPr>
+              <a:t>Semantic + Instance</a:t>
+            </a:r>
+            <a:endParaRPr lang="en-US" sz="1400" dirty="0"/>
+          </a:p>
+        </p:txBody>
+      </p:sp>
+      <p:sp>
+        <p:nvSpPr>
+          <p:cNvPr id="15" name="Text 12"/>
+          <p:cNvSpPr/>
+          <p:nvPr/>
+        </p:nvSpPr>
+        <p:spPr>
+          <a:xfrm>
+            <a:off x="502920" y="4572000"/>
+            <a:ext cx="5486400" cy="274320"/>
+          </a:xfrm>
+          <a:prstGeom prst="rect">
+            <a:avLst/>
+          </a:prstGeom>
+          <a:noFill/>
+          <a:ln/>
+        </p:spPr>
+        <p:txBody>
+          <a:bodyPr wrap="square" lIns="0" tIns="0" rIns="0" bIns="0" rtlCol="0" anchor="ctr"/>
+          <a:lstStyle/>
+          <a:p>
+            <a:pPr marL="0" indent="0">
+              <a:buNone/>
+            </a:pPr>
+            <a:r>
+              <a:rPr lang="en-US" sz="1100" dirty="0">
+                <a:solidFill>
+                  <a:srgbClr val="94A3B8"/>
+                </a:solidFill>
+                <a:latin typeface="Calibri" pitchFamily="34" charset="0"/>
+                <a:ea typeface="Calibri" pitchFamily="34" charset="-122"/>
+                <a:cs typeface="Calibri" pitchFamily="34" charset="-120"/>
+              </a:rPr>
+              <a:t>Phase 3 — Core CV Tasks   |   Week 8</a:t>
+            </a:r>
+            <a:endParaRPr lang="en-US" sz="1100" dirty="0"/>
+          </a:p>
+        </p:txBody>
+      </p:sp>
       <p:pic>
         <p:nvPicPr>
-          <p:cNvPr id="4" name="Image 0" descr="/sessions/cool-beautiful-archimedes/mnt/outputs/session11_images/dbc_instance_overlay.jpg">    </p:cNvPr>
+          <p:cNvPr id="17" name="Picture 16">
+            <a:extLst>
+              <a:ext uri="{FF2B5EF4-FFF2-40B4-BE49-F238E27FC236}">
+                <a16:creationId xmlns:a16="http://schemas.microsoft.com/office/drawing/2014/main" id="{5282DCE6-1E91-29EF-6B89-C3E0A8E4B21F}"/>
+              </a:ext>
+            </a:extLst>
+          </p:cNvPr>
           <p:cNvPicPr>
             <a:picLocks noChangeAspect="1"/>
           </p:cNvPicPr>
           <p:nvPr/>
         </p:nvPicPr>
         <p:blipFill>
-          <a:blip r:embed="rId1"/>
-          <a:srcRect l="0" r="0" t="0" b="0"/>
-          <a:stretch/>
+          <a:blip r:embed="rId3"/>
+          <a:stretch>
+            <a:fillRect/>
+          </a:stretch>
         </p:blipFill>
         <p:spPr>
           <a:xfrm>
-            <a:off x="5212080" y="640080"/>
-            <a:ext cx="3566160" cy="2377440"/>
+            <a:off x="5499700" y="868680"/>
+            <a:ext cx="2871249" cy="2167128"/>
           </a:xfrm>
           <a:prstGeom prst="rect">
             <a:avLst/>
           </a:prstGeom>
         </p:spPr>
       </p:pic>
-      <p:sp>
-        <p:nvSpPr>
-          <p:cNvPr id="5" name="Text 2"/>
-          <p:cNvSpPr/>
-          <p:nvPr/>
-        </p:nvSpPr>
-        <p:spPr>
-          <a:xfrm>
-            <a:off x="5212080" y="3035808"/>
-            <a:ext cx="3566160" cy="274320"/>
-          </a:xfrm>
-          <a:prstGeom prst="rect">
-            <a:avLst/>
-          </a:prstGeom>
-          <a:noFill/>
-          <a:ln/>
-        </p:spPr>
-        <p:txBody>
-          <a:bodyPr wrap="square" lIns="0" tIns="0" rIns="0" bIns="0" rtlCol="0" anchor="ctr"/>
-          <a:lstStyle/>
-          <a:p>
-            <a:pPr algn="ctr" indent="0" marL="0">
-              <a:buNone/>
-            </a:pPr>
-            <a:r>
-              <a:rPr lang="en-US" sz="1000" i="1" dirty="0">
-                <a:solidFill>
-                  <a:srgbClr val="94A3B8"/>
-                </a:solidFill>
-                <a:latin typeface="Calibri" pitchFamily="34" charset="0"/>
-                <a:ea typeface="Calibri" pitchFamily="34" charset="-122"/>
-                <a:cs typeface="Calibri" pitchFamily="34" charset="-120"/>
-              </a:rPr>
-              <a:t>Instance segmentation — per-object masks</a:t>
-            </a:r>
-            <a:endParaRPr lang="en-US" sz="1000" dirty="0"/>
-          </a:p>
-        </p:txBody>
-      </p:sp>
-      <p:sp>
-        <p:nvSpPr>
-          <p:cNvPr id="6" name="Text 3"/>
-          <p:cNvSpPr/>
-          <p:nvPr/>
-        </p:nvSpPr>
-        <p:spPr>
-          <a:xfrm>
-            <a:off x="502920" y="502920"/>
-            <a:ext cx="3657600" cy="320040"/>
-          </a:xfrm>
-          <a:prstGeom prst="rect">
-            <a:avLst/>
-          </a:prstGeom>
-          <a:noFill/>
-          <a:ln/>
-        </p:spPr>
-        <p:txBody>
-          <a:bodyPr wrap="square" lIns="0" tIns="0" rIns="0" bIns="0" rtlCol="0" anchor="ctr"/>
-          <a:lstStyle/>
-          <a:p>
-            <a:pPr indent="0" marL="0">
-              <a:buNone/>
-            </a:pPr>
-            <a:r>
-              <a:rPr lang="en-US" sz="1200" b="1" spc="800" kern="0" dirty="0">
-                <a:solidFill>
-                  <a:srgbClr val="0D9488"/>
-                </a:solidFill>
-                <a:latin typeface="Calibri" pitchFamily="34" charset="0"/>
-                <a:ea typeface="Calibri" pitchFamily="34" charset="-122"/>
-                <a:cs typeface="Calibri" pitchFamily="34" charset="-120"/>
-              </a:rPr>
-              <a:t>SESSION 11</a:t>
-            </a:r>
-            <a:endParaRPr lang="en-US" sz="1200" dirty="0"/>
-          </a:p>
-        </p:txBody>
-      </p:sp>
-      <p:sp>
-        <p:nvSpPr>
-          <p:cNvPr id="7" name="Text 4"/>
-          <p:cNvSpPr/>
-          <p:nvPr/>
-        </p:nvSpPr>
-        <p:spPr>
-          <a:xfrm>
-            <a:off x="502920" y="868680"/>
-            <a:ext cx="4754880" cy="1645920"/>
-          </a:xfrm>
-          <a:prstGeom prst="rect">
-            <a:avLst/>
-          </a:prstGeom>
-          <a:noFill/>
-          <a:ln/>
-        </p:spPr>
-        <p:txBody>
-          <a:bodyPr wrap="square" lIns="0" tIns="0" rIns="0" bIns="0" rtlCol="0" anchor="ctr"/>
-          <a:lstStyle/>
-          <a:p>
-            <a:pPr indent="0" marL="0">
-              <a:buNone/>
-            </a:pPr>
-            <a:r>
-              <a:rPr lang="en-US" sz="4800" b="1" dirty="0">
-                <a:solidFill>
-                  <a:srgbClr val="FFFFFF"/>
-                </a:solidFill>
-                <a:latin typeface="Calibri" pitchFamily="34" charset="0"/>
-                <a:ea typeface="Calibri" pitchFamily="34" charset="-122"/>
-                <a:cs typeface="Calibri" pitchFamily="34" charset="-120"/>
-              </a:rPr>
-              <a:t>Image</a:t>
-            </a:r>
-            <a:endParaRPr lang="en-US" sz="4800" dirty="0"/>
-          </a:p>
-          <a:p>
-            <a:pPr indent="0" marL="0">
-              <a:buNone/>
-            </a:pPr>
-            <a:r>
-              <a:rPr lang="en-US" sz="4800" b="1" dirty="0">
-                <a:solidFill>
-                  <a:srgbClr val="FFFFFF"/>
-                </a:solidFill>
-                <a:latin typeface="Calibri" pitchFamily="34" charset="0"/>
-                <a:ea typeface="Calibri" pitchFamily="34" charset="-122"/>
-                <a:cs typeface="Calibri" pitchFamily="34" charset="-120"/>
-              </a:rPr>
-              <a:t>Segmentation</a:t>
-            </a:r>
-            <a:endParaRPr lang="en-US" sz="4800" dirty="0"/>
-          </a:p>
-        </p:txBody>
-      </p:sp>
-      <p:sp>
-        <p:nvSpPr>
-          <p:cNvPr id="8" name="Text 5"/>
-          <p:cNvSpPr/>
-          <p:nvPr/>
-        </p:nvSpPr>
-        <p:spPr>
-          <a:xfrm>
-            <a:off x="502920" y="2542032"/>
-            <a:ext cx="4754880" cy="457200"/>
-          </a:xfrm>
-          <a:prstGeom prst="rect">
-            <a:avLst/>
-          </a:prstGeom>
-          <a:noFill/>
-          <a:ln/>
-        </p:spPr>
-        <p:txBody>
-          <a:bodyPr wrap="square" lIns="0" tIns="0" rIns="0" bIns="0" rtlCol="0" anchor="ctr"/>
-          <a:lstStyle/>
-          <a:p>
-            <a:pPr indent="0" marL="0">
-              <a:buNone/>
-            </a:pPr>
-            <a:r>
-              <a:rPr lang="en-US" sz="1500" i="1" dirty="0">
-                <a:solidFill>
-                  <a:srgbClr val="94A3B8"/>
-                </a:solidFill>
-                <a:latin typeface="Calibri" pitchFamily="34" charset="0"/>
-                <a:ea typeface="Calibri" pitchFamily="34" charset="-122"/>
-                <a:cs typeface="Calibri" pitchFamily="34" charset="-120"/>
-              </a:rPr>
-              <a:t>From semantic per-pixel labels to per-object masks</a:t>
-            </a:r>
-            <a:endParaRPr lang="en-US" sz="1500" dirty="0"/>
-          </a:p>
-        </p:txBody>
-      </p:sp>
-      <p:sp>
-        <p:nvSpPr>
-          <p:cNvPr id="9" name="Shape 6"/>
-          <p:cNvSpPr/>
-          <p:nvPr/>
-        </p:nvSpPr>
-        <p:spPr>
-          <a:xfrm>
-            <a:off x="502920" y="3611880"/>
-            <a:ext cx="36576" cy="868680"/>
-          </a:xfrm>
-          <a:prstGeom prst="rect">
-            <a:avLst/>
-          </a:prstGeom>
-          <a:solidFill>
-            <a:srgbClr val="0D9488"/>
-          </a:solidFill>
-          <a:ln/>
-        </p:spPr>
-      </p:sp>
-      <p:sp>
-        <p:nvSpPr>
-          <p:cNvPr id="10" name="Text 7"/>
-          <p:cNvSpPr/>
-          <p:nvPr/>
-        </p:nvSpPr>
-        <p:spPr>
-          <a:xfrm>
-            <a:off x="685800" y="3611880"/>
-            <a:ext cx="2011680" cy="228600"/>
-          </a:xfrm>
-          <a:prstGeom prst="rect">
-            <a:avLst/>
-          </a:prstGeom>
-          <a:noFill/>
-          <a:ln/>
-        </p:spPr>
-        <p:txBody>
-          <a:bodyPr wrap="square" lIns="0" tIns="0" rIns="0" bIns="0" rtlCol="0" anchor="ctr"/>
-          <a:lstStyle/>
-          <a:p>
-            <a:pPr indent="0" marL="0">
-              <a:buNone/>
-            </a:pPr>
-            <a:r>
-              <a:rPr lang="en-US" sz="900" b="1" spc="400" kern="0" dirty="0">
-                <a:solidFill>
-                  <a:srgbClr val="94A3B8"/>
-                </a:solidFill>
-                <a:latin typeface="Calibri" pitchFamily="34" charset="0"/>
-                <a:ea typeface="Calibri" pitchFamily="34" charset="-122"/>
-                <a:cs typeface="Calibri" pitchFamily="34" charset="-120"/>
-              </a:rPr>
-              <a:t>TYPE</a:t>
-            </a:r>
-            <a:endParaRPr lang="en-US" sz="900" dirty="0"/>
-          </a:p>
-        </p:txBody>
-      </p:sp>
-      <p:sp>
-        <p:nvSpPr>
-          <p:cNvPr id="11" name="Text 8"/>
-          <p:cNvSpPr/>
-          <p:nvPr/>
-        </p:nvSpPr>
-        <p:spPr>
-          <a:xfrm>
-            <a:off x="685800" y="3822192"/>
-            <a:ext cx="2377440" cy="292608"/>
-          </a:xfrm>
-          <a:prstGeom prst="rect">
-            <a:avLst/>
-          </a:prstGeom>
-          <a:noFill/>
-          <a:ln/>
-        </p:spPr>
-        <p:txBody>
-          <a:bodyPr wrap="square" lIns="0" tIns="0" rIns="0" bIns="0" rtlCol="0" anchor="ctr"/>
-          <a:lstStyle/>
-          <a:p>
-            <a:pPr indent="0" marL="0">
-              <a:buNone/>
-            </a:pPr>
-            <a:r>
-              <a:rPr lang="en-US" sz="1400" b="1" dirty="0">
-                <a:solidFill>
-                  <a:srgbClr val="FFFFFF"/>
-                </a:solidFill>
-                <a:latin typeface="Calibri" pitchFamily="34" charset="0"/>
-                <a:ea typeface="Calibri" pitchFamily="34" charset="-122"/>
-                <a:cs typeface="Calibri" pitchFamily="34" charset="-120"/>
-              </a:rPr>
-              <a:t>Theory + Hands-On</a:t>
-            </a:r>
-            <a:endParaRPr lang="en-US" sz="1400" dirty="0"/>
-          </a:p>
-        </p:txBody>
-      </p:sp>
-      <p:sp>
-        <p:nvSpPr>
-          <p:cNvPr id="12" name="Shape 9"/>
-          <p:cNvSpPr/>
-          <p:nvPr/>
-        </p:nvSpPr>
-        <p:spPr>
-          <a:xfrm>
-            <a:off x="3108960" y="3611880"/>
-            <a:ext cx="36576" cy="868680"/>
-          </a:xfrm>
-          <a:prstGeom prst="rect">
-            <a:avLst/>
-          </a:prstGeom>
-          <a:solidFill>
-            <a:srgbClr val="E11D48"/>
-          </a:solidFill>
-          <a:ln/>
-        </p:spPr>
-      </p:sp>
-      <p:sp>
-        <p:nvSpPr>
-          <p:cNvPr id="13" name="Text 10"/>
-          <p:cNvSpPr/>
-          <p:nvPr/>
-        </p:nvSpPr>
-        <p:spPr>
-          <a:xfrm>
-            <a:off x="3291840" y="3611880"/>
-            <a:ext cx="2377440" cy="228600"/>
-          </a:xfrm>
-          <a:prstGeom prst="rect">
-            <a:avLst/>
-          </a:prstGeom>
-          <a:noFill/>
-          <a:ln/>
-        </p:spPr>
-        <p:txBody>
-          <a:bodyPr wrap="square" lIns="0" tIns="0" rIns="0" bIns="0" rtlCol="0" anchor="ctr"/>
-          <a:lstStyle/>
-          <a:p>
-            <a:pPr indent="0" marL="0">
-              <a:buNone/>
-            </a:pPr>
-            <a:r>
-              <a:rPr lang="en-US" sz="900" b="1" spc="400" kern="0" dirty="0">
-                <a:solidFill>
-                  <a:srgbClr val="94A3B8"/>
-                </a:solidFill>
-                <a:latin typeface="Calibri" pitchFamily="34" charset="0"/>
-                <a:ea typeface="Calibri" pitchFamily="34" charset="-122"/>
-                <a:cs typeface="Calibri" pitchFamily="34" charset="-120"/>
-              </a:rPr>
-              <a:t>COVERS</a:t>
-            </a:r>
-            <a:endParaRPr lang="en-US" sz="900" dirty="0"/>
-          </a:p>
-        </p:txBody>
-      </p:sp>
-      <p:sp>
-        <p:nvSpPr>
-          <p:cNvPr id="14" name="Text 11"/>
-          <p:cNvSpPr/>
-          <p:nvPr/>
-        </p:nvSpPr>
-        <p:spPr>
-          <a:xfrm>
-            <a:off x="3291840" y="3822192"/>
-            <a:ext cx="2468880" cy="292608"/>
-          </a:xfrm>
-          <a:prstGeom prst="rect">
-            <a:avLst/>
-          </a:prstGeom>
-          <a:noFill/>
-          <a:ln/>
-        </p:spPr>
-        <p:txBody>
-          <a:bodyPr wrap="square" lIns="0" tIns="0" rIns="0" bIns="0" rtlCol="0" anchor="ctr"/>
-          <a:lstStyle/>
-          <a:p>
-            <a:pPr indent="0" marL="0">
-              <a:buNone/>
-            </a:pPr>
-            <a:r>
-              <a:rPr lang="en-US" sz="1400" b="1" dirty="0">
-                <a:solidFill>
-                  <a:srgbClr val="FFFFFF"/>
-                </a:solidFill>
-                <a:latin typeface="Calibri" pitchFamily="34" charset="0"/>
-                <a:ea typeface="Calibri" pitchFamily="34" charset="-122"/>
-                <a:cs typeface="Calibri" pitchFamily="34" charset="-120"/>
-              </a:rPr>
-              <a:t>Semantic + Instance</a:t>
-            </a:r>
-            <a:endParaRPr lang="en-US" sz="1400" dirty="0"/>
-          </a:p>
-        </p:txBody>
-      </p:sp>
-      <p:sp>
-        <p:nvSpPr>
-          <p:cNvPr id="15" name="Text 12"/>
-          <p:cNvSpPr/>
-          <p:nvPr/>
-        </p:nvSpPr>
-        <p:spPr>
-          <a:xfrm>
-            <a:off x="502920" y="4572000"/>
-            <a:ext cx="5486400" cy="274320"/>
-          </a:xfrm>
-          <a:prstGeom prst="rect">
-            <a:avLst/>
-          </a:prstGeom>
-          <a:noFill/>
-          <a:ln/>
-        </p:spPr>
-        <p:txBody>
-          <a:bodyPr wrap="square" lIns="0" tIns="0" rIns="0" bIns="0" rtlCol="0" anchor="ctr"/>
-          <a:lstStyle/>
-          <a:p>
-            <a:pPr indent="0" marL="0">
-              <a:buNone/>
-            </a:pPr>
-            <a:r>
-              <a:rPr lang="en-US" sz="1100" dirty="0">
-                <a:solidFill>
-                  <a:srgbClr val="94A3B8"/>
-                </a:solidFill>
-                <a:latin typeface="Calibri" pitchFamily="34" charset="0"/>
-                <a:ea typeface="Calibri" pitchFamily="34" charset="-122"/>
-                <a:cs typeface="Calibri" pitchFamily="34" charset="-120"/>
-              </a:rPr>
-              <a:t>Phase 3 — Core CV Tasks   |   Week 8</a:t>
-            </a:r>
-            <a:endParaRPr lang="en-US" sz="1100" dirty="0"/>
-          </a:p>
-        </p:txBody>
-      </p:sp>
     </p:spTree>
   </p:cSld>
   <p:clrMapOvr>
@@ -2875,6 +2597,7 @@
         <a:solidFill>
           <a:srgbClr val="F8FAFC"/>
         </a:solidFill>
+        <a:effectLst/>
       </p:bgPr>
     </p:bg>
     <p:spTree>
@@ -2952,7 +2675,7 @@
           <a:bodyPr wrap="square" lIns="0" tIns="0" rIns="0" bIns="0" rtlCol="0" anchor="ctr"/>
           <a:lstStyle/>
           <a:p>
-            <a:pPr indent="0" marL="0">
+            <a:pPr marL="0" indent="0">
               <a:buNone/>
             </a:pPr>
             <a:r>
@@ -2991,11 +2714,11 @@
           <a:bodyPr wrap="square" lIns="0" tIns="0" rIns="0" bIns="0" rtlCol="0" anchor="ctr"/>
           <a:lstStyle/>
           <a:p>
-            <a:pPr algn="r" indent="0" marL="0">
-              <a:buNone/>
-            </a:pPr>
-            <a:r>
-              <a:rPr lang="en-US" sz="900" b="1" spc="400" kern="0" dirty="0">
+            <a:pPr marL="0" indent="0" algn="r">
+              <a:buNone/>
+            </a:pPr>
+            <a:r>
+              <a:rPr lang="en-US" sz="900" b="1" kern="0" spc="400" dirty="0">
                 <a:solidFill>
                   <a:srgbClr val="BFDBFE"/>
                 </a:solidFill>
@@ -3050,7 +2773,7 @@
           <a:bodyPr wrap="square" lIns="0" tIns="0" rIns="0" bIns="0" rtlCol="0" anchor="ctr"/>
           <a:lstStyle/>
           <a:p>
-            <a:pPr indent="0" marL="0">
+            <a:pPr marL="0" indent="0">
               <a:buNone/>
             </a:pPr>
             <a:r>
@@ -3092,7 +2815,7 @@
             <a:prstDash val="solid"/>
           </a:ln>
           <a:effectLst>
-            <a:outerShdw sx="100000" sy="100000" kx="0" ky="0" algn="bl" rotWithShape="0" blurRad="101600" dist="25400" dir="5400000">
+            <a:outerShdw blurRad="101600" dist="25400" dir="5400000" algn="bl" rotWithShape="0">
               <a:srgbClr val="000000">
                 <a:alpha val="10000"/>
               </a:srgbClr>
@@ -3141,7 +2864,7 @@
           <a:bodyPr wrap="square" lIns="0" tIns="0" rIns="0" bIns="0" rtlCol="0" anchor="ctr"/>
           <a:lstStyle/>
           <a:p>
-            <a:pPr indent="0" marL="0">
+            <a:pPr marL="0" indent="0">
               <a:buNone/>
             </a:pPr>
             <a:r>
@@ -3180,7 +2903,7 @@
           <a:bodyPr wrap="square" lIns="0" tIns="0" rIns="0" bIns="0" rtlCol="0" anchor="ctr"/>
           <a:lstStyle/>
           <a:p>
-            <a:pPr indent="0" marL="0">
+            <a:pPr marL="0" indent="0">
               <a:buNone/>
             </a:pPr>
             <a:r>
@@ -3222,7 +2945,7 @@
             <a:prstDash val="solid"/>
           </a:ln>
           <a:effectLst>
-            <a:outerShdw sx="100000" sy="100000" kx="0" ky="0" algn="bl" rotWithShape="0" blurRad="101600" dist="25400" dir="5400000">
+            <a:outerShdw blurRad="101600" dist="25400" dir="5400000" algn="bl" rotWithShape="0">
               <a:srgbClr val="000000">
                 <a:alpha val="10000"/>
               </a:srgbClr>
@@ -3271,7 +2994,7 @@
           <a:bodyPr wrap="square" lIns="0" tIns="0" rIns="0" bIns="0" rtlCol="0" anchor="ctr"/>
           <a:lstStyle/>
           <a:p>
-            <a:pPr indent="0" marL="0">
+            <a:pPr marL="0" indent="0">
               <a:buNone/>
             </a:pPr>
             <a:r>
@@ -3310,7 +3033,7 @@
           <a:bodyPr wrap="square" lIns="0" tIns="0" rIns="0" bIns="0" rtlCol="0" anchor="ctr"/>
           <a:lstStyle/>
           <a:p>
-            <a:pPr indent="0" marL="0">
+            <a:pPr marL="0" indent="0">
               <a:buNone/>
             </a:pPr>
             <a:r>
@@ -3352,7 +3075,7 @@
             <a:prstDash val="solid"/>
           </a:ln>
           <a:effectLst>
-            <a:outerShdw sx="100000" sy="100000" kx="0" ky="0" algn="bl" rotWithShape="0" blurRad="101600" dist="25400" dir="5400000">
+            <a:outerShdw blurRad="101600" dist="25400" dir="5400000" algn="bl" rotWithShape="0">
               <a:srgbClr val="000000">
                 <a:alpha val="10000"/>
               </a:srgbClr>
@@ -3401,7 +3124,7 @@
           <a:bodyPr wrap="square" lIns="0" tIns="0" rIns="0" bIns="0" rtlCol="0" anchor="ctr"/>
           <a:lstStyle/>
           <a:p>
-            <a:pPr indent="0" marL="0">
+            <a:pPr marL="0" indent="0">
               <a:buNone/>
             </a:pPr>
             <a:r>
@@ -3440,7 +3163,7 @@
           <a:bodyPr wrap="square" lIns="0" tIns="0" rIns="0" bIns="0" rtlCol="0" anchor="ctr"/>
           <a:lstStyle/>
           <a:p>
-            <a:pPr indent="0" marL="0">
+            <a:pPr marL="0" indent="0">
               <a:buNone/>
             </a:pPr>
             <a:r>
@@ -3482,7 +3205,7 @@
             <a:prstDash val="solid"/>
           </a:ln>
           <a:effectLst>
-            <a:outerShdw sx="100000" sy="100000" kx="0" ky="0" algn="bl" rotWithShape="0" blurRad="101600" dist="25400" dir="5400000">
+            <a:outerShdw blurRad="101600" dist="25400" dir="5400000" algn="bl" rotWithShape="0">
               <a:srgbClr val="000000">
                 <a:alpha val="10000"/>
               </a:srgbClr>
@@ -3531,7 +3254,7 @@
           <a:bodyPr wrap="square" lIns="0" tIns="0" rIns="0" bIns="0" rtlCol="0" anchor="ctr"/>
           <a:lstStyle/>
           <a:p>
-            <a:pPr indent="0" marL="0">
+            <a:pPr marL="0" indent="0">
               <a:buNone/>
             </a:pPr>
             <a:r>
@@ -3570,7 +3293,7 @@
           <a:bodyPr wrap="square" lIns="0" tIns="0" rIns="0" bIns="0" rtlCol="0" anchor="ctr"/>
           <a:lstStyle/>
           <a:p>
-            <a:pPr indent="0" marL="0">
+            <a:pPr marL="0" indent="0">
               <a:buNone/>
             </a:pPr>
             <a:r>
@@ -3590,15 +3313,15 @@
       </p:sp>
       <p:pic>
         <p:nvPicPr>
-          <p:cNvPr id="24" name="Image 0" descr="/sessions/cool-beautiful-archimedes/mnt/outputs/session11_images/cells.jpg">    </p:cNvPr>
+          <p:cNvPr id="24" name="Image 0" descr="/sessions/cool-beautiful-archimedes/mnt/outputs/session11_images/cells.jpg"/>
           <p:cNvPicPr>
             <a:picLocks noChangeAspect="1"/>
           </p:cNvPicPr>
           <p:nvPr/>
         </p:nvPicPr>
         <p:blipFill>
-          <a:blip r:embed="rId1"/>
-          <a:srcRect l="0" r="0" t="0" b="0"/>
+          <a:blip r:embed="rId3"/>
+          <a:srcRect/>
           <a:stretch/>
         </p:blipFill>
         <p:spPr>
@@ -3613,15 +3336,15 @@
       </p:pic>
       <p:pic>
         <p:nvPicPr>
-          <p:cNvPr id="25" name="Image 1" descr="/sessions/cool-beautiful-archimedes/mnt/outputs/session11_images/cells_mask.png">    </p:cNvPr>
+          <p:cNvPr id="25" name="Image 1" descr="/sessions/cool-beautiful-archimedes/mnt/outputs/session11_images/cells_mask.png"/>
           <p:cNvPicPr>
             <a:picLocks noChangeAspect="1"/>
           </p:cNvPicPr>
           <p:nvPr/>
         </p:nvPicPr>
         <p:blipFill>
-          <a:blip r:embed="rId2"/>
-          <a:srcRect l="0" r="0" t="0" b="0"/>
+          <a:blip r:embed="rId4"/>
+          <a:srcRect/>
           <a:stretch/>
         </p:blipFill>
         <p:spPr>
@@ -3655,11 +3378,11 @@
           <a:bodyPr wrap="square" lIns="0" tIns="0" rIns="0" bIns="0" rtlCol="0" anchor="ctr"/>
           <a:lstStyle/>
           <a:p>
-            <a:pPr algn="ctr" indent="0" marL="0">
-              <a:buNone/>
-            </a:pPr>
-            <a:r>
-              <a:rPr lang="en-US" sz="900" b="1" spc="300" kern="0" dirty="0">
+            <a:pPr marL="0" indent="0" algn="ctr">
+              <a:buNone/>
+            </a:pPr>
+            <a:r>
+              <a:rPr lang="en-US" sz="900" b="1" kern="0" spc="300" dirty="0">
                 <a:solidFill>
                   <a:srgbClr val="64748B"/>
                 </a:solidFill>
@@ -3694,11 +3417,11 @@
           <a:bodyPr wrap="square" lIns="0" tIns="0" rIns="0" bIns="0" rtlCol="0" anchor="ctr"/>
           <a:lstStyle/>
           <a:p>
-            <a:pPr algn="ctr" indent="0" marL="0">
-              <a:buNone/>
-            </a:pPr>
-            <a:r>
-              <a:rPr lang="en-US" sz="900" b="1" spc="300" kern="0" dirty="0">
+            <a:pPr marL="0" indent="0" algn="ctr">
+              <a:buNone/>
+            </a:pPr>
+            <a:r>
+              <a:rPr lang="en-US" sz="900" b="1" kern="0" spc="300" dirty="0">
                 <a:solidFill>
                   <a:srgbClr val="64748B"/>
                 </a:solidFill>
@@ -3733,7 +3456,7 @@
           <a:bodyPr wrap="square" lIns="0" tIns="0" rIns="0" bIns="0" rtlCol="0" anchor="ctr"/>
           <a:lstStyle/>
           <a:p>
-            <a:pPr indent="0" marL="0">
+            <a:pPr marL="0" indent="0">
               <a:buNone/>
             </a:pPr>
             <a:r>
@@ -3767,6 +3490,7 @@
         <a:solidFill>
           <a:srgbClr val="F8FAFC"/>
         </a:solidFill>
+        <a:effectLst/>
       </p:bgPr>
     </p:bg>
     <p:spTree>
@@ -3844,7 +3568,7 @@
           <a:bodyPr wrap="square" lIns="0" tIns="0" rIns="0" bIns="0" rtlCol="0" anchor="ctr"/>
           <a:lstStyle/>
           <a:p>
-            <a:pPr indent="0" marL="0">
+            <a:pPr marL="0" indent="0">
               <a:buNone/>
             </a:pPr>
             <a:r>
@@ -3883,11 +3607,11 @@
           <a:bodyPr wrap="square" lIns="0" tIns="0" rIns="0" bIns="0" rtlCol="0" anchor="ctr"/>
           <a:lstStyle/>
           <a:p>
-            <a:pPr algn="r" indent="0" marL="0">
-              <a:buNone/>
-            </a:pPr>
-            <a:r>
-              <a:rPr lang="en-US" sz="900" b="1" spc="400" kern="0" dirty="0">
+            <a:pPr marL="0" indent="0" algn="r">
+              <a:buNone/>
+            </a:pPr>
+            <a:r>
+              <a:rPr lang="en-US" sz="900" b="1" kern="0" spc="400" dirty="0">
                 <a:solidFill>
                   <a:srgbClr val="BFDBFE"/>
                 </a:solidFill>
@@ -3942,7 +3666,7 @@
           <a:bodyPr wrap="square" lIns="0" tIns="0" rIns="0" bIns="0" rtlCol="0" anchor="ctr"/>
           <a:lstStyle/>
           <a:p>
-            <a:pPr indent="0" marL="0">
+            <a:pPr marL="0" indent="0">
               <a:buNone/>
             </a:pPr>
             <a:r>
@@ -3981,11 +3705,11 @@
           <a:bodyPr wrap="square" lIns="0" tIns="0" rIns="0" bIns="0" rtlCol="0" anchor="ctr"/>
           <a:lstStyle/>
           <a:p>
-            <a:pPr indent="0" marL="0">
-              <a:buNone/>
-            </a:pPr>
-            <a:r>
-              <a:rPr lang="en-US" sz="1000" b="1" spc="400" kern="0" dirty="0">
+            <a:pPr marL="0" indent="0">
+              <a:buNone/>
+            </a:pPr>
+            <a:r>
+              <a:rPr lang="en-US" sz="1000" b="1" kern="0" spc="400" dirty="0">
                 <a:solidFill>
                   <a:srgbClr val="64748B"/>
                 </a:solidFill>
@@ -4023,7 +3747,7 @@
             <a:prstDash val="solid"/>
           </a:ln>
           <a:effectLst>
-            <a:outerShdw sx="100000" sy="100000" kx="0" ky="0" algn="bl" rotWithShape="0" blurRad="101600" dist="25400" dir="5400000">
+            <a:outerShdw blurRad="101600" dist="25400" dir="5400000" algn="bl" rotWithShape="0">
               <a:srgbClr val="000000">
                 <a:alpha val="10000"/>
               </a:srgbClr>
@@ -4072,7 +3796,7 @@
           <a:bodyPr wrap="square" lIns="0" tIns="0" rIns="0" bIns="0" rtlCol="0" anchor="ctr"/>
           <a:lstStyle/>
           <a:p>
-            <a:pPr indent="0" marL="0">
+            <a:pPr marL="0" indent="0">
               <a:buNone/>
             </a:pPr>
             <a:r>
@@ -4111,7 +3835,7 @@
           <a:bodyPr wrap="square" lIns="0" tIns="0" rIns="0" bIns="0" rtlCol="0" anchor="ctr"/>
           <a:lstStyle/>
           <a:p>
-            <a:pPr indent="0" marL="0">
+            <a:pPr marL="0" indent="0">
               <a:buNone/>
             </a:pPr>
             <a:r>
@@ -4153,7 +3877,7 @@
             <a:prstDash val="solid"/>
           </a:ln>
           <a:effectLst>
-            <a:outerShdw sx="100000" sy="100000" kx="0" ky="0" algn="bl" rotWithShape="0" blurRad="101600" dist="25400" dir="5400000">
+            <a:outerShdw blurRad="101600" dist="25400" dir="5400000" algn="bl" rotWithShape="0">
               <a:srgbClr val="000000">
                 <a:alpha val="10000"/>
               </a:srgbClr>
@@ -4202,7 +3926,7 @@
           <a:bodyPr wrap="square" lIns="0" tIns="0" rIns="0" bIns="0" rtlCol="0" anchor="ctr"/>
           <a:lstStyle/>
           <a:p>
-            <a:pPr indent="0" marL="0">
+            <a:pPr marL="0" indent="0">
               <a:buNone/>
             </a:pPr>
             <a:r>
@@ -4241,7 +3965,7 @@
           <a:bodyPr wrap="square" lIns="0" tIns="0" rIns="0" bIns="0" rtlCol="0" anchor="ctr"/>
           <a:lstStyle/>
           <a:p>
-            <a:pPr indent="0" marL="0">
+            <a:pPr marL="0" indent="0">
               <a:buNone/>
             </a:pPr>
             <a:r>
@@ -4283,7 +4007,7 @@
             <a:prstDash val="solid"/>
           </a:ln>
           <a:effectLst>
-            <a:outerShdw sx="100000" sy="100000" kx="0" ky="0" algn="bl" rotWithShape="0" blurRad="101600" dist="25400" dir="5400000">
+            <a:outerShdw blurRad="101600" dist="25400" dir="5400000" algn="bl" rotWithShape="0">
               <a:srgbClr val="000000">
                 <a:alpha val="10000"/>
               </a:srgbClr>
@@ -4332,7 +4056,7 @@
           <a:bodyPr wrap="square" lIns="0" tIns="0" rIns="0" bIns="0" rtlCol="0" anchor="ctr"/>
           <a:lstStyle/>
           <a:p>
-            <a:pPr indent="0" marL="0">
+            <a:pPr marL="0" indent="0">
               <a:buNone/>
             </a:pPr>
             <a:r>
@@ -4371,7 +4095,7 @@
           <a:bodyPr wrap="square" lIns="0" tIns="0" rIns="0" bIns="0" rtlCol="0" anchor="ctr"/>
           <a:lstStyle/>
           <a:p>
-            <a:pPr indent="0" marL="0">
+            <a:pPr marL="0" indent="0">
               <a:buNone/>
             </a:pPr>
             <a:r>
@@ -4413,7 +4137,7 @@
             <a:prstDash val="solid"/>
           </a:ln>
           <a:effectLst>
-            <a:outerShdw sx="100000" sy="100000" kx="0" ky="0" algn="bl" rotWithShape="0" blurRad="101600" dist="25400" dir="5400000">
+            <a:outerShdw blurRad="101600" dist="25400" dir="5400000" algn="bl" rotWithShape="0">
               <a:srgbClr val="000000">
                 <a:alpha val="10000"/>
               </a:srgbClr>
@@ -4462,7 +4186,7 @@
           <a:bodyPr wrap="square" lIns="0" tIns="0" rIns="0" bIns="0" rtlCol="0" anchor="ctr"/>
           <a:lstStyle/>
           <a:p>
-            <a:pPr indent="0" marL="0">
+            <a:pPr marL="0" indent="0">
               <a:buNone/>
             </a:pPr>
             <a:r>
@@ -4501,7 +4225,7 @@
           <a:bodyPr wrap="square" lIns="0" tIns="0" rIns="0" bIns="0" rtlCol="0" anchor="ctr"/>
           <a:lstStyle/>
           <a:p>
-            <a:pPr indent="0" marL="0">
+            <a:pPr marL="0" indent="0">
               <a:buNone/>
             </a:pPr>
             <a:r>
@@ -4540,11 +4264,11 @@
           <a:bodyPr wrap="square" lIns="0" tIns="0" rIns="0" bIns="0" rtlCol="0" anchor="ctr"/>
           <a:lstStyle/>
           <a:p>
-            <a:pPr indent="0" marL="0">
-              <a:buNone/>
-            </a:pPr>
-            <a:r>
-              <a:rPr lang="en-US" sz="1000" b="1" spc="400" kern="0" dirty="0">
+            <a:pPr marL="0" indent="0">
+              <a:buNone/>
+            </a:pPr>
+            <a:r>
+              <a:rPr lang="en-US" sz="1000" b="1" kern="0" spc="400" dirty="0">
                 <a:solidFill>
                   <a:srgbClr val="64748B"/>
                 </a:solidFill>
@@ -4582,7 +4306,7 @@
             <a:prstDash val="solid"/>
           </a:ln>
           <a:effectLst>
-            <a:outerShdw sx="100000" sy="100000" kx="0" ky="0" algn="bl" rotWithShape="0" blurRad="101600" dist="25400" dir="5400000">
+            <a:outerShdw blurRad="101600" dist="25400" dir="5400000" algn="bl" rotWithShape="0">
               <a:srgbClr val="000000">
                 <a:alpha val="10000"/>
               </a:srgbClr>
@@ -4611,7 +4335,7 @@
           <a:bodyPr wrap="square" lIns="0" tIns="0" rIns="0" bIns="0" rtlCol="0" anchor="ctr"/>
           <a:lstStyle/>
           <a:p>
-            <a:pPr indent="0" marL="0">
+            <a:pPr marL="0" indent="0">
               <a:buNone/>
             </a:pPr>
             <a:r>
@@ -4650,7 +4374,7 @@
           <a:bodyPr wrap="square" lIns="0" tIns="0" rIns="0" bIns="0" rtlCol="0" anchor="ctr"/>
           <a:lstStyle/>
           <a:p>
-            <a:pPr indent="0" marL="0">
+            <a:pPr marL="0" indent="0">
               <a:buNone/>
             </a:pPr>
             <a:r>
@@ -4689,7 +4413,7 @@
           <a:bodyPr wrap="square" lIns="0" tIns="0" rIns="0" bIns="0" rtlCol="0" anchor="ctr"/>
           <a:lstStyle/>
           <a:p>
-            <a:pPr indent="0" marL="0">
+            <a:pPr marL="0" indent="0">
               <a:buNone/>
             </a:pPr>
             <a:r>
@@ -4728,7 +4452,7 @@
           <a:bodyPr wrap="square" lIns="0" tIns="0" rIns="0" bIns="0" rtlCol="0" anchor="ctr"/>
           <a:lstStyle/>
           <a:p>
-            <a:pPr indent="0" marL="0">
+            <a:pPr marL="0" indent="0">
               <a:buNone/>
             </a:pPr>
             <a:r>
@@ -4770,7 +4494,7 @@
             <a:prstDash val="solid"/>
           </a:ln>
           <a:effectLst>
-            <a:outerShdw sx="100000" sy="100000" kx="0" ky="0" algn="bl" rotWithShape="0" blurRad="101600" dist="25400" dir="5400000">
+            <a:outerShdw blurRad="101600" dist="25400" dir="5400000" algn="bl" rotWithShape="0">
               <a:srgbClr val="000000">
                 <a:alpha val="10000"/>
               </a:srgbClr>
@@ -4819,7 +4543,7 @@
           <a:bodyPr wrap="square" lIns="0" tIns="0" rIns="0" bIns="0" rtlCol="0" anchor="ctr"/>
           <a:lstStyle/>
           <a:p>
-            <a:pPr indent="0" marL="0">
+            <a:pPr marL="0" indent="0">
               <a:buNone/>
             </a:pPr>
             <a:r>
@@ -4858,7 +4582,7 @@
           <a:bodyPr wrap="square" lIns="0" tIns="0" rIns="0" bIns="0" rtlCol="0" anchor="ctr"/>
           <a:lstStyle/>
           <a:p>
-            <a:pPr indent="0" marL="0">
+            <a:pPr marL="0" indent="0">
               <a:buNone/>
             </a:pPr>
             <a:r>
@@ -4900,7 +4624,7 @@
             <a:prstDash val="solid"/>
           </a:ln>
           <a:effectLst>
-            <a:outerShdw sx="100000" sy="100000" kx="0" ky="0" algn="bl" rotWithShape="0" blurRad="101600" dist="25400" dir="5400000">
+            <a:outerShdw blurRad="101600" dist="25400" dir="5400000" algn="bl" rotWithShape="0">
               <a:srgbClr val="000000">
                 <a:alpha val="10000"/>
               </a:srgbClr>
@@ -4949,7 +4673,7 @@
           <a:bodyPr wrap="square" lIns="0" tIns="0" rIns="0" bIns="0" rtlCol="0" anchor="ctr"/>
           <a:lstStyle/>
           <a:p>
-            <a:pPr indent="0" marL="0">
+            <a:pPr marL="0" indent="0">
               <a:buNone/>
             </a:pPr>
             <a:r>
@@ -4988,7 +4712,7 @@
           <a:bodyPr wrap="square" lIns="0" tIns="0" rIns="0" bIns="0" rtlCol="0" anchor="ctr"/>
           <a:lstStyle/>
           <a:p>
-            <a:pPr indent="0" marL="0">
+            <a:pPr marL="0" indent="0">
               <a:buNone/>
             </a:pPr>
             <a:r>
@@ -5030,7 +4754,7 @@
             <a:prstDash val="solid"/>
           </a:ln>
           <a:effectLst>
-            <a:outerShdw sx="100000" sy="100000" kx="0" ky="0" algn="bl" rotWithShape="0" blurRad="101600" dist="25400" dir="5400000">
+            <a:outerShdw blurRad="101600" dist="25400" dir="5400000" algn="bl" rotWithShape="0">
               <a:srgbClr val="000000">
                 <a:alpha val="10000"/>
               </a:srgbClr>
@@ -5113,7 +4837,7 @@
           <a:bodyPr wrap="square" lIns="0" tIns="0" rIns="0" bIns="0" rtlCol="0" anchor="ctr"/>
           <a:lstStyle/>
           <a:p>
-            <a:pPr indent="0" marL="0">
+            <a:pPr marL="0" indent="0">
               <a:buNone/>
             </a:pPr>
             <a:r>
@@ -5152,7 +4876,7 @@
           <a:bodyPr wrap="square" lIns="0" tIns="0" rIns="0" bIns="0" rtlCol="0" anchor="ctr"/>
           <a:lstStyle/>
           <a:p>
-            <a:pPr indent="0" marL="0">
+            <a:pPr marL="0" indent="0">
               <a:buNone/>
             </a:pPr>
             <a:r>
@@ -5191,7 +4915,7 @@
           <a:bodyPr wrap="square" lIns="0" tIns="0" rIns="0" bIns="0" rtlCol="0" anchor="ctr"/>
           <a:lstStyle/>
           <a:p>
-            <a:pPr indent="0" marL="0">
+            <a:pPr marL="0" indent="0">
               <a:buNone/>
             </a:pPr>
             <a:r>
@@ -5230,7 +4954,7 @@
           <a:bodyPr wrap="square" lIns="0" tIns="0" rIns="0" bIns="0" rtlCol="0" anchor="ctr"/>
           <a:lstStyle/>
           <a:p>
-            <a:pPr indent="0" marL="0">
+            <a:pPr marL="0" indent="0">
               <a:buNone/>
             </a:pPr>
             <a:r>
@@ -5264,6 +4988,7 @@
         <a:solidFill>
           <a:srgbClr val="081930"/>
         </a:solidFill>
+        <a:effectLst/>
       </p:bgPr>
     </p:bg>
     <p:spTree>
@@ -5321,11 +5046,11 @@
           <a:bodyPr wrap="square" lIns="0" tIns="0" rIns="0" bIns="0" rtlCol="0" anchor="ctr"/>
           <a:lstStyle/>
           <a:p>
-            <a:pPr indent="0" marL="0">
-              <a:buNone/>
-            </a:pPr>
-            <a:r>
-              <a:rPr lang="en-US" sz="1400" b="1" spc="600" kern="0" dirty="0">
+            <a:pPr marL="0" indent="0">
+              <a:buNone/>
+            </a:pPr>
+            <a:r>
+              <a:rPr lang="en-US" sz="1400" b="1" kern="0" spc="600" dirty="0">
                 <a:solidFill>
                   <a:srgbClr val="E11D48"/>
                 </a:solidFill>
@@ -5360,7 +5085,7 @@
           <a:bodyPr wrap="square" lIns="0" tIns="0" rIns="0" bIns="0" rtlCol="0" anchor="ctr"/>
           <a:lstStyle/>
           <a:p>
-            <a:pPr indent="0" marL="0">
+            <a:pPr marL="0" indent="0">
               <a:buNone/>
             </a:pPr>
             <a:r>
@@ -5377,7 +5102,7 @@
             <a:endParaRPr lang="en-US" sz="4600" dirty="0"/>
           </a:p>
           <a:p>
-            <a:pPr indent="0" marL="0">
+            <a:pPr marL="0" indent="0">
               <a:buNone/>
             </a:pPr>
             <a:r>
@@ -5416,7 +5141,7 @@
           <a:bodyPr wrap="square" lIns="0" tIns="0" rIns="0" bIns="0" rtlCol="0" anchor="ctr"/>
           <a:lstStyle/>
           <a:p>
-            <a:pPr indent="0" marL="0">
+            <a:pPr marL="0" indent="0">
               <a:buNone/>
             </a:pPr>
             <a:r>
@@ -5431,71 +5156,79 @@
               <a:t>Per-object masks — Mask R-CNN &amp; YOLOv8-seg</a:t>
             </a:r>
             <a:endParaRPr lang="en-US" sz="1600" dirty="0"/>
+          </a:p>
+        </p:txBody>
+      </p:sp>
+      <p:sp>
+        <p:nvSpPr>
+          <p:cNvPr id="7" name="Text 4"/>
+          <p:cNvSpPr/>
+          <p:nvPr/>
+        </p:nvSpPr>
+        <p:spPr>
+          <a:xfrm>
+            <a:off x="5157178" y="3131820"/>
+            <a:ext cx="2651760" cy="274320"/>
+          </a:xfrm>
+          <a:prstGeom prst="rect">
+            <a:avLst/>
+          </a:prstGeom>
+          <a:noFill/>
+          <a:ln/>
+        </p:spPr>
+        <p:txBody>
+          <a:bodyPr wrap="square" lIns="0" tIns="0" rIns="0" bIns="0" rtlCol="0" anchor="ctr"/>
+          <a:lstStyle/>
+          <a:p>
+            <a:pPr marL="0" indent="0" algn="ctr">
+              <a:buNone/>
+            </a:pPr>
+            <a:r>
+              <a:rPr lang="en-US" sz="1000" i="1" dirty="0">
+                <a:solidFill>
+                  <a:srgbClr val="94A3B8"/>
+                </a:solidFill>
+                <a:latin typeface="Calibri" pitchFamily="34" charset="0"/>
+                <a:ea typeface="Calibri" pitchFamily="34" charset="-122"/>
+                <a:cs typeface="Calibri" pitchFamily="34" charset="-120"/>
+              </a:rPr>
+              <a:t>Each object gets its own mask &amp; ID</a:t>
+            </a:r>
+            <a:endParaRPr lang="en-US" sz="1000" dirty="0"/>
           </a:p>
         </p:txBody>
       </p:sp>
       <p:pic>
         <p:nvPicPr>
-          <p:cNvPr id="6" name="Image 0" descr="/sessions/cool-beautiful-archimedes/mnt/outputs/session11_images/dbc_instance_overlay.jpg">    </p:cNvPr>
+          <p:cNvPr id="8" name="Picture 7">
+            <a:extLst>
+              <a:ext uri="{FF2B5EF4-FFF2-40B4-BE49-F238E27FC236}">
+                <a16:creationId xmlns:a16="http://schemas.microsoft.com/office/drawing/2014/main" id="{2DF3F056-CC5D-2416-F6D7-3C1C30AB484B}"/>
+              </a:ext>
+            </a:extLst>
+          </p:cNvPr>
           <p:cNvPicPr>
             <a:picLocks noChangeAspect="1"/>
           </p:cNvPicPr>
           <p:nvPr/>
         </p:nvPicPr>
         <p:blipFill>
-          <a:blip r:embed="rId1"/>
-          <a:srcRect l="0" r="0" t="0" b="0"/>
-          <a:stretch/>
+          <a:blip r:embed="rId3"/>
+          <a:srcRect t="3358"/>
+          <a:stretch>
+            <a:fillRect/>
+          </a:stretch>
         </p:blipFill>
         <p:spPr>
           <a:xfrm>
-            <a:off x="6126480" y="1005840"/>
-            <a:ext cx="2651760" cy="2651760"/>
+            <a:off x="4206240" y="1417320"/>
+            <a:ext cx="4553636" cy="1691640"/>
           </a:xfrm>
           <a:prstGeom prst="rect">
             <a:avLst/>
           </a:prstGeom>
         </p:spPr>
       </p:pic>
-      <p:sp>
-        <p:nvSpPr>
-          <p:cNvPr id="7" name="Text 4"/>
-          <p:cNvSpPr/>
-          <p:nvPr/>
-        </p:nvSpPr>
-        <p:spPr>
-          <a:xfrm>
-            <a:off x="6126480" y="3703320"/>
-            <a:ext cx="2651760" cy="274320"/>
-          </a:xfrm>
-          <a:prstGeom prst="rect">
-            <a:avLst/>
-          </a:prstGeom>
-          <a:noFill/>
-          <a:ln/>
-        </p:spPr>
-        <p:txBody>
-          <a:bodyPr wrap="square" lIns="0" tIns="0" rIns="0" bIns="0" rtlCol="0" anchor="ctr"/>
-          <a:lstStyle/>
-          <a:p>
-            <a:pPr algn="ctr" indent="0" marL="0">
-              <a:buNone/>
-            </a:pPr>
-            <a:r>
-              <a:rPr lang="en-US" sz="1000" i="1" dirty="0">
-                <a:solidFill>
-                  <a:srgbClr val="94A3B8"/>
-                </a:solidFill>
-                <a:latin typeface="Calibri" pitchFamily="34" charset="0"/>
-                <a:ea typeface="Calibri" pitchFamily="34" charset="-122"/>
-                <a:cs typeface="Calibri" pitchFamily="34" charset="-120"/>
-              </a:rPr>
-              <a:t>Each object gets its own mask &amp; ID</a:t>
-            </a:r>
-            <a:endParaRPr lang="en-US" sz="1000" dirty="0"/>
-          </a:p>
-        </p:txBody>
-      </p:sp>
     </p:spTree>
   </p:cSld>
   <p:clrMapOvr>
@@ -5512,6 +5245,7 @@
         <a:solidFill>
           <a:srgbClr val="F8FAFC"/>
         </a:solidFill>
+        <a:effectLst/>
       </p:bgPr>
     </p:bg>
     <p:spTree>
@@ -5589,7 +5323,7 @@
           <a:bodyPr wrap="square" lIns="0" tIns="0" rIns="0" bIns="0" rtlCol="0" anchor="ctr"/>
           <a:lstStyle/>
           <a:p>
-            <a:pPr indent="0" marL="0">
+            <a:pPr marL="0" indent="0">
               <a:buNone/>
             </a:pPr>
             <a:r>
@@ -5628,11 +5362,11 @@
           <a:bodyPr wrap="square" lIns="0" tIns="0" rIns="0" bIns="0" rtlCol="0" anchor="ctr"/>
           <a:lstStyle/>
           <a:p>
-            <a:pPr algn="r" indent="0" marL="0">
-              <a:buNone/>
-            </a:pPr>
-            <a:r>
-              <a:rPr lang="en-US" sz="900" b="1" spc="400" kern="0" dirty="0">
+            <a:pPr marL="0" indent="0" algn="r">
+              <a:buNone/>
+            </a:pPr>
+            <a:r>
+              <a:rPr lang="en-US" sz="900" b="1" kern="0" spc="400" dirty="0">
                 <a:solidFill>
                   <a:srgbClr val="BFDBFE"/>
                 </a:solidFill>
@@ -5687,7 +5421,7 @@
           <a:bodyPr wrap="square" lIns="0" tIns="0" rIns="0" bIns="0" rtlCol="0" anchor="ctr"/>
           <a:lstStyle/>
           <a:p>
-            <a:pPr indent="0" marL="0">
+            <a:pPr marL="0" indent="0">
               <a:buNone/>
             </a:pPr>
             <a:r>
@@ -5705,875 +5439,959 @@
           </a:p>
         </p:txBody>
       </p:sp>
-      <p:sp>
-        <p:nvSpPr>
-          <p:cNvPr id="8" name="Shape 6"/>
-          <p:cNvSpPr/>
-          <p:nvPr/>
-        </p:nvSpPr>
-        <p:spPr>
-          <a:xfrm>
-            <a:off x="384048" y="914400"/>
-            <a:ext cx="4114800" cy="3657600"/>
-          </a:xfrm>
-          <a:prstGeom prst="rect">
-            <a:avLst/>
-          </a:prstGeom>
-          <a:solidFill>
-            <a:srgbClr val="FFFFFF"/>
-          </a:solidFill>
-          <a:ln w="9525">
-            <a:solidFill>
-              <a:srgbClr val="E2E8F0"/>
-            </a:solidFill>
-            <a:prstDash val="solid"/>
-          </a:ln>
-          <a:effectLst>
-            <a:outerShdw sx="100000" sy="100000" kx="0" ky="0" algn="bl" rotWithShape="0" blurRad="101600" dist="25400" dir="5400000">
-              <a:srgbClr val="000000">
-                <a:alpha val="10000"/>
-              </a:srgbClr>
-            </a:outerShdw>
-          </a:effectLst>
-        </p:spPr>
-      </p:sp>
-      <p:sp>
-        <p:nvSpPr>
-          <p:cNvPr id="9" name="Shape 7"/>
-          <p:cNvSpPr/>
-          <p:nvPr/>
-        </p:nvSpPr>
-        <p:spPr>
-          <a:xfrm>
-            <a:off x="384048" y="914400"/>
-            <a:ext cx="64008" cy="3657600"/>
-          </a:xfrm>
-          <a:prstGeom prst="rect">
-            <a:avLst/>
-          </a:prstGeom>
-          <a:solidFill>
-            <a:srgbClr val="6366F1"/>
-          </a:solidFill>
-          <a:ln/>
-        </p:spPr>
-      </p:sp>
-      <p:sp>
-        <p:nvSpPr>
-          <p:cNvPr id="10" name="Text 8"/>
-          <p:cNvSpPr/>
-          <p:nvPr/>
-        </p:nvSpPr>
-        <p:spPr>
-          <a:xfrm>
-            <a:off x="548640" y="1051560"/>
-            <a:ext cx="3840480" cy="320040"/>
-          </a:xfrm>
-          <a:prstGeom prst="rect">
-            <a:avLst/>
-          </a:prstGeom>
-          <a:noFill/>
-          <a:ln/>
-        </p:spPr>
-        <p:txBody>
-          <a:bodyPr wrap="square" lIns="0" tIns="0" rIns="0" bIns="0" rtlCol="0" anchor="ctr"/>
-          <a:lstStyle/>
-          <a:p>
-            <a:pPr indent="0" marL="0">
-              <a:buNone/>
-            </a:pPr>
-            <a:r>
-              <a:rPr lang="en-US" sz="1400" b="1" dirty="0">
-                <a:solidFill>
-                  <a:srgbClr val="1E293B"/>
-                </a:solidFill>
-                <a:latin typeface="Calibri" pitchFamily="34" charset="0"/>
-                <a:ea typeface="Calibri" pitchFamily="34" charset="-122"/>
-                <a:cs typeface="Calibri" pitchFamily="34" charset="-120"/>
-              </a:rPr>
-              <a:t>Start with: Faster R-CNN</a:t>
-            </a:r>
-            <a:endParaRPr lang="en-US" sz="1400" dirty="0"/>
-          </a:p>
-        </p:txBody>
-      </p:sp>
-      <p:sp>
-        <p:nvSpPr>
-          <p:cNvPr id="11" name="Text 9"/>
-          <p:cNvSpPr/>
-          <p:nvPr/>
-        </p:nvSpPr>
-        <p:spPr>
-          <a:xfrm>
-            <a:off x="548640" y="1371600"/>
-            <a:ext cx="3840480" cy="274320"/>
-          </a:xfrm>
-          <a:prstGeom prst="rect">
-            <a:avLst/>
-          </a:prstGeom>
-          <a:noFill/>
-          <a:ln/>
-        </p:spPr>
-        <p:txBody>
-          <a:bodyPr wrap="square" lIns="0" tIns="0" rIns="0" bIns="0" rtlCol="0" anchor="ctr"/>
-          <a:lstStyle/>
-          <a:p>
-            <a:pPr indent="0" marL="0">
-              <a:buNone/>
-            </a:pPr>
-            <a:r>
-              <a:rPr lang="en-US" sz="1050" i="1" dirty="0">
-                <a:solidFill>
-                  <a:srgbClr val="64748B"/>
-                </a:solidFill>
-                <a:latin typeface="Calibri" pitchFamily="34" charset="0"/>
-                <a:ea typeface="Calibri" pitchFamily="34" charset="-122"/>
-                <a:cs typeface="Calibri" pitchFamily="34" charset="-120"/>
-              </a:rPr>
-              <a:t>Two-stage object detector you already know:</a:t>
-            </a:r>
-            <a:endParaRPr lang="en-US" sz="1050" dirty="0"/>
-          </a:p>
-        </p:txBody>
-      </p:sp>
-      <p:sp>
-        <p:nvSpPr>
-          <p:cNvPr id="12" name="Shape 10"/>
-          <p:cNvSpPr/>
-          <p:nvPr/>
-        </p:nvSpPr>
-        <p:spPr>
-          <a:xfrm>
-            <a:off x="594360" y="1856232"/>
-            <a:ext cx="109728" cy="109728"/>
-          </a:xfrm>
-          <a:prstGeom prst="ellipse">
-            <a:avLst/>
-          </a:prstGeom>
-          <a:solidFill>
-            <a:srgbClr val="6366F1"/>
-          </a:solidFill>
-          <a:ln/>
-        </p:spPr>
-      </p:sp>
-      <p:sp>
-        <p:nvSpPr>
-          <p:cNvPr id="13" name="Text 11"/>
-          <p:cNvSpPr/>
-          <p:nvPr/>
-        </p:nvSpPr>
-        <p:spPr>
-          <a:xfrm>
-            <a:off x="777240" y="1783080"/>
-            <a:ext cx="3611880" cy="274320"/>
-          </a:xfrm>
-          <a:prstGeom prst="rect">
-            <a:avLst/>
-          </a:prstGeom>
-          <a:noFill/>
-          <a:ln/>
-        </p:spPr>
-        <p:txBody>
-          <a:bodyPr wrap="square" lIns="0" tIns="0" rIns="0" bIns="0" rtlCol="0" anchor="ctr"/>
-          <a:lstStyle/>
-          <a:p>
-            <a:pPr indent="0" marL="0">
-              <a:buNone/>
-            </a:pPr>
-            <a:r>
-              <a:rPr lang="en-US" sz="1100" dirty="0">
-                <a:solidFill>
-                  <a:srgbClr val="374151"/>
-                </a:solidFill>
-                <a:latin typeface="Calibri" pitchFamily="34" charset="0"/>
-                <a:ea typeface="Calibri" pitchFamily="34" charset="-122"/>
-                <a:cs typeface="Calibri" pitchFamily="34" charset="-120"/>
-              </a:rPr>
-              <a:t>Backbone CNN extracts features</a:t>
-            </a:r>
-            <a:endParaRPr lang="en-US" sz="1100" dirty="0"/>
-          </a:p>
-        </p:txBody>
-      </p:sp>
-      <p:sp>
-        <p:nvSpPr>
-          <p:cNvPr id="14" name="Shape 12"/>
-          <p:cNvSpPr/>
-          <p:nvPr/>
-        </p:nvSpPr>
-        <p:spPr>
-          <a:xfrm>
-            <a:off x="594360" y="2240280"/>
-            <a:ext cx="109728" cy="109728"/>
-          </a:xfrm>
-          <a:prstGeom prst="ellipse">
-            <a:avLst/>
-          </a:prstGeom>
-          <a:solidFill>
-            <a:srgbClr val="6366F1"/>
-          </a:solidFill>
-          <a:ln/>
-        </p:spPr>
-      </p:sp>
-      <p:sp>
-        <p:nvSpPr>
-          <p:cNvPr id="15" name="Text 13"/>
-          <p:cNvSpPr/>
-          <p:nvPr/>
-        </p:nvSpPr>
-        <p:spPr>
-          <a:xfrm>
-            <a:off x="777240" y="2167128"/>
-            <a:ext cx="3611880" cy="274320"/>
-          </a:xfrm>
-          <a:prstGeom prst="rect">
-            <a:avLst/>
-          </a:prstGeom>
-          <a:noFill/>
-          <a:ln/>
-        </p:spPr>
-        <p:txBody>
-          <a:bodyPr wrap="square" lIns="0" tIns="0" rIns="0" bIns="0" rtlCol="0" anchor="ctr"/>
-          <a:lstStyle/>
-          <a:p>
-            <a:pPr indent="0" marL="0">
-              <a:buNone/>
-            </a:pPr>
-            <a:r>
-              <a:rPr lang="en-US" sz="1100" dirty="0">
-                <a:solidFill>
-                  <a:srgbClr val="374151"/>
-                </a:solidFill>
-                <a:latin typeface="Calibri" pitchFamily="34" charset="0"/>
-                <a:ea typeface="Calibri" pitchFamily="34" charset="-122"/>
-                <a:cs typeface="Calibri" pitchFamily="34" charset="-120"/>
-              </a:rPr>
-              <a:t>RPN proposes regions of interest</a:t>
-            </a:r>
-            <a:endParaRPr lang="en-US" sz="1100" dirty="0"/>
-          </a:p>
-        </p:txBody>
-      </p:sp>
-      <p:sp>
-        <p:nvSpPr>
-          <p:cNvPr id="16" name="Shape 14"/>
-          <p:cNvSpPr/>
-          <p:nvPr/>
-        </p:nvSpPr>
-        <p:spPr>
-          <a:xfrm>
-            <a:off x="594360" y="2624328"/>
-            <a:ext cx="109728" cy="109728"/>
-          </a:xfrm>
-          <a:prstGeom prst="ellipse">
-            <a:avLst/>
-          </a:prstGeom>
-          <a:solidFill>
-            <a:srgbClr val="6366F1"/>
-          </a:solidFill>
-          <a:ln/>
-        </p:spPr>
-      </p:sp>
-      <p:sp>
-        <p:nvSpPr>
-          <p:cNvPr id="17" name="Text 15"/>
-          <p:cNvSpPr/>
-          <p:nvPr/>
-        </p:nvSpPr>
-        <p:spPr>
-          <a:xfrm>
-            <a:off x="777240" y="2551176"/>
-            <a:ext cx="3611880" cy="274320"/>
-          </a:xfrm>
-          <a:prstGeom prst="rect">
-            <a:avLst/>
-          </a:prstGeom>
-          <a:noFill/>
-          <a:ln/>
-        </p:spPr>
-        <p:txBody>
-          <a:bodyPr wrap="square" lIns="0" tIns="0" rIns="0" bIns="0" rtlCol="0" anchor="ctr"/>
-          <a:lstStyle/>
-          <a:p>
-            <a:pPr indent="0" marL="0">
-              <a:buNone/>
-            </a:pPr>
-            <a:r>
-              <a:rPr lang="en-US" sz="1100" dirty="0">
-                <a:solidFill>
-                  <a:srgbClr val="374151"/>
-                </a:solidFill>
-                <a:latin typeface="Calibri" pitchFamily="34" charset="0"/>
-                <a:ea typeface="Calibri" pitchFamily="34" charset="-122"/>
-                <a:cs typeface="Calibri" pitchFamily="34" charset="-120"/>
-              </a:rPr>
-              <a:t>RoI pooling → fixed-size features</a:t>
-            </a:r>
-            <a:endParaRPr lang="en-US" sz="1100" dirty="0"/>
-          </a:p>
-        </p:txBody>
-      </p:sp>
-      <p:sp>
-        <p:nvSpPr>
-          <p:cNvPr id="18" name="Shape 16"/>
-          <p:cNvSpPr/>
-          <p:nvPr/>
-        </p:nvSpPr>
-        <p:spPr>
-          <a:xfrm>
-            <a:off x="594360" y="3008376"/>
-            <a:ext cx="109728" cy="109728"/>
-          </a:xfrm>
-          <a:prstGeom prst="ellipse">
-            <a:avLst/>
-          </a:prstGeom>
-          <a:solidFill>
-            <a:srgbClr val="6366F1"/>
-          </a:solidFill>
-          <a:ln/>
-        </p:spPr>
-      </p:sp>
-      <p:sp>
-        <p:nvSpPr>
-          <p:cNvPr id="19" name="Text 17"/>
-          <p:cNvSpPr/>
-          <p:nvPr/>
-        </p:nvSpPr>
-        <p:spPr>
-          <a:xfrm>
-            <a:off x="777240" y="2935224"/>
-            <a:ext cx="3611880" cy="274320"/>
-          </a:xfrm>
-          <a:prstGeom prst="rect">
-            <a:avLst/>
-          </a:prstGeom>
-          <a:noFill/>
-          <a:ln/>
-        </p:spPr>
-        <p:txBody>
-          <a:bodyPr wrap="square" lIns="0" tIns="0" rIns="0" bIns="0" rtlCol="0" anchor="ctr"/>
-          <a:lstStyle/>
-          <a:p>
-            <a:pPr indent="0" marL="0">
-              <a:buNone/>
-            </a:pPr>
-            <a:r>
-              <a:rPr lang="en-US" sz="1100" dirty="0">
-                <a:solidFill>
-                  <a:srgbClr val="374151"/>
-                </a:solidFill>
-                <a:latin typeface="Calibri" pitchFamily="34" charset="0"/>
-                <a:ea typeface="Calibri" pitchFamily="34" charset="-122"/>
-                <a:cs typeface="Calibri" pitchFamily="34" charset="-120"/>
-              </a:rPr>
-              <a:t>Heads predict: class + box offset</a:t>
-            </a:r>
-            <a:endParaRPr lang="en-US" sz="1100" dirty="0"/>
-          </a:p>
-        </p:txBody>
-      </p:sp>
-      <p:sp>
-        <p:nvSpPr>
-          <p:cNvPr id="20" name="Text 18"/>
-          <p:cNvSpPr/>
-          <p:nvPr/>
-        </p:nvSpPr>
-        <p:spPr>
-          <a:xfrm>
-            <a:off x="548640" y="3364992"/>
-            <a:ext cx="3840480" cy="365760"/>
-          </a:xfrm>
-          <a:prstGeom prst="rect">
-            <a:avLst/>
-          </a:prstGeom>
-          <a:noFill/>
-          <a:ln/>
-        </p:spPr>
-        <p:txBody>
-          <a:bodyPr wrap="square" lIns="0" tIns="0" rIns="0" bIns="0" rtlCol="0" anchor="ctr"/>
-          <a:lstStyle/>
-          <a:p>
-            <a:pPr indent="0" marL="0">
-              <a:buNone/>
-            </a:pPr>
-            <a:r>
-              <a:rPr lang="en-US" sz="1100" b="1" i="1" dirty="0">
-                <a:solidFill>
-                  <a:srgbClr val="6366F1"/>
-                </a:solidFill>
-                <a:latin typeface="Calibri" pitchFamily="34" charset="0"/>
-                <a:ea typeface="Calibri" pitchFamily="34" charset="-122"/>
-                <a:cs typeface="Calibri" pitchFamily="34" charset="-120"/>
-              </a:rPr>
-              <a:t>Output: bounding boxes + class labels</a:t>
-            </a:r>
-            <a:endParaRPr lang="en-US" sz="1100" dirty="0"/>
-          </a:p>
-        </p:txBody>
-      </p:sp>
-      <p:sp>
-        <p:nvSpPr>
-          <p:cNvPr id="21" name="Shape 19"/>
-          <p:cNvSpPr/>
-          <p:nvPr/>
-        </p:nvSpPr>
-        <p:spPr>
-          <a:xfrm>
-            <a:off x="4297680" y="2560320"/>
-            <a:ext cx="457200" cy="457200"/>
-          </a:xfrm>
-          <a:prstGeom prst="ellipse">
-            <a:avLst/>
-          </a:prstGeom>
-          <a:solidFill>
-            <a:srgbClr val="0F2747"/>
-          </a:solidFill>
-          <a:ln/>
-        </p:spPr>
-      </p:sp>
-      <p:sp>
-        <p:nvSpPr>
-          <p:cNvPr id="22" name="Text 20"/>
-          <p:cNvSpPr/>
-          <p:nvPr/>
-        </p:nvSpPr>
-        <p:spPr>
-          <a:xfrm>
-            <a:off x="4297680" y="2560320"/>
-            <a:ext cx="457200" cy="457200"/>
-          </a:xfrm>
-          <a:prstGeom prst="rect">
-            <a:avLst/>
-          </a:prstGeom>
-          <a:noFill/>
-          <a:ln/>
-        </p:spPr>
-        <p:txBody>
-          <a:bodyPr wrap="square" lIns="0" tIns="0" rIns="0" bIns="0" rtlCol="0" anchor="ctr"/>
-          <a:lstStyle/>
-          <a:p>
-            <a:pPr algn="ctr" indent="0" marL="0">
-              <a:buNone/>
-            </a:pPr>
-            <a:r>
-              <a:rPr lang="en-US" sz="2000" b="1" dirty="0">
-                <a:solidFill>
-                  <a:srgbClr val="FFFFFF"/>
-                </a:solidFill>
-                <a:latin typeface="Calibri" pitchFamily="34" charset="0"/>
-                <a:ea typeface="Calibri" pitchFamily="34" charset="-122"/>
-                <a:cs typeface="Calibri" pitchFamily="34" charset="-120"/>
-              </a:rPr>
-              <a:t>+</a:t>
-            </a:r>
-            <a:endParaRPr lang="en-US" sz="2000" dirty="0"/>
-          </a:p>
-        </p:txBody>
-      </p:sp>
-      <p:sp>
-        <p:nvSpPr>
-          <p:cNvPr id="23" name="Shape 21"/>
-          <p:cNvSpPr/>
-          <p:nvPr/>
-        </p:nvSpPr>
-        <p:spPr>
-          <a:xfrm>
-            <a:off x="4681728" y="914400"/>
-            <a:ext cx="4114800" cy="3657600"/>
-          </a:xfrm>
-          <a:prstGeom prst="rect">
-            <a:avLst/>
-          </a:prstGeom>
-          <a:solidFill>
-            <a:srgbClr val="FFFFFF"/>
-          </a:solidFill>
-          <a:ln w="9525">
-            <a:solidFill>
-              <a:srgbClr val="E2E8F0"/>
-            </a:solidFill>
-            <a:prstDash val="solid"/>
-          </a:ln>
-          <a:effectLst>
-            <a:outerShdw sx="100000" sy="100000" kx="0" ky="0" algn="bl" rotWithShape="0" blurRad="101600" dist="25400" dir="5400000">
-              <a:srgbClr val="000000">
-                <a:alpha val="10000"/>
-              </a:srgbClr>
-            </a:outerShdw>
-          </a:effectLst>
-        </p:spPr>
-      </p:sp>
-      <p:sp>
-        <p:nvSpPr>
-          <p:cNvPr id="24" name="Shape 22"/>
-          <p:cNvSpPr/>
-          <p:nvPr/>
-        </p:nvSpPr>
-        <p:spPr>
-          <a:xfrm>
-            <a:off x="4681728" y="914400"/>
-            <a:ext cx="64008" cy="3657600"/>
-          </a:xfrm>
-          <a:prstGeom prst="rect">
-            <a:avLst/>
-          </a:prstGeom>
-          <a:solidFill>
-            <a:srgbClr val="E11D48"/>
-          </a:solidFill>
-          <a:ln/>
-        </p:spPr>
-      </p:sp>
-      <p:sp>
-        <p:nvSpPr>
-          <p:cNvPr id="25" name="Text 23"/>
-          <p:cNvSpPr/>
-          <p:nvPr/>
-        </p:nvSpPr>
-        <p:spPr>
-          <a:xfrm>
-            <a:off x="4846320" y="1051560"/>
-            <a:ext cx="3840480" cy="320040"/>
-          </a:xfrm>
-          <a:prstGeom prst="rect">
-            <a:avLst/>
-          </a:prstGeom>
-          <a:noFill/>
-          <a:ln/>
-        </p:spPr>
-        <p:txBody>
-          <a:bodyPr wrap="square" lIns="0" tIns="0" rIns="0" bIns="0" rtlCol="0" anchor="ctr"/>
-          <a:lstStyle/>
-          <a:p>
-            <a:pPr indent="0" marL="0">
-              <a:buNone/>
-            </a:pPr>
-            <a:r>
-              <a:rPr lang="en-US" sz="1400" b="1" dirty="0">
-                <a:solidFill>
-                  <a:srgbClr val="1E293B"/>
-                </a:solidFill>
-                <a:latin typeface="Calibri" pitchFamily="34" charset="0"/>
-                <a:ea typeface="Calibri" pitchFamily="34" charset="-122"/>
-                <a:cs typeface="Calibri" pitchFamily="34" charset="-120"/>
-              </a:rPr>
-              <a:t>Add: Mask Head</a:t>
-            </a:r>
-            <a:endParaRPr lang="en-US" sz="1400" dirty="0"/>
-          </a:p>
-        </p:txBody>
-      </p:sp>
-      <p:sp>
-        <p:nvSpPr>
-          <p:cNvPr id="26" name="Text 24"/>
-          <p:cNvSpPr/>
-          <p:nvPr/>
-        </p:nvSpPr>
-        <p:spPr>
-          <a:xfrm>
-            <a:off x="4846320" y="1371600"/>
-            <a:ext cx="3840480" cy="274320"/>
-          </a:xfrm>
-          <a:prstGeom prst="rect">
-            <a:avLst/>
-          </a:prstGeom>
-          <a:noFill/>
-          <a:ln/>
-        </p:spPr>
-        <p:txBody>
-          <a:bodyPr wrap="square" lIns="0" tIns="0" rIns="0" bIns="0" rtlCol="0" anchor="ctr"/>
-          <a:lstStyle/>
-          <a:p>
-            <a:pPr indent="0" marL="0">
-              <a:buNone/>
-            </a:pPr>
-            <a:r>
-              <a:rPr lang="en-US" sz="1050" i="1" dirty="0">
-                <a:solidFill>
-                  <a:srgbClr val="64748B"/>
-                </a:solidFill>
-                <a:latin typeface="Calibri" pitchFamily="34" charset="0"/>
-                <a:ea typeface="Calibri" pitchFamily="34" charset="-122"/>
-                <a:cs typeface="Calibri" pitchFamily="34" charset="-120"/>
-              </a:rPr>
-              <a:t>Small FCN that predicts a binary mask per RoI:</a:t>
-            </a:r>
-            <a:endParaRPr lang="en-US" sz="1050" dirty="0"/>
-          </a:p>
-        </p:txBody>
-      </p:sp>
-      <p:sp>
-        <p:nvSpPr>
-          <p:cNvPr id="27" name="Shape 25"/>
-          <p:cNvSpPr/>
-          <p:nvPr/>
-        </p:nvSpPr>
-        <p:spPr>
-          <a:xfrm>
-            <a:off x="4892040" y="1856232"/>
-            <a:ext cx="109728" cy="109728"/>
-          </a:xfrm>
-          <a:prstGeom prst="ellipse">
-            <a:avLst/>
-          </a:prstGeom>
-          <a:solidFill>
-            <a:srgbClr val="E11D48"/>
-          </a:solidFill>
-          <a:ln/>
-        </p:spPr>
-      </p:sp>
-      <p:sp>
-        <p:nvSpPr>
-          <p:cNvPr id="28" name="Text 26"/>
-          <p:cNvSpPr/>
-          <p:nvPr/>
-        </p:nvSpPr>
-        <p:spPr>
-          <a:xfrm>
-            <a:off x="5074920" y="1783080"/>
-            <a:ext cx="3611880" cy="274320"/>
-          </a:xfrm>
-          <a:prstGeom prst="rect">
-            <a:avLst/>
-          </a:prstGeom>
-          <a:noFill/>
-          <a:ln/>
-        </p:spPr>
-        <p:txBody>
-          <a:bodyPr wrap="square" lIns="0" tIns="0" rIns="0" bIns="0" rtlCol="0" anchor="ctr"/>
-          <a:lstStyle/>
-          <a:p>
-            <a:pPr indent="0" marL="0">
-              <a:buNone/>
-            </a:pPr>
-            <a:r>
-              <a:rPr lang="en-US" sz="1100" dirty="0">
-                <a:solidFill>
-                  <a:srgbClr val="374151"/>
-                </a:solidFill>
-                <a:latin typeface="Calibri" pitchFamily="34" charset="0"/>
-                <a:ea typeface="Calibri" pitchFamily="34" charset="-122"/>
-                <a:cs typeface="Calibri" pitchFamily="34" charset="-120"/>
-              </a:rPr>
-              <a:t>Parallel to the box/class heads</a:t>
-            </a:r>
-            <a:endParaRPr lang="en-US" sz="1100" dirty="0"/>
-          </a:p>
-        </p:txBody>
-      </p:sp>
-      <p:sp>
-        <p:nvSpPr>
-          <p:cNvPr id="29" name="Shape 27"/>
-          <p:cNvSpPr/>
-          <p:nvPr/>
-        </p:nvSpPr>
-        <p:spPr>
-          <a:xfrm>
-            <a:off x="4892040" y="2240280"/>
-            <a:ext cx="109728" cy="109728"/>
-          </a:xfrm>
-          <a:prstGeom prst="ellipse">
-            <a:avLst/>
-          </a:prstGeom>
-          <a:solidFill>
-            <a:srgbClr val="E11D48"/>
-          </a:solidFill>
-          <a:ln/>
-        </p:spPr>
-      </p:sp>
-      <p:sp>
-        <p:nvSpPr>
-          <p:cNvPr id="30" name="Text 28"/>
-          <p:cNvSpPr/>
-          <p:nvPr/>
-        </p:nvSpPr>
-        <p:spPr>
-          <a:xfrm>
-            <a:off x="5074920" y="2167128"/>
-            <a:ext cx="3611880" cy="274320"/>
-          </a:xfrm>
-          <a:prstGeom prst="rect">
-            <a:avLst/>
-          </a:prstGeom>
-          <a:noFill/>
-          <a:ln/>
-        </p:spPr>
-        <p:txBody>
-          <a:bodyPr wrap="square" lIns="0" tIns="0" rIns="0" bIns="0" rtlCol="0" anchor="ctr"/>
-          <a:lstStyle/>
-          <a:p>
-            <a:pPr indent="0" marL="0">
-              <a:buNone/>
-            </a:pPr>
-            <a:r>
-              <a:rPr lang="en-US" sz="1100" dirty="0">
-                <a:solidFill>
-                  <a:srgbClr val="374151"/>
-                </a:solidFill>
-                <a:latin typeface="Calibri" pitchFamily="34" charset="0"/>
-                <a:ea typeface="Calibri" pitchFamily="34" charset="-122"/>
-                <a:cs typeface="Calibri" pitchFamily="34" charset="-120"/>
-              </a:rPr>
-              <a:t>Outputs K × m × m masks (one per class)</a:t>
-            </a:r>
-            <a:endParaRPr lang="en-US" sz="1100" dirty="0"/>
-          </a:p>
-        </p:txBody>
-      </p:sp>
-      <p:sp>
-        <p:nvSpPr>
-          <p:cNvPr id="31" name="Shape 29"/>
-          <p:cNvSpPr/>
-          <p:nvPr/>
-        </p:nvSpPr>
-        <p:spPr>
-          <a:xfrm>
-            <a:off x="4892040" y="2624328"/>
-            <a:ext cx="109728" cy="109728"/>
-          </a:xfrm>
-          <a:prstGeom prst="ellipse">
-            <a:avLst/>
-          </a:prstGeom>
-          <a:solidFill>
-            <a:srgbClr val="E11D48"/>
-          </a:solidFill>
-          <a:ln/>
-        </p:spPr>
-      </p:sp>
-      <p:sp>
-        <p:nvSpPr>
-          <p:cNvPr id="32" name="Text 30"/>
-          <p:cNvSpPr/>
-          <p:nvPr/>
-        </p:nvSpPr>
-        <p:spPr>
-          <a:xfrm>
-            <a:off x="5074920" y="2551176"/>
-            <a:ext cx="3611880" cy="274320"/>
-          </a:xfrm>
-          <a:prstGeom prst="rect">
-            <a:avLst/>
-          </a:prstGeom>
-          <a:noFill/>
-          <a:ln/>
-        </p:spPr>
-        <p:txBody>
-          <a:bodyPr wrap="square" lIns="0" tIns="0" rIns="0" bIns="0" rtlCol="0" anchor="ctr"/>
-          <a:lstStyle/>
-          <a:p>
-            <a:pPr indent="0" marL="0">
-              <a:buNone/>
-            </a:pPr>
-            <a:r>
-              <a:rPr lang="en-US" sz="1100" dirty="0">
-                <a:solidFill>
-                  <a:srgbClr val="374151"/>
-                </a:solidFill>
-                <a:latin typeface="Calibri" pitchFamily="34" charset="0"/>
-                <a:ea typeface="Calibri" pitchFamily="34" charset="-122"/>
-                <a:cs typeface="Calibri" pitchFamily="34" charset="-120"/>
-              </a:rPr>
-              <a:t>Uses RoIAlign instead of RoIPool (key!)</a:t>
-            </a:r>
-            <a:endParaRPr lang="en-US" sz="1100" dirty="0"/>
-          </a:p>
-        </p:txBody>
-      </p:sp>
-      <p:sp>
-        <p:nvSpPr>
-          <p:cNvPr id="33" name="Shape 31"/>
-          <p:cNvSpPr/>
-          <p:nvPr/>
-        </p:nvSpPr>
-        <p:spPr>
-          <a:xfrm>
-            <a:off x="4892040" y="3008376"/>
-            <a:ext cx="109728" cy="109728"/>
-          </a:xfrm>
-          <a:prstGeom prst="ellipse">
-            <a:avLst/>
-          </a:prstGeom>
-          <a:solidFill>
-            <a:srgbClr val="E11D48"/>
-          </a:solidFill>
-          <a:ln/>
-        </p:spPr>
-      </p:sp>
-      <p:sp>
-        <p:nvSpPr>
-          <p:cNvPr id="34" name="Text 32"/>
-          <p:cNvSpPr/>
-          <p:nvPr/>
-        </p:nvSpPr>
-        <p:spPr>
-          <a:xfrm>
-            <a:off x="5074920" y="2935224"/>
-            <a:ext cx="3611880" cy="274320"/>
-          </a:xfrm>
-          <a:prstGeom prst="rect">
-            <a:avLst/>
-          </a:prstGeom>
-          <a:noFill/>
-          <a:ln/>
-        </p:spPr>
-        <p:txBody>
-          <a:bodyPr wrap="square" lIns="0" tIns="0" rIns="0" bIns="0" rtlCol="0" anchor="ctr"/>
-          <a:lstStyle/>
-          <a:p>
-            <a:pPr indent="0" marL="0">
-              <a:buNone/>
-            </a:pPr>
-            <a:r>
-              <a:rPr lang="en-US" sz="1100" dirty="0">
-                <a:solidFill>
-                  <a:srgbClr val="374151"/>
-                </a:solidFill>
-                <a:latin typeface="Calibri" pitchFamily="34" charset="0"/>
-                <a:ea typeface="Calibri" pitchFamily="34" charset="-122"/>
-                <a:cs typeface="Calibri" pitchFamily="34" charset="-120"/>
-              </a:rPr>
-              <a:t>Trained with per-pixel binary CE loss</a:t>
-            </a:r>
-            <a:endParaRPr lang="en-US" sz="1100" dirty="0"/>
-          </a:p>
-        </p:txBody>
-      </p:sp>
-      <p:sp>
-        <p:nvSpPr>
-          <p:cNvPr id="35" name="Text 33"/>
-          <p:cNvSpPr/>
-          <p:nvPr/>
-        </p:nvSpPr>
-        <p:spPr>
-          <a:xfrm>
-            <a:off x="4846320" y="3364992"/>
-            <a:ext cx="3840480" cy="365760"/>
-          </a:xfrm>
-          <a:prstGeom prst="rect">
-            <a:avLst/>
-          </a:prstGeom>
-          <a:noFill/>
-          <a:ln/>
-        </p:spPr>
-        <p:txBody>
-          <a:bodyPr wrap="square" lIns="0" tIns="0" rIns="0" bIns="0" rtlCol="0" anchor="ctr"/>
-          <a:lstStyle/>
-          <a:p>
-            <a:pPr indent="0" marL="0">
-              <a:buNone/>
-            </a:pPr>
-            <a:r>
-              <a:rPr lang="en-US" sz="1100" b="1" i="1" dirty="0">
-                <a:solidFill>
-                  <a:srgbClr val="E11D48"/>
-                </a:solidFill>
-                <a:latin typeface="Calibri" pitchFamily="34" charset="0"/>
-                <a:ea typeface="Calibri" pitchFamily="34" charset="-122"/>
-                <a:cs typeface="Calibri" pitchFamily="34" charset="-120"/>
-              </a:rPr>
-              <a:t>Output: pixel-perfect mask per object</a:t>
-            </a:r>
-            <a:endParaRPr lang="en-US" sz="1100" dirty="0"/>
-          </a:p>
-        </p:txBody>
-      </p:sp>
+      <p:grpSp>
+        <p:nvGrpSpPr>
+          <p:cNvPr id="41" name="Group 40">
+            <a:extLst>
+              <a:ext uri="{FF2B5EF4-FFF2-40B4-BE49-F238E27FC236}">
+                <a16:creationId xmlns:a16="http://schemas.microsoft.com/office/drawing/2014/main" id="{A26DC056-CC11-BB4A-9D08-3516C16904C3}"/>
+              </a:ext>
+            </a:extLst>
+          </p:cNvPr>
+          <p:cNvGrpSpPr/>
+          <p:nvPr/>
+        </p:nvGrpSpPr>
+        <p:grpSpPr>
+          <a:xfrm>
+            <a:off x="661930" y="1136792"/>
+            <a:ext cx="7820140" cy="2869917"/>
+            <a:chOff x="18288" y="914400"/>
+            <a:chExt cx="7820140" cy="2869917"/>
+          </a:xfrm>
+        </p:grpSpPr>
+        <p:grpSp>
+          <p:nvGrpSpPr>
+            <p:cNvPr id="38" name="Group 37">
+              <a:extLst>
+                <a:ext uri="{FF2B5EF4-FFF2-40B4-BE49-F238E27FC236}">
+                  <a16:creationId xmlns:a16="http://schemas.microsoft.com/office/drawing/2014/main" id="{4E291B03-3981-2892-ABD5-3BB57BB87821}"/>
+                </a:ext>
+              </a:extLst>
+            </p:cNvPr>
+            <p:cNvGrpSpPr/>
+            <p:nvPr/>
+          </p:nvGrpSpPr>
+          <p:grpSpPr>
+            <a:xfrm>
+              <a:off x="18288" y="914400"/>
+              <a:ext cx="2836657" cy="2869917"/>
+              <a:chOff x="18288" y="914400"/>
+              <a:chExt cx="2836657" cy="2869917"/>
+            </a:xfrm>
+          </p:grpSpPr>
+          <p:sp>
+            <p:nvSpPr>
+              <p:cNvPr id="8" name="Shape 6"/>
+              <p:cNvSpPr/>
+              <p:nvPr/>
+            </p:nvSpPr>
+            <p:spPr>
+              <a:xfrm>
+                <a:off x="18288" y="914400"/>
+                <a:ext cx="2783695" cy="2869910"/>
+              </a:xfrm>
+              <a:prstGeom prst="rect">
+                <a:avLst/>
+              </a:prstGeom>
+              <a:solidFill>
+                <a:srgbClr val="FFFFFF"/>
+              </a:solidFill>
+              <a:ln w="9525">
+                <a:solidFill>
+                  <a:srgbClr val="E2E8F0"/>
+                </a:solidFill>
+                <a:prstDash val="solid"/>
+              </a:ln>
+              <a:effectLst>
+                <a:outerShdw blurRad="101600" dist="25400" dir="5400000" algn="bl" rotWithShape="0">
+                  <a:srgbClr val="000000">
+                    <a:alpha val="10000"/>
+                  </a:srgbClr>
+                </a:outerShdw>
+              </a:effectLst>
+            </p:spPr>
+          </p:sp>
+          <p:sp>
+            <p:nvSpPr>
+              <p:cNvPr id="9" name="Shape 7"/>
+              <p:cNvSpPr/>
+              <p:nvPr/>
+            </p:nvSpPr>
+            <p:spPr>
+              <a:xfrm>
+                <a:off x="24819" y="914400"/>
+                <a:ext cx="45719" cy="2869917"/>
+              </a:xfrm>
+              <a:prstGeom prst="rect">
+                <a:avLst/>
+              </a:prstGeom>
+              <a:solidFill>
+                <a:srgbClr val="6366F1"/>
+              </a:solidFill>
+              <a:ln/>
+            </p:spPr>
+          </p:sp>
+          <p:sp>
+            <p:nvSpPr>
+              <p:cNvPr id="10" name="Text 8"/>
+              <p:cNvSpPr/>
+              <p:nvPr/>
+            </p:nvSpPr>
+            <p:spPr>
+              <a:xfrm>
+                <a:off x="182880" y="1051560"/>
+                <a:ext cx="2598115" cy="251117"/>
+              </a:xfrm>
+              <a:prstGeom prst="rect">
+                <a:avLst/>
+              </a:prstGeom>
+              <a:noFill/>
+              <a:ln/>
+            </p:spPr>
+            <p:txBody>
+              <a:bodyPr wrap="square" lIns="0" tIns="0" rIns="0" bIns="0" rtlCol="0" anchor="ctr"/>
+              <a:lstStyle/>
+              <a:p>
+                <a:pPr marL="0" indent="0">
+                  <a:buNone/>
+                </a:pPr>
+                <a:r>
+                  <a:rPr lang="en-US" sz="1400" b="1" dirty="0">
+                    <a:solidFill>
+                      <a:srgbClr val="1E293B"/>
+                    </a:solidFill>
+                    <a:latin typeface="Calibri" pitchFamily="34" charset="0"/>
+                    <a:ea typeface="Calibri" pitchFamily="34" charset="-122"/>
+                    <a:cs typeface="Calibri" pitchFamily="34" charset="-120"/>
+                  </a:rPr>
+                  <a:t>Start with: Faster R-CNN</a:t>
+                </a:r>
+                <a:endParaRPr lang="en-US" sz="1400" dirty="0"/>
+              </a:p>
+            </p:txBody>
+          </p:sp>
+          <p:sp>
+            <p:nvSpPr>
+              <p:cNvPr id="11" name="Text 9"/>
+              <p:cNvSpPr/>
+              <p:nvPr/>
+            </p:nvSpPr>
+            <p:spPr>
+              <a:xfrm>
+                <a:off x="182880" y="1371600"/>
+                <a:ext cx="2598115" cy="215244"/>
+              </a:xfrm>
+              <a:prstGeom prst="rect">
+                <a:avLst/>
+              </a:prstGeom>
+              <a:noFill/>
+              <a:ln/>
+            </p:spPr>
+            <p:txBody>
+              <a:bodyPr wrap="square" lIns="0" tIns="0" rIns="0" bIns="0" rtlCol="0" anchor="ctr"/>
+              <a:lstStyle/>
+              <a:p>
+                <a:pPr marL="0" indent="0">
+                  <a:buNone/>
+                </a:pPr>
+                <a:r>
+                  <a:rPr lang="en-US" sz="1050" i="1" dirty="0">
+                    <a:solidFill>
+                      <a:srgbClr val="64748B"/>
+                    </a:solidFill>
+                    <a:latin typeface="Calibri" pitchFamily="34" charset="0"/>
+                    <a:ea typeface="Calibri" pitchFamily="34" charset="-122"/>
+                    <a:cs typeface="Calibri" pitchFamily="34" charset="-120"/>
+                  </a:rPr>
+                  <a:t>Two-stage object detector you already know:</a:t>
+                </a:r>
+                <a:endParaRPr lang="en-US" sz="1050" dirty="0"/>
+              </a:p>
+            </p:txBody>
+          </p:sp>
+          <p:sp>
+            <p:nvSpPr>
+              <p:cNvPr id="12" name="Shape 10"/>
+              <p:cNvSpPr/>
+              <p:nvPr/>
+            </p:nvSpPr>
+            <p:spPr>
+              <a:xfrm>
+                <a:off x="228601" y="1856232"/>
+                <a:ext cx="74232" cy="86097"/>
+              </a:xfrm>
+              <a:prstGeom prst="ellipse">
+                <a:avLst/>
+              </a:prstGeom>
+              <a:solidFill>
+                <a:srgbClr val="6366F1"/>
+              </a:solidFill>
+              <a:ln/>
+            </p:spPr>
+          </p:sp>
+          <p:sp>
+            <p:nvSpPr>
+              <p:cNvPr id="13" name="Text 11"/>
+              <p:cNvSpPr/>
+              <p:nvPr/>
+            </p:nvSpPr>
+            <p:spPr>
+              <a:xfrm>
+                <a:off x="411480" y="1783080"/>
+                <a:ext cx="2443465" cy="215244"/>
+              </a:xfrm>
+              <a:prstGeom prst="rect">
+                <a:avLst/>
+              </a:prstGeom>
+              <a:noFill/>
+              <a:ln/>
+            </p:spPr>
+            <p:txBody>
+              <a:bodyPr wrap="square" lIns="0" tIns="0" rIns="0" bIns="0" rtlCol="0" anchor="ctr"/>
+              <a:lstStyle/>
+              <a:p>
+                <a:pPr marL="0" indent="0">
+                  <a:buNone/>
+                </a:pPr>
+                <a:r>
+                  <a:rPr lang="en-US" sz="1100" dirty="0">
+                    <a:solidFill>
+                      <a:srgbClr val="374151"/>
+                    </a:solidFill>
+                    <a:latin typeface="Calibri" pitchFamily="34" charset="0"/>
+                    <a:ea typeface="Calibri" pitchFamily="34" charset="-122"/>
+                    <a:cs typeface="Calibri" pitchFamily="34" charset="-120"/>
+                  </a:rPr>
+                  <a:t>Backbone CNN extracts features</a:t>
+                </a:r>
+                <a:endParaRPr lang="en-US" sz="1100" dirty="0"/>
+              </a:p>
+            </p:txBody>
+          </p:sp>
+          <p:sp>
+            <p:nvSpPr>
+              <p:cNvPr id="14" name="Shape 12"/>
+              <p:cNvSpPr/>
+              <p:nvPr/>
+            </p:nvSpPr>
+            <p:spPr>
+              <a:xfrm>
+                <a:off x="228601" y="2240280"/>
+                <a:ext cx="74232" cy="86097"/>
+              </a:xfrm>
+              <a:prstGeom prst="ellipse">
+                <a:avLst/>
+              </a:prstGeom>
+              <a:solidFill>
+                <a:srgbClr val="6366F1"/>
+              </a:solidFill>
+              <a:ln/>
+            </p:spPr>
+          </p:sp>
+          <p:sp>
+            <p:nvSpPr>
+              <p:cNvPr id="15" name="Text 13"/>
+              <p:cNvSpPr/>
+              <p:nvPr/>
+            </p:nvSpPr>
+            <p:spPr>
+              <a:xfrm>
+                <a:off x="411480" y="2167128"/>
+                <a:ext cx="2443465" cy="215244"/>
+              </a:xfrm>
+              <a:prstGeom prst="rect">
+                <a:avLst/>
+              </a:prstGeom>
+              <a:noFill/>
+              <a:ln/>
+            </p:spPr>
+            <p:txBody>
+              <a:bodyPr wrap="square" lIns="0" tIns="0" rIns="0" bIns="0" rtlCol="0" anchor="ctr"/>
+              <a:lstStyle/>
+              <a:p>
+                <a:pPr marL="0" indent="0">
+                  <a:buNone/>
+                </a:pPr>
+                <a:r>
+                  <a:rPr lang="en-US" sz="1100" dirty="0">
+                    <a:solidFill>
+                      <a:srgbClr val="374151"/>
+                    </a:solidFill>
+                    <a:latin typeface="Calibri" pitchFamily="34" charset="0"/>
+                    <a:ea typeface="Calibri" pitchFamily="34" charset="-122"/>
+                    <a:cs typeface="Calibri" pitchFamily="34" charset="-120"/>
+                  </a:rPr>
+                  <a:t>RPN proposes regions of interest</a:t>
+                </a:r>
+                <a:endParaRPr lang="en-US" sz="1100" dirty="0"/>
+              </a:p>
+            </p:txBody>
+          </p:sp>
+          <p:sp>
+            <p:nvSpPr>
+              <p:cNvPr id="16" name="Shape 14"/>
+              <p:cNvSpPr/>
+              <p:nvPr/>
+            </p:nvSpPr>
+            <p:spPr>
+              <a:xfrm>
+                <a:off x="228601" y="2624328"/>
+                <a:ext cx="74232" cy="86097"/>
+              </a:xfrm>
+              <a:prstGeom prst="ellipse">
+                <a:avLst/>
+              </a:prstGeom>
+              <a:solidFill>
+                <a:srgbClr val="6366F1"/>
+              </a:solidFill>
+              <a:ln/>
+            </p:spPr>
+          </p:sp>
+          <p:sp>
+            <p:nvSpPr>
+              <p:cNvPr id="17" name="Text 15"/>
+              <p:cNvSpPr/>
+              <p:nvPr/>
+            </p:nvSpPr>
+            <p:spPr>
+              <a:xfrm>
+                <a:off x="411480" y="2551176"/>
+                <a:ext cx="2443465" cy="215244"/>
+              </a:xfrm>
+              <a:prstGeom prst="rect">
+                <a:avLst/>
+              </a:prstGeom>
+              <a:noFill/>
+              <a:ln/>
+            </p:spPr>
+            <p:txBody>
+              <a:bodyPr wrap="square" lIns="0" tIns="0" rIns="0" bIns="0" rtlCol="0" anchor="ctr"/>
+              <a:lstStyle/>
+              <a:p>
+                <a:pPr marL="0" indent="0">
+                  <a:buNone/>
+                </a:pPr>
+                <a:r>
+                  <a:rPr lang="en-US" sz="1100" dirty="0">
+                    <a:solidFill>
+                      <a:srgbClr val="374151"/>
+                    </a:solidFill>
+                    <a:latin typeface="Calibri" pitchFamily="34" charset="0"/>
+                    <a:ea typeface="Calibri" pitchFamily="34" charset="-122"/>
+                    <a:cs typeface="Calibri" pitchFamily="34" charset="-120"/>
+                  </a:rPr>
+                  <a:t>RoI pooling → fixed-size features</a:t>
+                </a:r>
+                <a:endParaRPr lang="en-US" sz="1100" dirty="0"/>
+              </a:p>
+            </p:txBody>
+          </p:sp>
+          <p:sp>
+            <p:nvSpPr>
+              <p:cNvPr id="18" name="Shape 16"/>
+              <p:cNvSpPr/>
+              <p:nvPr/>
+            </p:nvSpPr>
+            <p:spPr>
+              <a:xfrm>
+                <a:off x="228601" y="3008376"/>
+                <a:ext cx="74232" cy="86097"/>
+              </a:xfrm>
+              <a:prstGeom prst="ellipse">
+                <a:avLst/>
+              </a:prstGeom>
+              <a:solidFill>
+                <a:srgbClr val="6366F1"/>
+              </a:solidFill>
+              <a:ln/>
+            </p:spPr>
+          </p:sp>
+          <p:sp>
+            <p:nvSpPr>
+              <p:cNvPr id="19" name="Text 17"/>
+              <p:cNvSpPr/>
+              <p:nvPr/>
+            </p:nvSpPr>
+            <p:spPr>
+              <a:xfrm>
+                <a:off x="411480" y="2935224"/>
+                <a:ext cx="2443465" cy="215244"/>
+              </a:xfrm>
+              <a:prstGeom prst="rect">
+                <a:avLst/>
+              </a:prstGeom>
+              <a:noFill/>
+              <a:ln/>
+            </p:spPr>
+            <p:txBody>
+              <a:bodyPr wrap="square" lIns="0" tIns="0" rIns="0" bIns="0" rtlCol="0" anchor="ctr"/>
+              <a:lstStyle/>
+              <a:p>
+                <a:pPr marL="0" indent="0">
+                  <a:buNone/>
+                </a:pPr>
+                <a:r>
+                  <a:rPr lang="en-US" sz="1100" dirty="0">
+                    <a:solidFill>
+                      <a:srgbClr val="374151"/>
+                    </a:solidFill>
+                    <a:latin typeface="Calibri" pitchFamily="34" charset="0"/>
+                    <a:ea typeface="Calibri" pitchFamily="34" charset="-122"/>
+                    <a:cs typeface="Calibri" pitchFamily="34" charset="-120"/>
+                  </a:rPr>
+                  <a:t>Heads predict: class + box offset</a:t>
+                </a:r>
+                <a:endParaRPr lang="en-US" sz="1100" dirty="0"/>
+              </a:p>
+            </p:txBody>
+          </p:sp>
+          <p:sp>
+            <p:nvSpPr>
+              <p:cNvPr id="20" name="Text 18"/>
+              <p:cNvSpPr/>
+              <p:nvPr/>
+            </p:nvSpPr>
+            <p:spPr>
+              <a:xfrm>
+                <a:off x="182880" y="3364992"/>
+                <a:ext cx="2598115" cy="286991"/>
+              </a:xfrm>
+              <a:prstGeom prst="rect">
+                <a:avLst/>
+              </a:prstGeom>
+              <a:noFill/>
+              <a:ln/>
+            </p:spPr>
+            <p:txBody>
+              <a:bodyPr wrap="square" lIns="0" tIns="0" rIns="0" bIns="0" rtlCol="0" anchor="ctr"/>
+              <a:lstStyle/>
+              <a:p>
+                <a:pPr marL="0" indent="0">
+                  <a:buNone/>
+                </a:pPr>
+                <a:r>
+                  <a:rPr lang="en-US" sz="1100" b="1" i="1" dirty="0">
+                    <a:solidFill>
+                      <a:srgbClr val="6366F1"/>
+                    </a:solidFill>
+                    <a:latin typeface="Calibri" pitchFamily="34" charset="0"/>
+                    <a:ea typeface="Calibri" pitchFamily="34" charset="-122"/>
+                    <a:cs typeface="Calibri" pitchFamily="34" charset="-120"/>
+                  </a:rPr>
+                  <a:t>Output: bounding boxes + class labels</a:t>
+                </a:r>
+                <a:endParaRPr lang="en-US" sz="1100" dirty="0"/>
+              </a:p>
+            </p:txBody>
+          </p:sp>
+        </p:grpSp>
+        <p:grpSp>
+          <p:nvGrpSpPr>
+            <p:cNvPr id="40" name="Group 39">
+              <a:extLst>
+                <a:ext uri="{FF2B5EF4-FFF2-40B4-BE49-F238E27FC236}">
+                  <a16:creationId xmlns:a16="http://schemas.microsoft.com/office/drawing/2014/main" id="{E8BCAE72-7E49-CCF8-526C-29A25B951513}"/>
+                </a:ext>
+              </a:extLst>
+            </p:cNvPr>
+            <p:cNvGrpSpPr/>
+            <p:nvPr/>
+          </p:nvGrpSpPr>
+          <p:grpSpPr>
+            <a:xfrm>
+              <a:off x="3699756" y="2120758"/>
+              <a:ext cx="457200" cy="457200"/>
+              <a:chOff x="4297680" y="2560320"/>
+              <a:chExt cx="457200" cy="457200"/>
+            </a:xfrm>
+          </p:grpSpPr>
+          <p:sp>
+            <p:nvSpPr>
+              <p:cNvPr id="21" name="Shape 19"/>
+              <p:cNvSpPr/>
+              <p:nvPr/>
+            </p:nvSpPr>
+            <p:spPr>
+              <a:xfrm>
+                <a:off x="4297680" y="2560320"/>
+                <a:ext cx="457200" cy="457200"/>
+              </a:xfrm>
+              <a:prstGeom prst="ellipse">
+                <a:avLst/>
+              </a:prstGeom>
+              <a:solidFill>
+                <a:srgbClr val="0F2747"/>
+              </a:solidFill>
+              <a:ln/>
+            </p:spPr>
+          </p:sp>
+          <p:sp>
+            <p:nvSpPr>
+              <p:cNvPr id="22" name="Text 20"/>
+              <p:cNvSpPr/>
+              <p:nvPr/>
+            </p:nvSpPr>
+            <p:spPr>
+              <a:xfrm>
+                <a:off x="4297680" y="2560320"/>
+                <a:ext cx="457200" cy="457200"/>
+              </a:xfrm>
+              <a:prstGeom prst="rect">
+                <a:avLst/>
+              </a:prstGeom>
+              <a:noFill/>
+              <a:ln/>
+            </p:spPr>
+            <p:txBody>
+              <a:bodyPr wrap="square" lIns="0" tIns="0" rIns="0" bIns="0" rtlCol="0" anchor="ctr"/>
+              <a:lstStyle/>
+              <a:p>
+                <a:pPr marL="0" indent="0" algn="ctr">
+                  <a:buNone/>
+                </a:pPr>
+                <a:r>
+                  <a:rPr lang="en-US" sz="2000" b="1" dirty="0">
+                    <a:solidFill>
+                      <a:srgbClr val="FFFFFF"/>
+                    </a:solidFill>
+                    <a:latin typeface="Calibri" pitchFamily="34" charset="0"/>
+                    <a:ea typeface="Calibri" pitchFamily="34" charset="-122"/>
+                    <a:cs typeface="Calibri" pitchFamily="34" charset="-120"/>
+                  </a:rPr>
+                  <a:t>+</a:t>
+                </a:r>
+                <a:endParaRPr lang="en-US" sz="2000" dirty="0"/>
+              </a:p>
+            </p:txBody>
+          </p:sp>
+        </p:grpSp>
+        <p:grpSp>
+          <p:nvGrpSpPr>
+            <p:cNvPr id="39" name="Group 38">
+              <a:extLst>
+                <a:ext uri="{FF2B5EF4-FFF2-40B4-BE49-F238E27FC236}">
+                  <a16:creationId xmlns:a16="http://schemas.microsoft.com/office/drawing/2014/main" id="{8AA65A71-0038-7602-E63C-5B6D6D2D1F0E}"/>
+                </a:ext>
+              </a:extLst>
+            </p:cNvPr>
+            <p:cNvGrpSpPr/>
+            <p:nvPr/>
+          </p:nvGrpSpPr>
+          <p:grpSpPr>
+            <a:xfrm>
+              <a:off x="5001768" y="914400"/>
+              <a:ext cx="2836660" cy="2869917"/>
+              <a:chOff x="5001768" y="914400"/>
+              <a:chExt cx="2836660" cy="2869917"/>
+            </a:xfrm>
+          </p:grpSpPr>
+          <p:sp>
+            <p:nvSpPr>
+              <p:cNvPr id="23" name="Shape 21"/>
+              <p:cNvSpPr/>
+              <p:nvPr/>
+            </p:nvSpPr>
+            <p:spPr>
+              <a:xfrm>
+                <a:off x="5001768" y="914400"/>
+                <a:ext cx="2783695" cy="2869917"/>
+              </a:xfrm>
+              <a:prstGeom prst="rect">
+                <a:avLst/>
+              </a:prstGeom>
+              <a:solidFill>
+                <a:srgbClr val="FFFFFF"/>
+              </a:solidFill>
+              <a:ln w="9525">
+                <a:solidFill>
+                  <a:srgbClr val="E2E8F0"/>
+                </a:solidFill>
+                <a:prstDash val="solid"/>
+              </a:ln>
+              <a:effectLst>
+                <a:outerShdw blurRad="101600" dist="25400" dir="5400000" algn="bl" rotWithShape="0">
+                  <a:srgbClr val="000000">
+                    <a:alpha val="10000"/>
+                  </a:srgbClr>
+                </a:outerShdw>
+              </a:effectLst>
+            </p:spPr>
+          </p:sp>
+          <p:sp>
+            <p:nvSpPr>
+              <p:cNvPr id="24" name="Shape 22"/>
+              <p:cNvSpPr/>
+              <p:nvPr/>
+            </p:nvSpPr>
+            <p:spPr>
+              <a:xfrm>
+                <a:off x="5001768" y="914400"/>
+                <a:ext cx="45719" cy="2869917"/>
+              </a:xfrm>
+              <a:prstGeom prst="rect">
+                <a:avLst/>
+              </a:prstGeom>
+              <a:solidFill>
+                <a:srgbClr val="E11D48"/>
+              </a:solidFill>
+              <a:ln/>
+            </p:spPr>
+          </p:sp>
+          <p:sp>
+            <p:nvSpPr>
+              <p:cNvPr id="25" name="Text 23"/>
+              <p:cNvSpPr/>
+              <p:nvPr/>
+            </p:nvSpPr>
+            <p:spPr>
+              <a:xfrm>
+                <a:off x="5166360" y="1051560"/>
+                <a:ext cx="2598119" cy="251118"/>
+              </a:xfrm>
+              <a:prstGeom prst="rect">
+                <a:avLst/>
+              </a:prstGeom>
+              <a:noFill/>
+              <a:ln/>
+            </p:spPr>
+            <p:txBody>
+              <a:bodyPr wrap="square" lIns="0" tIns="0" rIns="0" bIns="0" rtlCol="0" anchor="ctr"/>
+              <a:lstStyle/>
+              <a:p>
+                <a:pPr marL="0" indent="0">
+                  <a:buNone/>
+                </a:pPr>
+                <a:r>
+                  <a:rPr lang="en-US" sz="1400" b="1" dirty="0">
+                    <a:solidFill>
+                      <a:srgbClr val="1E293B"/>
+                    </a:solidFill>
+                    <a:latin typeface="Calibri" pitchFamily="34" charset="0"/>
+                    <a:ea typeface="Calibri" pitchFamily="34" charset="-122"/>
+                    <a:cs typeface="Calibri" pitchFamily="34" charset="-120"/>
+                  </a:rPr>
+                  <a:t>Add: Mask Head</a:t>
+                </a:r>
+                <a:endParaRPr lang="en-US" sz="1400" dirty="0"/>
+              </a:p>
+            </p:txBody>
+          </p:sp>
+          <p:sp>
+            <p:nvSpPr>
+              <p:cNvPr id="26" name="Text 24"/>
+              <p:cNvSpPr/>
+              <p:nvPr/>
+            </p:nvSpPr>
+            <p:spPr>
+              <a:xfrm>
+                <a:off x="5166360" y="1371601"/>
+                <a:ext cx="2598117" cy="215244"/>
+              </a:xfrm>
+              <a:prstGeom prst="rect">
+                <a:avLst/>
+              </a:prstGeom>
+              <a:noFill/>
+              <a:ln/>
+            </p:spPr>
+            <p:txBody>
+              <a:bodyPr wrap="square" lIns="0" tIns="0" rIns="0" bIns="0" rtlCol="0" anchor="ctr"/>
+              <a:lstStyle/>
+              <a:p>
+                <a:pPr marL="0" indent="0">
+                  <a:buNone/>
+                </a:pPr>
+                <a:r>
+                  <a:rPr lang="en-US" sz="1050" i="1" dirty="0">
+                    <a:solidFill>
+                      <a:srgbClr val="64748B"/>
+                    </a:solidFill>
+                    <a:latin typeface="Calibri" pitchFamily="34" charset="0"/>
+                    <a:ea typeface="Calibri" pitchFamily="34" charset="-122"/>
+                    <a:cs typeface="Calibri" pitchFamily="34" charset="-120"/>
+                  </a:rPr>
+                  <a:t>Small FCN that predicts a binary mask per RoI:</a:t>
+                </a:r>
+                <a:endParaRPr lang="en-US" sz="1050" dirty="0"/>
+              </a:p>
+            </p:txBody>
+          </p:sp>
+          <p:sp>
+            <p:nvSpPr>
+              <p:cNvPr id="27" name="Shape 25"/>
+              <p:cNvSpPr/>
+              <p:nvPr/>
+            </p:nvSpPr>
+            <p:spPr>
+              <a:xfrm>
+                <a:off x="5212081" y="1856233"/>
+                <a:ext cx="74232" cy="86098"/>
+              </a:xfrm>
+              <a:prstGeom prst="ellipse">
+                <a:avLst/>
+              </a:prstGeom>
+              <a:solidFill>
+                <a:srgbClr val="E11D48"/>
+              </a:solidFill>
+              <a:ln/>
+            </p:spPr>
+          </p:sp>
+          <p:sp>
+            <p:nvSpPr>
+              <p:cNvPr id="28" name="Text 26"/>
+              <p:cNvSpPr/>
+              <p:nvPr/>
+            </p:nvSpPr>
+            <p:spPr>
+              <a:xfrm>
+                <a:off x="5394960" y="1783081"/>
+                <a:ext cx="2443468" cy="215244"/>
+              </a:xfrm>
+              <a:prstGeom prst="rect">
+                <a:avLst/>
+              </a:prstGeom>
+              <a:noFill/>
+              <a:ln/>
+            </p:spPr>
+            <p:txBody>
+              <a:bodyPr wrap="square" lIns="0" tIns="0" rIns="0" bIns="0" rtlCol="0" anchor="ctr"/>
+              <a:lstStyle/>
+              <a:p>
+                <a:pPr marL="0" indent="0">
+                  <a:buNone/>
+                </a:pPr>
+                <a:r>
+                  <a:rPr lang="en-US" sz="1100" dirty="0">
+                    <a:solidFill>
+                      <a:srgbClr val="374151"/>
+                    </a:solidFill>
+                    <a:latin typeface="Calibri" pitchFamily="34" charset="0"/>
+                    <a:ea typeface="Calibri" pitchFamily="34" charset="-122"/>
+                    <a:cs typeface="Calibri" pitchFamily="34" charset="-120"/>
+                  </a:rPr>
+                  <a:t>Parallel to the box/class heads</a:t>
+                </a:r>
+                <a:endParaRPr lang="en-US" sz="1100" dirty="0"/>
+              </a:p>
+            </p:txBody>
+          </p:sp>
+          <p:sp>
+            <p:nvSpPr>
+              <p:cNvPr id="29" name="Shape 27"/>
+              <p:cNvSpPr/>
+              <p:nvPr/>
+            </p:nvSpPr>
+            <p:spPr>
+              <a:xfrm>
+                <a:off x="5212081" y="2240281"/>
+                <a:ext cx="74232" cy="86098"/>
+              </a:xfrm>
+              <a:prstGeom prst="ellipse">
+                <a:avLst/>
+              </a:prstGeom>
+              <a:solidFill>
+                <a:srgbClr val="E11D48"/>
+              </a:solidFill>
+              <a:ln/>
+            </p:spPr>
+          </p:sp>
+          <p:sp>
+            <p:nvSpPr>
+              <p:cNvPr id="30" name="Text 28"/>
+              <p:cNvSpPr/>
+              <p:nvPr/>
+            </p:nvSpPr>
+            <p:spPr>
+              <a:xfrm>
+                <a:off x="5394960" y="2167129"/>
+                <a:ext cx="2443468" cy="215244"/>
+              </a:xfrm>
+              <a:prstGeom prst="rect">
+                <a:avLst/>
+              </a:prstGeom>
+              <a:noFill/>
+              <a:ln/>
+            </p:spPr>
+            <p:txBody>
+              <a:bodyPr wrap="square" lIns="0" tIns="0" rIns="0" bIns="0" rtlCol="0" anchor="ctr"/>
+              <a:lstStyle/>
+              <a:p>
+                <a:pPr marL="0" indent="0">
+                  <a:buNone/>
+                </a:pPr>
+                <a:r>
+                  <a:rPr lang="en-US" sz="1100" dirty="0">
+                    <a:solidFill>
+                      <a:srgbClr val="374151"/>
+                    </a:solidFill>
+                    <a:latin typeface="Calibri" pitchFamily="34" charset="0"/>
+                    <a:ea typeface="Calibri" pitchFamily="34" charset="-122"/>
+                    <a:cs typeface="Calibri" pitchFamily="34" charset="-120"/>
+                  </a:rPr>
+                  <a:t>Outputs K × m × m masks (one per class)</a:t>
+                </a:r>
+                <a:endParaRPr lang="en-US" sz="1100" dirty="0"/>
+              </a:p>
+            </p:txBody>
+          </p:sp>
+          <p:sp>
+            <p:nvSpPr>
+              <p:cNvPr id="31" name="Shape 29"/>
+              <p:cNvSpPr/>
+              <p:nvPr/>
+            </p:nvSpPr>
+            <p:spPr>
+              <a:xfrm>
+                <a:off x="5212081" y="2624329"/>
+                <a:ext cx="74232" cy="86098"/>
+              </a:xfrm>
+              <a:prstGeom prst="ellipse">
+                <a:avLst/>
+              </a:prstGeom>
+              <a:solidFill>
+                <a:srgbClr val="E11D48"/>
+              </a:solidFill>
+              <a:ln/>
+            </p:spPr>
+          </p:sp>
+          <p:sp>
+            <p:nvSpPr>
+              <p:cNvPr id="32" name="Text 30"/>
+              <p:cNvSpPr/>
+              <p:nvPr/>
+            </p:nvSpPr>
+            <p:spPr>
+              <a:xfrm>
+                <a:off x="5394960" y="2551177"/>
+                <a:ext cx="2443468" cy="215244"/>
+              </a:xfrm>
+              <a:prstGeom prst="rect">
+                <a:avLst/>
+              </a:prstGeom>
+              <a:noFill/>
+              <a:ln/>
+            </p:spPr>
+            <p:txBody>
+              <a:bodyPr wrap="square" lIns="0" tIns="0" rIns="0" bIns="0" rtlCol="0" anchor="ctr"/>
+              <a:lstStyle/>
+              <a:p>
+                <a:pPr marL="0" indent="0">
+                  <a:buNone/>
+                </a:pPr>
+                <a:r>
+                  <a:rPr lang="en-US" sz="1100" dirty="0">
+                    <a:solidFill>
+                      <a:srgbClr val="374151"/>
+                    </a:solidFill>
+                    <a:latin typeface="Calibri" pitchFamily="34" charset="0"/>
+                    <a:ea typeface="Calibri" pitchFamily="34" charset="-122"/>
+                    <a:cs typeface="Calibri" pitchFamily="34" charset="-120"/>
+                  </a:rPr>
+                  <a:t>Uses RoIAlign instead of RoIPool (key!)</a:t>
+                </a:r>
+                <a:endParaRPr lang="en-US" sz="1100" dirty="0"/>
+              </a:p>
+            </p:txBody>
+          </p:sp>
+          <p:sp>
+            <p:nvSpPr>
+              <p:cNvPr id="33" name="Shape 31"/>
+              <p:cNvSpPr/>
+              <p:nvPr/>
+            </p:nvSpPr>
+            <p:spPr>
+              <a:xfrm>
+                <a:off x="5212081" y="3008377"/>
+                <a:ext cx="74232" cy="86098"/>
+              </a:xfrm>
+              <a:prstGeom prst="ellipse">
+                <a:avLst/>
+              </a:prstGeom>
+              <a:solidFill>
+                <a:srgbClr val="E11D48"/>
+              </a:solidFill>
+              <a:ln/>
+            </p:spPr>
+          </p:sp>
+          <p:sp>
+            <p:nvSpPr>
+              <p:cNvPr id="34" name="Text 32"/>
+              <p:cNvSpPr/>
+              <p:nvPr/>
+            </p:nvSpPr>
+            <p:spPr>
+              <a:xfrm>
+                <a:off x="5394960" y="2935225"/>
+                <a:ext cx="2443468" cy="215244"/>
+              </a:xfrm>
+              <a:prstGeom prst="rect">
+                <a:avLst/>
+              </a:prstGeom>
+              <a:noFill/>
+              <a:ln/>
+            </p:spPr>
+            <p:txBody>
+              <a:bodyPr wrap="square" lIns="0" tIns="0" rIns="0" bIns="0" rtlCol="0" anchor="ctr"/>
+              <a:lstStyle/>
+              <a:p>
+                <a:pPr marL="0" indent="0">
+                  <a:buNone/>
+                </a:pPr>
+                <a:r>
+                  <a:rPr lang="en-US" sz="1100" dirty="0">
+                    <a:solidFill>
+                      <a:srgbClr val="374151"/>
+                    </a:solidFill>
+                    <a:latin typeface="Calibri" pitchFamily="34" charset="0"/>
+                    <a:ea typeface="Calibri" pitchFamily="34" charset="-122"/>
+                    <a:cs typeface="Calibri" pitchFamily="34" charset="-120"/>
+                  </a:rPr>
+                  <a:t>Trained with per-pixel binary CE loss</a:t>
+                </a:r>
+                <a:endParaRPr lang="en-US" sz="1100" dirty="0"/>
+              </a:p>
+            </p:txBody>
+          </p:sp>
+          <p:sp>
+            <p:nvSpPr>
+              <p:cNvPr id="35" name="Text 33"/>
+              <p:cNvSpPr/>
+              <p:nvPr/>
+            </p:nvSpPr>
+            <p:spPr>
+              <a:xfrm>
+                <a:off x="5166361" y="3364992"/>
+                <a:ext cx="2598112" cy="286991"/>
+              </a:xfrm>
+              <a:prstGeom prst="rect">
+                <a:avLst/>
+              </a:prstGeom>
+              <a:noFill/>
+              <a:ln/>
+            </p:spPr>
+            <p:txBody>
+              <a:bodyPr wrap="square" lIns="0" tIns="0" rIns="0" bIns="0" rtlCol="0" anchor="ctr"/>
+              <a:lstStyle/>
+              <a:p>
+                <a:pPr marL="0" indent="0">
+                  <a:buNone/>
+                </a:pPr>
+                <a:r>
+                  <a:rPr lang="en-US" sz="1100" b="1" i="1" dirty="0">
+                    <a:solidFill>
+                      <a:srgbClr val="E11D48"/>
+                    </a:solidFill>
+                    <a:latin typeface="Calibri" pitchFamily="34" charset="0"/>
+                    <a:ea typeface="Calibri" pitchFamily="34" charset="-122"/>
+                    <a:cs typeface="Calibri" pitchFamily="34" charset="-120"/>
+                  </a:rPr>
+                  <a:t>Output: pixel-perfect mask per object</a:t>
+                </a:r>
+                <a:endParaRPr lang="en-US" sz="1100" dirty="0"/>
+              </a:p>
+            </p:txBody>
+          </p:sp>
+        </p:grpSp>
+      </p:grpSp>
       <p:sp>
         <p:nvSpPr>
           <p:cNvPr id="36" name="Shape 34"/>
@@ -6617,7 +6435,7 @@
           <a:bodyPr wrap="square" lIns="0" tIns="0" rIns="0" bIns="0" rtlCol="0" anchor="ctr"/>
           <a:lstStyle/>
           <a:p>
-            <a:pPr algn="ctr" indent="0" marL="0">
+            <a:pPr marL="0" indent="0" algn="ctr">
               <a:buNone/>
             </a:pPr>
             <a:r>
@@ -6651,6 +6469,7 @@
         <a:solidFill>
           <a:srgbClr val="F8FAFC"/>
         </a:solidFill>
+        <a:effectLst/>
       </p:bgPr>
     </p:bg>
     <p:spTree>
@@ -6728,7 +6547,7 @@
           <a:bodyPr wrap="square" lIns="0" tIns="0" rIns="0" bIns="0" rtlCol="0" anchor="ctr"/>
           <a:lstStyle/>
           <a:p>
-            <a:pPr indent="0" marL="0">
+            <a:pPr marL="0" indent="0">
               <a:buNone/>
             </a:pPr>
             <a:r>
@@ -6767,11 +6586,11 @@
           <a:bodyPr wrap="square" lIns="0" tIns="0" rIns="0" bIns="0" rtlCol="0" anchor="ctr"/>
           <a:lstStyle/>
           <a:p>
-            <a:pPr algn="r" indent="0" marL="0">
-              <a:buNone/>
-            </a:pPr>
-            <a:r>
-              <a:rPr lang="en-US" sz="900" b="1" spc="400" kern="0" dirty="0">
+            <a:pPr marL="0" indent="0" algn="r">
+              <a:buNone/>
+            </a:pPr>
+            <a:r>
+              <a:rPr lang="en-US" sz="900" b="1" kern="0" spc="400" dirty="0">
                 <a:solidFill>
                   <a:srgbClr val="BFDBFE"/>
                 </a:solidFill>
@@ -6826,7 +6645,7 @@
           <a:bodyPr wrap="square" lIns="0" tIns="0" rIns="0" bIns="0" rtlCol="0" anchor="ctr"/>
           <a:lstStyle/>
           <a:p>
-            <a:pPr indent="0" marL="0">
+            <a:pPr marL="0" indent="0">
               <a:buNone/>
             </a:pPr>
             <a:r>
@@ -6865,7 +6684,7 @@
           </a:solidFill>
           <a:ln/>
           <a:effectLst>
-            <a:outerShdw sx="100000" sy="100000" kx="0" ky="0" algn="bl" rotWithShape="0" blurRad="101600" dist="25400" dir="5400000">
+            <a:outerShdw blurRad="101600" dist="25400" dir="5400000" algn="bl" rotWithShape="0">
               <a:srgbClr val="000000">
                 <a:alpha val="10000"/>
               </a:srgbClr>
@@ -6894,7 +6713,7 @@
           <a:bodyPr wrap="square" lIns="0" tIns="0" rIns="0" bIns="0" rtlCol="0" anchor="ctr"/>
           <a:lstStyle/>
           <a:p>
-            <a:pPr algn="ctr" indent="0" marL="0">
+            <a:pPr marL="0" indent="0" algn="ctr">
               <a:buNone/>
             </a:pPr>
             <a:r>
@@ -6911,7 +6730,7 @@
             <a:endParaRPr lang="en-US" sz="1200" dirty="0"/>
           </a:p>
           <a:p>
-            <a:pPr algn="ctr" indent="0" marL="0">
+            <a:pPr marL="0" indent="0" algn="ctr">
               <a:buNone/>
             </a:pPr>
             <a:r>
@@ -6940,7 +6759,7 @@
             <a:off x="2103120" y="1673352"/>
             <a:ext cx="274320" cy="228600"/>
           </a:xfrm>
-          <a:prstGeom prst="rightTriangle">
+          <a:prstGeom prst="line">
             <a:avLst/>
           </a:prstGeom>
           <a:solidFill>
@@ -6970,7 +6789,7 @@
           </a:solidFill>
           <a:ln/>
           <a:effectLst>
-            <a:outerShdw sx="100000" sy="100000" kx="0" ky="0" algn="bl" rotWithShape="0" blurRad="101600" dist="25400" dir="5400000">
+            <a:outerShdw blurRad="101600" dist="25400" dir="5400000" algn="bl" rotWithShape="0">
               <a:srgbClr val="000000">
                 <a:alpha val="10000"/>
               </a:srgbClr>
@@ -6999,7 +6818,7 @@
           <a:bodyPr wrap="square" lIns="0" tIns="0" rIns="0" bIns="0" rtlCol="0" anchor="ctr"/>
           <a:lstStyle/>
           <a:p>
-            <a:pPr algn="ctr" indent="0" marL="0">
+            <a:pPr marL="0" indent="0" algn="ctr">
               <a:buNone/>
             </a:pPr>
             <a:r>
@@ -7016,7 +6835,7 @@
             <a:endParaRPr lang="en-US" sz="1200" dirty="0"/>
           </a:p>
           <a:p>
-            <a:pPr algn="ctr" indent="0" marL="0">
+            <a:pPr marL="0" indent="0" algn="ctr">
               <a:buNone/>
             </a:pPr>
             <a:r>
@@ -7045,7 +6864,7 @@
             <a:off x="4069080" y="1673352"/>
             <a:ext cx="274320" cy="228600"/>
           </a:xfrm>
-          <a:prstGeom prst="rightTriangle">
+          <a:prstGeom prst="line">
             <a:avLst/>
           </a:prstGeom>
           <a:solidFill>
@@ -7075,7 +6894,7 @@
           </a:solidFill>
           <a:ln/>
           <a:effectLst>
-            <a:outerShdw sx="100000" sy="100000" kx="0" ky="0" algn="bl" rotWithShape="0" blurRad="101600" dist="25400" dir="5400000">
+            <a:outerShdw blurRad="101600" dist="25400" dir="5400000" algn="bl" rotWithShape="0">
               <a:srgbClr val="000000">
                 <a:alpha val="10000"/>
               </a:srgbClr>
@@ -7104,7 +6923,7 @@
           <a:bodyPr wrap="square" lIns="0" tIns="0" rIns="0" bIns="0" rtlCol="0" anchor="ctr"/>
           <a:lstStyle/>
           <a:p>
-            <a:pPr algn="ctr" indent="0" marL="0">
+            <a:pPr marL="0" indent="0" algn="ctr">
               <a:buNone/>
             </a:pPr>
             <a:r>
@@ -7121,7 +6940,7 @@
             <a:endParaRPr lang="en-US" sz="1200" dirty="0"/>
           </a:p>
           <a:p>
-            <a:pPr algn="ctr" indent="0" marL="0">
+            <a:pPr marL="0" indent="0" algn="ctr">
               <a:buNone/>
             </a:pPr>
             <a:r>
@@ -7150,7 +6969,7 @@
             <a:off x="6035040" y="1673352"/>
             <a:ext cx="274320" cy="228600"/>
           </a:xfrm>
-          <a:prstGeom prst="rightTriangle">
+          <a:prstGeom prst="line">
             <a:avLst/>
           </a:prstGeom>
           <a:solidFill>
@@ -7180,7 +6999,7 @@
           </a:solidFill>
           <a:ln/>
           <a:effectLst>
-            <a:outerShdw sx="100000" sy="100000" kx="0" ky="0" algn="bl" rotWithShape="0" blurRad="101600" dist="25400" dir="5400000">
+            <a:outerShdw blurRad="101600" dist="25400" dir="5400000" algn="bl" rotWithShape="0">
               <a:srgbClr val="000000">
                 <a:alpha val="10000"/>
               </a:srgbClr>
@@ -7209,7 +7028,7 @@
           <a:bodyPr wrap="square" lIns="0" tIns="0" rIns="0" bIns="0" rtlCol="0" anchor="ctr"/>
           <a:lstStyle/>
           <a:p>
-            <a:pPr algn="ctr" indent="0" marL="0">
+            <a:pPr marL="0" indent="0" algn="ctr">
               <a:buNone/>
             </a:pPr>
             <a:r>
@@ -7251,7 +7070,7 @@
             <a:prstDash val="solid"/>
           </a:ln>
           <a:effectLst>
-            <a:outerShdw sx="100000" sy="100000" kx="0" ky="0" algn="bl" rotWithShape="0" blurRad="101600" dist="25400" dir="5400000">
+            <a:outerShdw blurRad="101600" dist="25400" dir="5400000" algn="bl" rotWithShape="0">
               <a:srgbClr val="000000">
                 <a:alpha val="10000"/>
               </a:srgbClr>
@@ -7300,7 +7119,7 @@
           <a:bodyPr wrap="square" lIns="0" tIns="0" rIns="0" bIns="0" rtlCol="0" anchor="ctr"/>
           <a:lstStyle/>
           <a:p>
-            <a:pPr indent="0" marL="0">
+            <a:pPr marL="0" indent="0">
               <a:buNone/>
             </a:pPr>
             <a:r>
@@ -7339,7 +7158,7 @@
           <a:bodyPr wrap="square" lIns="0" tIns="0" rIns="0" bIns="0" rtlCol="0" anchor="ctr"/>
           <a:lstStyle/>
           <a:p>
-            <a:pPr indent="0" marL="0">
+            <a:pPr marL="0" indent="0">
               <a:buNone/>
             </a:pPr>
             <a:r>
@@ -7378,11 +7197,11 @@
           <a:bodyPr wrap="square" lIns="0" tIns="0" rIns="0" bIns="0" rtlCol="0" anchor="ctr"/>
           <a:lstStyle/>
           <a:p>
-            <a:pPr indent="0" marL="0">
-              <a:buNone/>
-            </a:pPr>
-            <a:r>
-              <a:rPr lang="en-US" sz="900" b="1" spc="400" kern="0" dirty="0">
+            <a:pPr marL="0" indent="0">
+              <a:buNone/>
+            </a:pPr>
+            <a:r>
+              <a:rPr lang="en-US" sz="900" b="1" kern="0" spc="400" dirty="0">
                 <a:solidFill>
                   <a:srgbClr val="64748B"/>
                 </a:solidFill>
@@ -7439,7 +7258,7 @@
           <a:bodyPr wrap="square" lIns="0" tIns="0" rIns="0" bIns="0" rtlCol="0" anchor="ctr"/>
           <a:lstStyle/>
           <a:p>
-            <a:pPr algn="ctr" indent="0" marL="0">
+            <a:pPr marL="0" indent="0" algn="ctr">
               <a:buNone/>
             </a:pPr>
             <a:r>
@@ -7478,7 +7297,7 @@
           <a:bodyPr wrap="square" lIns="0" tIns="0" rIns="0" bIns="0" rtlCol="0" anchor="ctr"/>
           <a:lstStyle/>
           <a:p>
-            <a:pPr indent="0" marL="0">
+            <a:pPr marL="0" indent="0">
               <a:buNone/>
             </a:pPr>
             <a:r>
@@ -7539,7 +7358,7 @@
           <a:bodyPr wrap="square" lIns="0" tIns="0" rIns="0" bIns="0" rtlCol="0" anchor="ctr"/>
           <a:lstStyle/>
           <a:p>
-            <a:pPr algn="ctr" indent="0" marL="0">
+            <a:pPr marL="0" indent="0" algn="ctr">
               <a:buNone/>
             </a:pPr>
             <a:r>
@@ -7578,7 +7397,7 @@
           <a:bodyPr wrap="square" lIns="0" tIns="0" rIns="0" bIns="0" rtlCol="0" anchor="ctr"/>
           <a:lstStyle/>
           <a:p>
-            <a:pPr indent="0" marL="0">
+            <a:pPr marL="0" indent="0">
               <a:buNone/>
             </a:pPr>
             <a:r>
@@ -7639,7 +7458,7 @@
           <a:bodyPr wrap="square" lIns="0" tIns="0" rIns="0" bIns="0" rtlCol="0" anchor="ctr"/>
           <a:lstStyle/>
           <a:p>
-            <a:pPr algn="ctr" indent="0" marL="0">
+            <a:pPr marL="0" indent="0" algn="ctr">
               <a:buNone/>
             </a:pPr>
             <a:r>
@@ -7678,7 +7497,7 @@
           <a:bodyPr wrap="square" lIns="0" tIns="0" rIns="0" bIns="0" rtlCol="0" anchor="ctr"/>
           <a:lstStyle/>
           <a:p>
-            <a:pPr indent="0" marL="0">
+            <a:pPr marL="0" indent="0">
               <a:buNone/>
             </a:pPr>
             <a:r>
@@ -7712,6 +7531,7 @@
         <a:solidFill>
           <a:srgbClr val="F8FAFC"/>
         </a:solidFill>
+        <a:effectLst/>
       </p:bgPr>
     </p:bg>
     <p:spTree>
@@ -7789,7 +7609,7 @@
           <a:bodyPr wrap="square" lIns="0" tIns="0" rIns="0" bIns="0" rtlCol="0" anchor="ctr"/>
           <a:lstStyle/>
           <a:p>
-            <a:pPr indent="0" marL="0">
+            <a:pPr marL="0" indent="0">
               <a:buNone/>
             </a:pPr>
             <a:r>
@@ -7828,11 +7648,11 @@
           <a:bodyPr wrap="square" lIns="0" tIns="0" rIns="0" bIns="0" rtlCol="0" anchor="ctr"/>
           <a:lstStyle/>
           <a:p>
-            <a:pPr algn="r" indent="0" marL="0">
-              <a:buNone/>
-            </a:pPr>
-            <a:r>
-              <a:rPr lang="en-US" sz="900" b="1" spc="400" kern="0" dirty="0">
+            <a:pPr marL="0" indent="0" algn="r">
+              <a:buNone/>
+            </a:pPr>
+            <a:r>
+              <a:rPr lang="en-US" sz="900" b="1" kern="0" spc="400" dirty="0">
                 <a:solidFill>
                   <a:srgbClr val="BFDBFE"/>
                 </a:solidFill>
@@ -7887,7 +7707,7 @@
           <a:bodyPr wrap="square" lIns="0" tIns="0" rIns="0" bIns="0" rtlCol="0" anchor="ctr"/>
           <a:lstStyle/>
           <a:p>
-            <a:pPr indent="0" marL="0">
+            <a:pPr marL="0" indent="0">
               <a:buNone/>
             </a:pPr>
             <a:r>
@@ -7914,7 +7734,7 @@
         <p:spPr>
           <a:xfrm>
             <a:off x="384048" y="914400"/>
-            <a:ext cx="4114800" cy="3657600"/>
+            <a:ext cx="4114800" cy="3730752"/>
           </a:xfrm>
           <a:prstGeom prst="rect">
             <a:avLst/>
@@ -7929,7 +7749,7 @@
             <a:prstDash val="solid"/>
           </a:ln>
           <a:effectLst>
-            <a:outerShdw sx="100000" sy="100000" kx="0" ky="0" algn="bl" rotWithShape="0" blurRad="101600" dist="25400" dir="5400000">
+            <a:outerShdw blurRad="101600" dist="25400" dir="5400000" algn="bl" rotWithShape="0">
               <a:srgbClr val="000000">
                 <a:alpha val="10000"/>
               </a:srgbClr>
@@ -7978,7 +7798,7 @@
           <a:bodyPr wrap="square" lIns="0" tIns="0" rIns="0" bIns="0" rtlCol="0" anchor="ctr"/>
           <a:lstStyle/>
           <a:p>
-            <a:pPr indent="0" marL="0">
+            <a:pPr marL="0" indent="0">
               <a:buNone/>
             </a:pPr>
             <a:r>
@@ -8017,7 +7837,7 @@
           <a:bodyPr wrap="square" lIns="0" tIns="0" rIns="0" bIns="0" rtlCol="0" anchor="ctr"/>
           <a:lstStyle/>
           <a:p>
-            <a:pPr indent="0" marL="0">
+            <a:pPr marL="0" indent="0">
               <a:buNone/>
             </a:pPr>
             <a:r>
@@ -8076,7 +7896,7 @@
           <a:bodyPr wrap="square" lIns="0" tIns="0" rIns="0" bIns="0" rtlCol="0" anchor="ctr"/>
           <a:lstStyle/>
           <a:p>
-            <a:pPr indent="0" marL="0">
+            <a:pPr marL="0" indent="0">
               <a:buNone/>
             </a:pPr>
             <a:r>
@@ -8090,9 +7910,6 @@
               </a:rPr>
               <a:t>Backbone + FPN — </a:t>
             </a:r>
-            <a:pPr indent="0" marL="0">
-              <a:buNone/>
-            </a:pPr>
             <a:r>
               <a:rPr lang="en-US" sz="1100" dirty="0">
                 <a:solidFill>
@@ -8149,7 +7966,7 @@
           <a:bodyPr wrap="square" lIns="0" tIns="0" rIns="0" bIns="0" rtlCol="0" anchor="ctr"/>
           <a:lstStyle/>
           <a:p>
-            <a:pPr indent="0" marL="0">
+            <a:pPr marL="0" indent="0">
               <a:buNone/>
             </a:pPr>
             <a:r>
@@ -8163,9 +7980,6 @@
               </a:rPr>
               <a:t>Detection head — </a:t>
             </a:r>
-            <a:pPr indent="0" marL="0">
-              <a:buNone/>
-            </a:pPr>
             <a:r>
               <a:rPr lang="en-US" sz="1100" dirty="0">
                 <a:solidFill>
@@ -8222,7 +8036,7 @@
           <a:bodyPr wrap="square" lIns="0" tIns="0" rIns="0" bIns="0" rtlCol="0" anchor="ctr"/>
           <a:lstStyle/>
           <a:p>
-            <a:pPr indent="0" marL="0">
+            <a:pPr marL="0" indent="0">
               <a:buNone/>
             </a:pPr>
             <a:r>
@@ -8236,9 +8050,6 @@
               </a:rPr>
               <a:t>Prototype branch — </a:t>
             </a:r>
-            <a:pPr indent="0" marL="0">
-              <a:buNone/>
-            </a:pPr>
             <a:r>
               <a:rPr lang="en-US" sz="1100" dirty="0">
                 <a:solidFill>
@@ -8295,7 +8106,7 @@
           <a:bodyPr wrap="square" lIns="0" tIns="0" rIns="0" bIns="0" rtlCol="0" anchor="ctr"/>
           <a:lstStyle/>
           <a:p>
-            <a:pPr indent="0" marL="0">
+            <a:pPr marL="0" indent="0">
               <a:buNone/>
             </a:pPr>
             <a:r>
@@ -8309,9 +8120,6 @@
               </a:rPr>
               <a:t>Combine — </a:t>
             </a:r>
-            <a:pPr indent="0" marL="0">
-              <a:buNone/>
-            </a:pPr>
             <a:r>
               <a:rPr lang="en-US" sz="1100" dirty="0">
                 <a:solidFill>
@@ -8348,7 +8156,7 @@
           <a:bodyPr wrap="square" lIns="0" tIns="0" rIns="0" bIns="0" rtlCol="0" anchor="ctr"/>
           <a:lstStyle/>
           <a:p>
-            <a:pPr indent="0" marL="0">
+            <a:pPr marL="0" indent="0">
               <a:buNone/>
             </a:pPr>
             <a:r>
@@ -8375,7 +8183,7 @@
         <p:spPr>
           <a:xfrm>
             <a:off x="4636008" y="914400"/>
-            <a:ext cx="4160520" cy="3657600"/>
+            <a:ext cx="4160520" cy="3730752"/>
           </a:xfrm>
           <a:prstGeom prst="rect">
             <a:avLst/>
@@ -8390,7 +8198,7 @@
             <a:prstDash val="solid"/>
           </a:ln>
           <a:effectLst>
-            <a:outerShdw sx="100000" sy="100000" kx="0" ky="0" algn="bl" rotWithShape="0" blurRad="101600" dist="25400" dir="5400000">
+            <a:outerShdw blurRad="101600" dist="25400" dir="5400000" algn="bl" rotWithShape="0">
               <a:srgbClr val="000000">
                 <a:alpha val="10000"/>
               </a:srgbClr>
@@ -8419,7 +8227,7 @@
           <a:bodyPr wrap="square" lIns="0" tIns="0" rIns="0" bIns="0" rtlCol="0" anchor="ctr"/>
           <a:lstStyle/>
           <a:p>
-            <a:pPr indent="0" marL="0">
+            <a:pPr marL="0" indent="0">
               <a:buNone/>
             </a:pPr>
             <a:r>
@@ -8437,29 +8245,6 @@
           </a:p>
         </p:txBody>
       </p:sp>
-      <p:pic>
-        <p:nvPicPr>
-          <p:cNvPr id="23" name="Image 0" descr="/sessions/cool-beautiful-archimedes/mnt/outputs/session11_images/dbc_instance_overlay.jpg">    </p:cNvPr>
-          <p:cNvPicPr>
-            <a:picLocks noChangeAspect="1"/>
-          </p:cNvPicPr>
-          <p:nvPr/>
-        </p:nvPicPr>
-        <p:blipFill>
-          <a:blip r:embed="rId1"/>
-          <a:srcRect l="0" r="0" t="0" b="0"/>
-          <a:stretch/>
-        </p:blipFill>
-        <p:spPr>
-          <a:xfrm>
-            <a:off x="4818888" y="1371600"/>
-            <a:ext cx="3794760" cy="2286000"/>
-          </a:xfrm>
-          <a:prstGeom prst="rect">
-            <a:avLst/>
-          </a:prstGeom>
-        </p:spPr>
-      </p:pic>
       <p:sp>
         <p:nvSpPr>
           <p:cNvPr id="24" name="Shape 21"/>
@@ -8505,7 +8290,7 @@
           <a:bodyPr wrap="square" lIns="0" tIns="0" rIns="0" bIns="0" rtlCol="0" anchor="ctr"/>
           <a:lstStyle/>
           <a:p>
-            <a:pPr algn="ctr" indent="0" marL="0">
+            <a:pPr marL="0" indent="0" algn="ctr">
               <a:buNone/>
             </a:pPr>
             <a:r>
@@ -8544,7 +8329,7 @@
           <a:bodyPr wrap="square" lIns="0" tIns="0" rIns="0" bIns="0" rtlCol="0" anchor="ctr"/>
           <a:lstStyle/>
           <a:p>
-            <a:pPr algn="ctr" indent="0" marL="0">
+            <a:pPr marL="0" indent="0" algn="ctr">
               <a:buNone/>
             </a:pPr>
             <a:r>
@@ -8556,7 +8341,7 @@
                 <a:ea typeface="Courier New" pitchFamily="34" charset="-122"/>
                 <a:cs typeface="Courier New" pitchFamily="34" charset="-120"/>
               </a:rPr>
-              <a:t>0.97</a:t>
+              <a:t>0.90</a:t>
             </a:r>
             <a:endParaRPr lang="en-US" sz="1000" dirty="0"/>
           </a:p>
@@ -8607,7 +8392,7 @@
           <a:bodyPr wrap="square" lIns="0" tIns="0" rIns="0" bIns="0" rtlCol="0" anchor="ctr"/>
           <a:lstStyle/>
           <a:p>
-            <a:pPr algn="ctr" indent="0" marL="0">
+            <a:pPr marL="0" indent="0" algn="ctr">
               <a:buNone/>
             </a:pPr>
             <a:r>
@@ -8646,7 +8431,7 @@
           <a:bodyPr wrap="square" lIns="0" tIns="0" rIns="0" bIns="0" rtlCol="0" anchor="ctr"/>
           <a:lstStyle/>
           <a:p>
-            <a:pPr algn="ctr" indent="0" marL="0">
+            <a:pPr marL="0" indent="0" algn="ctr">
               <a:buNone/>
             </a:pPr>
             <a:r>
@@ -8658,7 +8443,7 @@
                 <a:ea typeface="Courier New" pitchFamily="34" charset="-122"/>
                 <a:cs typeface="Courier New" pitchFamily="34" charset="-120"/>
               </a:rPr>
-              <a:t>0.93</a:t>
+              <a:t>0.86</a:t>
             </a:r>
             <a:endParaRPr lang="en-US" sz="1000" dirty="0"/>
           </a:p>
@@ -8709,7 +8494,7 @@
           <a:bodyPr wrap="square" lIns="0" tIns="0" rIns="0" bIns="0" rtlCol="0" anchor="ctr"/>
           <a:lstStyle/>
           <a:p>
-            <a:pPr algn="ctr" indent="0" marL="0">
+            <a:pPr marL="0" indent="0" algn="ctr">
               <a:buNone/>
             </a:pPr>
             <a:r>
@@ -8748,7 +8533,7 @@
           <a:bodyPr wrap="square" lIns="0" tIns="0" rIns="0" bIns="0" rtlCol="0" anchor="ctr"/>
           <a:lstStyle/>
           <a:p>
-            <a:pPr algn="ctr" indent="0" marL="0">
+            <a:pPr marL="0" indent="0" algn="ctr">
               <a:buNone/>
             </a:pPr>
             <a:r>
@@ -8760,7 +8545,7 @@
                 <a:ea typeface="Courier New" pitchFamily="34" charset="-122"/>
                 <a:cs typeface="Courier New" pitchFamily="34" charset="-120"/>
               </a:rPr>
-              <a:t>0.88</a:t>
+              <a:t>0.56</a:t>
             </a:r>
             <a:endParaRPr lang="en-US" sz="1000" dirty="0"/>
           </a:p>
@@ -8787,7 +8572,7 @@
           <a:bodyPr wrap="square" lIns="0" tIns="0" rIns="0" bIns="0" rtlCol="0" anchor="ctr"/>
           <a:lstStyle/>
           <a:p>
-            <a:pPr indent="0" marL="0">
+            <a:pPr marL="0" indent="0" algn="ctr">
               <a:buNone/>
             </a:pPr>
             <a:r>
@@ -8805,6 +8590,36 @@
           </a:p>
         </p:txBody>
       </p:sp>
+      <p:pic>
+        <p:nvPicPr>
+          <p:cNvPr id="35" name="Picture 34">
+            <a:extLst>
+              <a:ext uri="{FF2B5EF4-FFF2-40B4-BE49-F238E27FC236}">
+                <a16:creationId xmlns:a16="http://schemas.microsoft.com/office/drawing/2014/main" id="{7827EE6B-17DB-B56C-4BCE-D7D09A378877}"/>
+              </a:ext>
+            </a:extLst>
+          </p:cNvPr>
+          <p:cNvPicPr>
+            <a:picLocks noChangeAspect="1"/>
+          </p:cNvPicPr>
+          <p:nvPr/>
+        </p:nvPicPr>
+        <p:blipFill>
+          <a:blip r:embed="rId3"/>
+          <a:stretch>
+            <a:fillRect/>
+          </a:stretch>
+        </p:blipFill>
+        <p:spPr>
+          <a:xfrm>
+            <a:off x="5285702" y="1486127"/>
+            <a:ext cx="2875318" cy="2148386"/>
+          </a:xfrm>
+          <a:prstGeom prst="rect">
+            <a:avLst/>
+          </a:prstGeom>
+        </p:spPr>
+      </p:pic>
     </p:spTree>
   </p:cSld>
   <p:clrMapOvr>
@@ -8821,6 +8636,7 @@
         <a:solidFill>
           <a:srgbClr val="F8FAFC"/>
         </a:solidFill>
+        <a:effectLst/>
       </p:bgPr>
     </p:bg>
     <p:spTree>
@@ -8898,7 +8714,7 @@
           <a:bodyPr wrap="square" lIns="0" tIns="0" rIns="0" bIns="0" rtlCol="0" anchor="ctr"/>
           <a:lstStyle/>
           <a:p>
-            <a:pPr indent="0" marL="0">
+            <a:pPr marL="0" indent="0">
               <a:buNone/>
             </a:pPr>
             <a:r>
@@ -8937,11 +8753,11 @@
           <a:bodyPr wrap="square" lIns="0" tIns="0" rIns="0" bIns="0" rtlCol="0" anchor="ctr"/>
           <a:lstStyle/>
           <a:p>
-            <a:pPr algn="r" indent="0" marL="0">
-              <a:buNone/>
-            </a:pPr>
-            <a:r>
-              <a:rPr lang="en-US" sz="900" b="1" spc="400" kern="0" dirty="0">
+            <a:pPr marL="0" indent="0" algn="r">
+              <a:buNone/>
+            </a:pPr>
+            <a:r>
+              <a:rPr lang="en-US" sz="900" b="1" kern="0" spc="400" dirty="0">
                 <a:solidFill>
                   <a:srgbClr val="BFDBFE"/>
                 </a:solidFill>
@@ -8996,7 +8812,7 @@
           <a:bodyPr wrap="square" lIns="0" tIns="0" rIns="0" bIns="0" rtlCol="0" anchor="ctr"/>
           <a:lstStyle/>
           <a:p>
-            <a:pPr indent="0" marL="0">
+            <a:pPr marL="0" indent="0">
               <a:buNone/>
             </a:pPr>
             <a:r>
@@ -9030,16 +8846,34 @@
         </p:nvGraphicFramePr>
         <p:xfrm>
           <a:off x="384048" y="914400"/>
-          <a:ext cx="8412480" cy="3749040"/>
+          <a:ext cx="8412480" cy="3291840"/>
         </p:xfrm>
         <a:graphic>
           <a:graphicData uri="http://schemas.openxmlformats.org/drawingml/2006/table">
             <a:tbl>
               <a:tblPr/>
               <a:tblGrid>
-                <a:gridCol w="2377440"/>
-                <a:gridCol w="3017520"/>
-                <a:gridCol w="3017520"/>
+                <a:gridCol w="2377440">
+                  <a:extLst>
+                    <a:ext uri="{9D8B030D-6E8A-4147-A177-3AD203B41FA5}">
+                      <a16:colId xmlns:a16="http://schemas.microsoft.com/office/drawing/2014/main" val="20000"/>
+                    </a:ext>
+                  </a:extLst>
+                </a:gridCol>
+                <a:gridCol w="3017520">
+                  <a:extLst>
+                    <a:ext uri="{9D8B030D-6E8A-4147-A177-3AD203B41FA5}">
+                      <a16:colId xmlns:a16="http://schemas.microsoft.com/office/drawing/2014/main" val="20001"/>
+                    </a:ext>
+                  </a:extLst>
+                </a:gridCol>
+                <a:gridCol w="3017520">
+                  <a:extLst>
+                    <a:ext uri="{9D8B030D-6E8A-4147-A177-3AD203B41FA5}">
+                      <a16:colId xmlns:a16="http://schemas.microsoft.com/office/drawing/2014/main" val="20002"/>
+                    </a:ext>
+                  </a:extLst>
+                </a:gridCol>
               </a:tblGrid>
               <a:tr h="411480">
                 <a:tc>
@@ -9047,7 +8881,7 @@
                     <a:bodyPr/>
                     <a:lstStyle/>
                     <a:p>
-                      <a:pPr algn="l" indent="0" marL="0">
+                      <a:pPr marL="0" indent="0" algn="l">
                         <a:buNone/>
                       </a:pPr>
                       <a:r>
@@ -9068,7 +8902,7 @@
                       </a:endParaRPr>
                     </a:p>
                   </a:txBody>
-                  <a:tcPr marL="91440" marR="91440" marT="45720" marB="45720" anchor="ctr">
+                  <a:tcPr anchor="ctr">
                     <a:lnL w="6350" cap="flat" cmpd="sng" algn="ctr">
                       <a:solidFill>
                         <a:srgbClr val="E2E8F0"/>
@@ -9115,7 +8949,7 @@
                     <a:bodyPr/>
                     <a:lstStyle/>
                     <a:p>
-                      <a:pPr algn="ctr" indent="0" marL="0">
+                      <a:pPr marL="0" indent="0" algn="ctr">
                         <a:buNone/>
                       </a:pPr>
                       <a:r>
@@ -9136,7 +8970,7 @@
                       </a:endParaRPr>
                     </a:p>
                   </a:txBody>
-                  <a:tcPr marL="91440" marR="91440" marT="45720" marB="45720" anchor="ctr">
+                  <a:tcPr anchor="ctr">
                     <a:lnL w="6350" cap="flat" cmpd="sng" algn="ctr">
                       <a:solidFill>
                         <a:srgbClr val="E2E8F0"/>
@@ -9183,7 +9017,7 @@
                     <a:bodyPr/>
                     <a:lstStyle/>
                     <a:p>
-                      <a:pPr algn="ctr" indent="0" marL="0">
+                      <a:pPr marL="0" indent="0" algn="ctr">
                         <a:buNone/>
                       </a:pPr>
                       <a:r>
@@ -9204,7 +9038,7 @@
                       </a:endParaRPr>
                     </a:p>
                   </a:txBody>
-                  <a:tcPr marL="91440" marR="91440" marT="45720" marB="45720" anchor="ctr">
+                  <a:tcPr anchor="ctr">
                     <a:lnL w="6350" cap="flat" cmpd="sng" algn="ctr">
                       <a:solidFill>
                         <a:srgbClr val="E2E8F0"/>
@@ -9246,6 +9080,11 @@
                     </a:solidFill>
                   </a:tcPr>
                 </a:tc>
+                <a:extLst>
+                  <a:ext uri="{0D108BD9-81ED-4DB2-BD59-A6C34878D82A}">
+                    <a16:rowId xmlns:a16="http://schemas.microsoft.com/office/drawing/2014/main" val="10000"/>
+                  </a:ext>
+                </a:extLst>
               </a:tr>
               <a:tr h="411480">
                 <a:tc>
@@ -9253,7 +9092,7 @@
                     <a:bodyPr/>
                     <a:lstStyle/>
                     <a:p>
-                      <a:pPr indent="0" marL="0">
+                      <a:pPr marL="0" indent="0">
                         <a:buNone/>
                       </a:pPr>
                       <a:r>
@@ -9274,7 +9113,7 @@
                       </a:endParaRPr>
                     </a:p>
                   </a:txBody>
-                  <a:tcPr marL="91440" marR="91440" marT="45720" marB="45720" anchor="ctr">
+                  <a:tcPr anchor="ctr">
                     <a:lnL w="6350" cap="flat" cmpd="sng" algn="ctr">
                       <a:solidFill>
                         <a:srgbClr val="E2E8F0"/>
@@ -9321,7 +9160,7 @@
                     <a:bodyPr/>
                     <a:lstStyle/>
                     <a:p>
-                      <a:pPr algn="ctr" indent="0" marL="0">
+                      <a:pPr marL="0" indent="0" algn="ctr">
                         <a:buNone/>
                       </a:pPr>
                       <a:r>
@@ -9342,7 +9181,7 @@
                       </a:endParaRPr>
                     </a:p>
                   </a:txBody>
-                  <a:tcPr marL="91440" marR="91440" marT="45720" marB="45720" anchor="ctr">
+                  <a:tcPr anchor="ctr">
                     <a:lnL w="6350" cap="flat" cmpd="sng" algn="ctr">
                       <a:solidFill>
                         <a:srgbClr val="E2E8F0"/>
@@ -9389,7 +9228,7 @@
                     <a:bodyPr/>
                     <a:lstStyle/>
                     <a:p>
-                      <a:pPr algn="ctr" indent="0" marL="0">
+                      <a:pPr marL="0" indent="0" algn="ctr">
                         <a:buNone/>
                       </a:pPr>
                       <a:r>
@@ -9410,7 +9249,7 @@
                       </a:endParaRPr>
                     </a:p>
                   </a:txBody>
-                  <a:tcPr marL="91440" marR="91440" marT="45720" marB="45720" anchor="ctr">
+                  <a:tcPr anchor="ctr">
                     <a:lnL w="6350" cap="flat" cmpd="sng" algn="ctr">
                       <a:solidFill>
                         <a:srgbClr val="E2E8F0"/>
@@ -9452,6 +9291,11 @@
                     </a:solidFill>
                   </a:tcPr>
                 </a:tc>
+                <a:extLst>
+                  <a:ext uri="{0D108BD9-81ED-4DB2-BD59-A6C34878D82A}">
+                    <a16:rowId xmlns:a16="http://schemas.microsoft.com/office/drawing/2014/main" val="10001"/>
+                  </a:ext>
+                </a:extLst>
               </a:tr>
               <a:tr h="411480">
                 <a:tc>
@@ -9459,7 +9303,7 @@
                     <a:bodyPr/>
                     <a:lstStyle/>
                     <a:p>
-                      <a:pPr indent="0" marL="0">
+                      <a:pPr marL="0" indent="0">
                         <a:buNone/>
                       </a:pPr>
                       <a:r>
@@ -9480,7 +9324,7 @@
                       </a:endParaRPr>
                     </a:p>
                   </a:txBody>
-                  <a:tcPr marL="91440" marR="91440" marT="45720" marB="45720" anchor="ctr">
+                  <a:tcPr anchor="ctr">
                     <a:lnL w="6350" cap="flat" cmpd="sng" algn="ctr">
                       <a:solidFill>
                         <a:srgbClr val="E2E8F0"/>
@@ -9527,7 +9371,7 @@
                     <a:bodyPr/>
                     <a:lstStyle/>
                     <a:p>
-                      <a:pPr algn="ctr" indent="0" marL="0">
+                      <a:pPr marL="0" indent="0" algn="ctr">
                         <a:buNone/>
                       </a:pPr>
                       <a:r>
@@ -9548,7 +9392,7 @@
                       </a:endParaRPr>
                     </a:p>
                   </a:txBody>
-                  <a:tcPr marL="91440" marR="91440" marT="45720" marB="45720" anchor="ctr">
+                  <a:tcPr anchor="ctr">
                     <a:lnL w="6350" cap="flat" cmpd="sng" algn="ctr">
                       <a:solidFill>
                         <a:srgbClr val="E2E8F0"/>
@@ -9595,7 +9439,7 @@
                     <a:bodyPr/>
                     <a:lstStyle/>
                     <a:p>
-                      <a:pPr algn="ctr" indent="0" marL="0">
+                      <a:pPr marL="0" indent="0" algn="ctr">
                         <a:buNone/>
                       </a:pPr>
                       <a:r>
@@ -9616,7 +9460,7 @@
                       </a:endParaRPr>
                     </a:p>
                   </a:txBody>
-                  <a:tcPr marL="91440" marR="91440" marT="45720" marB="45720" anchor="ctr">
+                  <a:tcPr anchor="ctr">
                     <a:lnL w="6350" cap="flat" cmpd="sng" algn="ctr">
                       <a:solidFill>
                         <a:srgbClr val="E2E8F0"/>
@@ -9658,6 +9502,11 @@
                     </a:solidFill>
                   </a:tcPr>
                 </a:tc>
+                <a:extLst>
+                  <a:ext uri="{0D108BD9-81ED-4DB2-BD59-A6C34878D82A}">
+                    <a16:rowId xmlns:a16="http://schemas.microsoft.com/office/drawing/2014/main" val="10002"/>
+                  </a:ext>
+                </a:extLst>
               </a:tr>
               <a:tr h="411480">
                 <a:tc>
@@ -9665,7 +9514,7 @@
                     <a:bodyPr/>
                     <a:lstStyle/>
                     <a:p>
-                      <a:pPr indent="0" marL="0">
+                      <a:pPr marL="0" indent="0">
                         <a:buNone/>
                       </a:pPr>
                       <a:r>
@@ -9686,7 +9535,7 @@
                       </a:endParaRPr>
                     </a:p>
                   </a:txBody>
-                  <a:tcPr marL="91440" marR="91440" marT="45720" marB="45720" anchor="ctr">
+                  <a:tcPr anchor="ctr">
                     <a:lnL w="6350" cap="flat" cmpd="sng" algn="ctr">
                       <a:solidFill>
                         <a:srgbClr val="E2E8F0"/>
@@ -9733,7 +9582,7 @@
                     <a:bodyPr/>
                     <a:lstStyle/>
                     <a:p>
-                      <a:pPr algn="ctr" indent="0" marL="0">
+                      <a:pPr marL="0" indent="0" algn="ctr">
                         <a:buNone/>
                       </a:pPr>
                       <a:r>
@@ -9754,7 +9603,7 @@
                       </a:endParaRPr>
                     </a:p>
                   </a:txBody>
-                  <a:tcPr marL="91440" marR="91440" marT="45720" marB="45720" anchor="ctr">
+                  <a:tcPr anchor="ctr">
                     <a:lnL w="6350" cap="flat" cmpd="sng" algn="ctr">
                       <a:solidFill>
                         <a:srgbClr val="E2E8F0"/>
@@ -9801,7 +9650,7 @@
                     <a:bodyPr/>
                     <a:lstStyle/>
                     <a:p>
-                      <a:pPr algn="ctr" indent="0" marL="0">
+                      <a:pPr marL="0" indent="0" algn="ctr">
                         <a:buNone/>
                       </a:pPr>
                       <a:r>
@@ -9822,7 +9671,7 @@
                       </a:endParaRPr>
                     </a:p>
                   </a:txBody>
-                  <a:tcPr marL="91440" marR="91440" marT="45720" marB="45720" anchor="ctr">
+                  <a:tcPr anchor="ctr">
                     <a:lnL w="6350" cap="flat" cmpd="sng" algn="ctr">
                       <a:solidFill>
                         <a:srgbClr val="E2E8F0"/>
@@ -9864,6 +9713,11 @@
                     </a:solidFill>
                   </a:tcPr>
                 </a:tc>
+                <a:extLst>
+                  <a:ext uri="{0D108BD9-81ED-4DB2-BD59-A6C34878D82A}">
+                    <a16:rowId xmlns:a16="http://schemas.microsoft.com/office/drawing/2014/main" val="10003"/>
+                  </a:ext>
+                </a:extLst>
               </a:tr>
               <a:tr h="411480">
                 <a:tc>
@@ -9871,7 +9725,7 @@
                     <a:bodyPr/>
                     <a:lstStyle/>
                     <a:p>
-                      <a:pPr indent="0" marL="0">
+                      <a:pPr marL="0" indent="0">
                         <a:buNone/>
                       </a:pPr>
                       <a:r>
@@ -9892,7 +9746,7 @@
                       </a:endParaRPr>
                     </a:p>
                   </a:txBody>
-                  <a:tcPr marL="91440" marR="91440" marT="45720" marB="45720" anchor="ctr">
+                  <a:tcPr anchor="ctr">
                     <a:lnL w="6350" cap="flat" cmpd="sng" algn="ctr">
                       <a:solidFill>
                         <a:srgbClr val="E2E8F0"/>
@@ -9939,7 +9793,7 @@
                     <a:bodyPr/>
                     <a:lstStyle/>
                     <a:p>
-                      <a:pPr algn="ctr" indent="0" marL="0">
+                      <a:pPr marL="0" indent="0" algn="ctr">
                         <a:buNone/>
                       </a:pPr>
                       <a:r>
@@ -9960,7 +9814,7 @@
                       </a:endParaRPr>
                     </a:p>
                   </a:txBody>
-                  <a:tcPr marL="91440" marR="91440" marT="45720" marB="45720" anchor="ctr">
+                  <a:tcPr anchor="ctr">
                     <a:lnL w="6350" cap="flat" cmpd="sng" algn="ctr">
                       <a:solidFill>
                         <a:srgbClr val="E2E8F0"/>
@@ -10007,7 +9861,7 @@
                     <a:bodyPr/>
                     <a:lstStyle/>
                     <a:p>
-                      <a:pPr algn="ctr" indent="0" marL="0">
+                      <a:pPr marL="0" indent="0" algn="ctr">
                         <a:buNone/>
                       </a:pPr>
                       <a:r>
@@ -10028,7 +9882,7 @@
                       </a:endParaRPr>
                     </a:p>
                   </a:txBody>
-                  <a:tcPr marL="91440" marR="91440" marT="45720" marB="45720" anchor="ctr">
+                  <a:tcPr anchor="ctr">
                     <a:lnL w="6350" cap="flat" cmpd="sng" algn="ctr">
                       <a:solidFill>
                         <a:srgbClr val="E2E8F0"/>
@@ -10070,6 +9924,11 @@
                     </a:solidFill>
                   </a:tcPr>
                 </a:tc>
+                <a:extLst>
+                  <a:ext uri="{0D108BD9-81ED-4DB2-BD59-A6C34878D82A}">
+                    <a16:rowId xmlns:a16="http://schemas.microsoft.com/office/drawing/2014/main" val="10004"/>
+                  </a:ext>
+                </a:extLst>
               </a:tr>
               <a:tr h="411480">
                 <a:tc>
@@ -10077,7 +9936,7 @@
                     <a:bodyPr/>
                     <a:lstStyle/>
                     <a:p>
-                      <a:pPr indent="0" marL="0">
+                      <a:pPr marL="0" indent="0">
                         <a:buNone/>
                       </a:pPr>
                       <a:r>
@@ -10098,7 +9957,7 @@
                       </a:endParaRPr>
                     </a:p>
                   </a:txBody>
-                  <a:tcPr marL="91440" marR="91440" marT="45720" marB="45720" anchor="ctr">
+                  <a:tcPr anchor="ctr">
                     <a:lnL w="6350" cap="flat" cmpd="sng" algn="ctr">
                       <a:solidFill>
                         <a:srgbClr val="E2E8F0"/>
@@ -10145,7 +10004,7 @@
                     <a:bodyPr/>
                     <a:lstStyle/>
                     <a:p>
-                      <a:pPr algn="ctr" indent="0" marL="0">
+                      <a:pPr marL="0" indent="0" algn="ctr">
                         <a:buNone/>
                       </a:pPr>
                       <a:r>
@@ -10166,7 +10025,7 @@
                       </a:endParaRPr>
                     </a:p>
                   </a:txBody>
-                  <a:tcPr marL="91440" marR="91440" marT="45720" marB="45720" anchor="ctr">
+                  <a:tcPr anchor="ctr">
                     <a:lnL w="6350" cap="flat" cmpd="sng" algn="ctr">
                       <a:solidFill>
                         <a:srgbClr val="E2E8F0"/>
@@ -10213,7 +10072,7 @@
                     <a:bodyPr/>
                     <a:lstStyle/>
                     <a:p>
-                      <a:pPr algn="ctr" indent="0" marL="0">
+                      <a:pPr marL="0" indent="0" algn="ctr">
                         <a:buNone/>
                       </a:pPr>
                       <a:r>
@@ -10234,7 +10093,7 @@
                       </a:endParaRPr>
                     </a:p>
                   </a:txBody>
-                  <a:tcPr marL="91440" marR="91440" marT="45720" marB="45720" anchor="ctr">
+                  <a:tcPr anchor="ctr">
                     <a:lnL w="6350" cap="flat" cmpd="sng" algn="ctr">
                       <a:solidFill>
                         <a:srgbClr val="E2E8F0"/>
@@ -10276,6 +10135,11 @@
                     </a:solidFill>
                   </a:tcPr>
                 </a:tc>
+                <a:extLst>
+                  <a:ext uri="{0D108BD9-81ED-4DB2-BD59-A6C34878D82A}">
+                    <a16:rowId xmlns:a16="http://schemas.microsoft.com/office/drawing/2014/main" val="10005"/>
+                  </a:ext>
+                </a:extLst>
               </a:tr>
               <a:tr h="411480">
                 <a:tc>
@@ -10283,7 +10147,7 @@
                     <a:bodyPr/>
                     <a:lstStyle/>
                     <a:p>
-                      <a:pPr indent="0" marL="0">
+                      <a:pPr marL="0" indent="0">
                         <a:buNone/>
                       </a:pPr>
                       <a:r>
@@ -10304,7 +10168,7 @@
                       </a:endParaRPr>
                     </a:p>
                   </a:txBody>
-                  <a:tcPr marL="91440" marR="91440" marT="45720" marB="45720" anchor="ctr">
+                  <a:tcPr anchor="ctr">
                     <a:lnL w="6350" cap="flat" cmpd="sng" algn="ctr">
                       <a:solidFill>
                         <a:srgbClr val="E2E8F0"/>
@@ -10351,7 +10215,7 @@
                     <a:bodyPr/>
                     <a:lstStyle/>
                     <a:p>
-                      <a:pPr algn="ctr" indent="0" marL="0">
+                      <a:pPr marL="0" indent="0" algn="ctr">
                         <a:buNone/>
                       </a:pPr>
                       <a:r>
@@ -10372,7 +10236,7 @@
                       </a:endParaRPr>
                     </a:p>
                   </a:txBody>
-                  <a:tcPr marL="91440" marR="91440" marT="45720" marB="45720" anchor="ctr">
+                  <a:tcPr anchor="ctr">
                     <a:lnL w="6350" cap="flat" cmpd="sng" algn="ctr">
                       <a:solidFill>
                         <a:srgbClr val="E2E8F0"/>
@@ -10419,7 +10283,7 @@
                     <a:bodyPr/>
                     <a:lstStyle/>
                     <a:p>
-                      <a:pPr algn="ctr" indent="0" marL="0">
+                      <a:pPr marL="0" indent="0" algn="ctr">
                         <a:buNone/>
                       </a:pPr>
                       <a:r>
@@ -10440,7 +10304,7 @@
                       </a:endParaRPr>
                     </a:p>
                   </a:txBody>
-                  <a:tcPr marL="91440" marR="91440" marT="45720" marB="45720" anchor="ctr">
+                  <a:tcPr anchor="ctr">
                     <a:lnL w="6350" cap="flat" cmpd="sng" algn="ctr">
                       <a:solidFill>
                         <a:srgbClr val="E2E8F0"/>
@@ -10482,6 +10346,11 @@
                     </a:solidFill>
                   </a:tcPr>
                 </a:tc>
+                <a:extLst>
+                  <a:ext uri="{0D108BD9-81ED-4DB2-BD59-A6C34878D82A}">
+                    <a16:rowId xmlns:a16="http://schemas.microsoft.com/office/drawing/2014/main" val="10006"/>
+                  </a:ext>
+                </a:extLst>
               </a:tr>
               <a:tr h="411480">
                 <a:tc>
@@ -10489,7 +10358,7 @@
                     <a:bodyPr/>
                     <a:lstStyle/>
                     <a:p>
-                      <a:pPr indent="0" marL="0">
+                      <a:pPr marL="0" indent="0">
                         <a:buNone/>
                       </a:pPr>
                       <a:r>
@@ -10510,7 +10379,7 @@
                       </a:endParaRPr>
                     </a:p>
                   </a:txBody>
-                  <a:tcPr marL="91440" marR="91440" marT="45720" marB="45720" anchor="ctr">
+                  <a:tcPr anchor="ctr">
                     <a:lnL w="6350" cap="flat" cmpd="sng" algn="ctr">
                       <a:solidFill>
                         <a:srgbClr val="E2E8F0"/>
@@ -10557,7 +10426,7 @@
                     <a:bodyPr/>
                     <a:lstStyle/>
                     <a:p>
-                      <a:pPr algn="ctr" indent="0" marL="0">
+                      <a:pPr marL="0" indent="0" algn="ctr">
                         <a:buNone/>
                       </a:pPr>
                       <a:r>
@@ -10578,7 +10447,7 @@
                       </a:endParaRPr>
                     </a:p>
                   </a:txBody>
-                  <a:tcPr marL="91440" marR="91440" marT="45720" marB="45720" anchor="ctr">
+                  <a:tcPr anchor="ctr">
                     <a:lnL w="6350" cap="flat" cmpd="sng" algn="ctr">
                       <a:solidFill>
                         <a:srgbClr val="E2E8F0"/>
@@ -10625,7 +10494,7 @@
                     <a:bodyPr/>
                     <a:lstStyle/>
                     <a:p>
-                      <a:pPr algn="ctr" indent="0" marL="0">
+                      <a:pPr marL="0" indent="0" algn="ctr">
                         <a:buNone/>
                       </a:pPr>
                       <a:r>
@@ -10646,7 +10515,7 @@
                       </a:endParaRPr>
                     </a:p>
                   </a:txBody>
-                  <a:tcPr marL="91440" marR="91440" marT="45720" marB="45720" anchor="ctr">
+                  <a:tcPr anchor="ctr">
                     <a:lnL w="6350" cap="flat" cmpd="sng" algn="ctr">
                       <a:solidFill>
                         <a:srgbClr val="E2E8F0"/>
@@ -10688,6 +10557,11 @@
                     </a:solidFill>
                   </a:tcPr>
                 </a:tc>
+                <a:extLst>
+                  <a:ext uri="{0D108BD9-81ED-4DB2-BD59-A6C34878D82A}">
+                    <a16:rowId xmlns:a16="http://schemas.microsoft.com/office/drawing/2014/main" val="10007"/>
+                  </a:ext>
+                </a:extLst>
               </a:tr>
             </a:tbl>
           </a:graphicData>
@@ -10714,7 +10588,7 @@
           <a:bodyPr wrap="square" lIns="0" tIns="0" rIns="0" bIns="0" rtlCol="0" anchor="ctr"/>
           <a:lstStyle/>
           <a:p>
-            <a:pPr indent="0" marL="0">
+            <a:pPr marL="0" indent="0">
               <a:buNone/>
             </a:pPr>
             <a:r>
@@ -10748,6 +10622,7 @@
         <a:solidFill>
           <a:srgbClr val="F8FAFC"/>
         </a:solidFill>
+        <a:effectLst/>
       </p:bgPr>
     </p:bg>
     <p:spTree>
@@ -10825,7 +10700,7 @@
           <a:bodyPr wrap="square" lIns="0" tIns="0" rIns="0" bIns="0" rtlCol="0" anchor="ctr"/>
           <a:lstStyle/>
           <a:p>
-            <a:pPr indent="0" marL="0">
+            <a:pPr marL="0" indent="0">
               <a:buNone/>
             </a:pPr>
             <a:r>
@@ -10864,11 +10739,11 @@
           <a:bodyPr wrap="square" lIns="0" tIns="0" rIns="0" bIns="0" rtlCol="0" anchor="ctr"/>
           <a:lstStyle/>
           <a:p>
-            <a:pPr algn="r" indent="0" marL="0">
-              <a:buNone/>
-            </a:pPr>
-            <a:r>
-              <a:rPr lang="en-US" sz="900" b="1" spc="400" kern="0" dirty="0">
+            <a:pPr marL="0" indent="0" algn="r">
+              <a:buNone/>
+            </a:pPr>
+            <a:r>
+              <a:rPr lang="en-US" sz="900" b="1" kern="0" spc="400" dirty="0">
                 <a:solidFill>
                   <a:srgbClr val="BFDBFE"/>
                 </a:solidFill>
@@ -10923,7 +10798,7 @@
           <a:bodyPr wrap="square" lIns="0" tIns="0" rIns="0" bIns="0" rtlCol="0" anchor="ctr"/>
           <a:lstStyle/>
           <a:p>
-            <a:pPr indent="0" marL="0">
+            <a:pPr marL="0" indent="0">
               <a:buNone/>
             </a:pPr>
             <a:r>
@@ -10965,7 +10840,7 @@
             <a:prstDash val="solid"/>
           </a:ln>
           <a:effectLst>
-            <a:outerShdw sx="100000" sy="100000" kx="0" ky="0" algn="bl" rotWithShape="0" blurRad="101600" dist="25400" dir="5400000">
+            <a:outerShdw blurRad="101600" dist="25400" dir="5400000" algn="bl" rotWithShape="0">
               <a:srgbClr val="000000">
                 <a:alpha val="10000"/>
               </a:srgbClr>
@@ -11014,7 +10889,7 @@
           <a:bodyPr wrap="square" lIns="0" tIns="0" rIns="0" bIns="0" rtlCol="0" anchor="ctr"/>
           <a:lstStyle/>
           <a:p>
-            <a:pPr indent="0" marL="0">
+            <a:pPr marL="0" indent="0">
               <a:buNone/>
             </a:pPr>
             <a:r>
@@ -11073,7 +10948,7 @@
           <a:bodyPr wrap="square" lIns="0" tIns="0" rIns="0" bIns="0" rtlCol="0" anchor="t"/>
           <a:lstStyle/>
           <a:p>
-            <a:pPr indent="0" marL="0">
+            <a:pPr marL="0" indent="0">
               <a:buNone/>
             </a:pPr>
             <a:r>
@@ -11090,13 +10965,13 @@
             <a:endParaRPr lang="en-US" sz="1000" dirty="0"/>
           </a:p>
           <a:p>
-            <a:pPr indent="0" marL="0">
+            <a:pPr marL="0" indent="0">
               <a:buNone/>
             </a:pPr>
             <a:endParaRPr lang="en-US" sz="1000" dirty="0"/>
           </a:p>
           <a:p>
-            <a:pPr indent="0" marL="0">
+            <a:pPr marL="0" indent="0">
               <a:buNone/>
             </a:pPr>
             <a:r>
@@ -11113,7 +10988,7 @@
             <a:endParaRPr lang="en-US" sz="1000" dirty="0"/>
           </a:p>
           <a:p>
-            <a:pPr indent="0" marL="0">
+            <a:pPr marL="0" indent="0">
               <a:buNone/>
             </a:pPr>
             <a:r>
@@ -11130,13 +11005,13 @@
             <a:endParaRPr lang="en-US" sz="1000" dirty="0"/>
           </a:p>
           <a:p>
-            <a:pPr indent="0" marL="0">
+            <a:pPr marL="0" indent="0">
               <a:buNone/>
             </a:pPr>
             <a:endParaRPr lang="en-US" sz="1000" dirty="0"/>
           </a:p>
           <a:p>
-            <a:pPr indent="0" marL="0">
+            <a:pPr marL="0" indent="0">
               <a:buNone/>
             </a:pPr>
             <a:r>
@@ -11153,7 +11028,7 @@
             <a:endParaRPr lang="en-US" sz="1000" dirty="0"/>
           </a:p>
           <a:p>
-            <a:pPr indent="0" marL="0">
+            <a:pPr marL="0" indent="0">
               <a:buNone/>
             </a:pPr>
             <a:r>
@@ -11170,13 +11045,13 @@
             <a:endParaRPr lang="en-US" sz="1000" dirty="0"/>
           </a:p>
           <a:p>
-            <a:pPr indent="0" marL="0">
+            <a:pPr marL="0" indent="0">
               <a:buNone/>
             </a:pPr>
             <a:endParaRPr lang="en-US" sz="1000" dirty="0"/>
           </a:p>
           <a:p>
-            <a:pPr indent="0" marL="0">
+            <a:pPr marL="0" indent="0">
               <a:buNone/>
             </a:pPr>
             <a:r>
@@ -11193,7 +11068,7 @@
             <a:endParaRPr lang="en-US" sz="1000" dirty="0"/>
           </a:p>
           <a:p>
-            <a:pPr indent="0" marL="0">
+            <a:pPr marL="0" indent="0">
               <a:buNone/>
             </a:pPr>
             <a:r>
@@ -11210,13 +11085,13 @@
             <a:endParaRPr lang="en-US" sz="1000" dirty="0"/>
           </a:p>
           <a:p>
-            <a:pPr indent="0" marL="0">
+            <a:pPr marL="0" indent="0">
               <a:buNone/>
             </a:pPr>
             <a:endParaRPr lang="en-US" sz="1000" dirty="0"/>
           </a:p>
           <a:p>
-            <a:pPr indent="0" marL="0">
+            <a:pPr marL="0" indent="0">
               <a:buNone/>
             </a:pPr>
             <a:r>
@@ -11233,7 +11108,7 @@
             <a:endParaRPr lang="en-US" sz="1000" dirty="0"/>
           </a:p>
           <a:p>
-            <a:pPr indent="0" marL="0">
+            <a:pPr marL="0" indent="0">
               <a:buNone/>
             </a:pPr>
             <a:r>
@@ -11250,7 +11125,7 @@
             <a:endParaRPr lang="en-US" sz="1000" dirty="0"/>
           </a:p>
           <a:p>
-            <a:pPr indent="0" marL="0">
+            <a:pPr marL="0" indent="0">
               <a:buNone/>
             </a:pPr>
             <a:r>
@@ -11292,7 +11167,7 @@
             <a:prstDash val="solid"/>
           </a:ln>
           <a:effectLst>
-            <a:outerShdw sx="100000" sy="100000" kx="0" ky="0" algn="bl" rotWithShape="0" blurRad="101600" dist="25400" dir="5400000">
+            <a:outerShdw blurRad="101600" dist="25400" dir="5400000" algn="bl" rotWithShape="0">
               <a:srgbClr val="000000">
                 <a:alpha val="10000"/>
               </a:srgbClr>
@@ -11341,7 +11216,7 @@
           <a:bodyPr wrap="square" lIns="0" tIns="0" rIns="0" bIns="0" rtlCol="0" anchor="ctr"/>
           <a:lstStyle/>
           <a:p>
-            <a:pPr indent="0" marL="0">
+            <a:pPr marL="0" indent="0">
               <a:buNone/>
             </a:pPr>
             <a:r>
@@ -11400,7 +11275,7 @@
           <a:bodyPr wrap="square" lIns="0" tIns="0" rIns="0" bIns="0" rtlCol="0" anchor="t"/>
           <a:lstStyle/>
           <a:p>
-            <a:pPr indent="0" marL="0">
+            <a:pPr marL="0" indent="0">
               <a:buNone/>
             </a:pPr>
             <a:r>
@@ -11417,7 +11292,7 @@
             <a:endParaRPr lang="en-US" sz="1000" dirty="0"/>
           </a:p>
           <a:p>
-            <a:pPr indent="0" marL="0">
+            <a:pPr marL="0" indent="0">
               <a:buNone/>
             </a:pPr>
             <a:r>
@@ -11434,7 +11309,7 @@
             <a:endParaRPr lang="en-US" sz="1000" dirty="0"/>
           </a:p>
           <a:p>
-            <a:pPr indent="0" marL="0">
+            <a:pPr marL="0" indent="0">
               <a:buNone/>
             </a:pPr>
             <a:r>
@@ -11451,13 +11326,13 @@
             <a:endParaRPr lang="en-US" sz="1000" dirty="0"/>
           </a:p>
           <a:p>
-            <a:pPr indent="0" marL="0">
+            <a:pPr marL="0" indent="0">
               <a:buNone/>
             </a:pPr>
             <a:endParaRPr lang="en-US" sz="1000" dirty="0"/>
           </a:p>
           <a:p>
-            <a:pPr indent="0" marL="0">
+            <a:pPr marL="0" indent="0">
               <a:buNone/>
             </a:pPr>
             <a:r>
@@ -11474,7 +11349,7 @@
             <a:endParaRPr lang="en-US" sz="1000" dirty="0"/>
           </a:p>
           <a:p>
-            <a:pPr indent="0" marL="0">
+            <a:pPr marL="0" indent="0">
               <a:buNone/>
             </a:pPr>
             <a:r>
@@ -11491,13 +11366,13 @@
             <a:endParaRPr lang="en-US" sz="1000" dirty="0"/>
           </a:p>
           <a:p>
-            <a:pPr indent="0" marL="0">
+            <a:pPr marL="0" indent="0">
               <a:buNone/>
             </a:pPr>
             <a:endParaRPr lang="en-US" sz="1000" dirty="0"/>
           </a:p>
           <a:p>
-            <a:pPr indent="0" marL="0">
+            <a:pPr marL="0" indent="0">
               <a:buNone/>
             </a:pPr>
             <a:r>
@@ -11514,7 +11389,7 @@
             <a:endParaRPr lang="en-US" sz="1000" dirty="0"/>
           </a:p>
           <a:p>
-            <a:pPr indent="0" marL="0">
+            <a:pPr marL="0" indent="0">
               <a:buNone/>
             </a:pPr>
             <a:r>
@@ -11531,13 +11406,13 @@
             <a:endParaRPr lang="en-US" sz="1000" dirty="0"/>
           </a:p>
           <a:p>
-            <a:pPr indent="0" marL="0">
+            <a:pPr marL="0" indent="0">
               <a:buNone/>
             </a:pPr>
             <a:endParaRPr lang="en-US" sz="1000" dirty="0"/>
           </a:p>
           <a:p>
-            <a:pPr indent="0" marL="0">
+            <a:pPr marL="0" indent="0">
               <a:buNone/>
             </a:pPr>
             <a:r>
@@ -11554,7 +11429,7 @@
             <a:endParaRPr lang="en-US" sz="1000" dirty="0"/>
           </a:p>
           <a:p>
-            <a:pPr indent="0" marL="0">
+            <a:pPr marL="0" indent="0">
               <a:buNone/>
             </a:pPr>
             <a:r>
@@ -11571,7 +11446,7 @@
             <a:endParaRPr lang="en-US" sz="1000" dirty="0"/>
           </a:p>
           <a:p>
-            <a:pPr indent="0" marL="0">
+            <a:pPr marL="0" indent="0">
               <a:buNone/>
             </a:pPr>
             <a:r>
@@ -11605,6 +11480,7 @@
         <a:solidFill>
           <a:srgbClr val="F8FAFC"/>
         </a:solidFill>
+        <a:effectLst/>
       </p:bgPr>
     </p:bg>
     <p:spTree>
@@ -11682,7 +11558,7 @@
           <a:bodyPr wrap="square" lIns="0" tIns="0" rIns="0" bIns="0" rtlCol="0" anchor="ctr"/>
           <a:lstStyle/>
           <a:p>
-            <a:pPr indent="0" marL="0">
+            <a:pPr marL="0" indent="0">
               <a:buNone/>
             </a:pPr>
             <a:r>
@@ -11721,11 +11597,11 @@
           <a:bodyPr wrap="square" lIns="0" tIns="0" rIns="0" bIns="0" rtlCol="0" anchor="ctr"/>
           <a:lstStyle/>
           <a:p>
-            <a:pPr algn="r" indent="0" marL="0">
-              <a:buNone/>
-            </a:pPr>
-            <a:r>
-              <a:rPr lang="en-US" sz="900" b="1" spc="400" kern="0" dirty="0">
+            <a:pPr marL="0" indent="0" algn="r">
+              <a:buNone/>
+            </a:pPr>
+            <a:r>
+              <a:rPr lang="en-US" sz="900" b="1" kern="0" spc="400" dirty="0">
                 <a:solidFill>
                   <a:srgbClr val="BFDBFE"/>
                 </a:solidFill>
@@ -11780,7 +11656,7 @@
           <a:bodyPr wrap="square" lIns="0" tIns="0" rIns="0" bIns="0" rtlCol="0" anchor="ctr"/>
           <a:lstStyle/>
           <a:p>
-            <a:pPr indent="0" marL="0">
+            <a:pPr marL="0" indent="0">
               <a:buNone/>
             </a:pPr>
             <a:r>
@@ -11819,11 +11695,11 @@
           <a:bodyPr wrap="square" lIns="0" tIns="0" rIns="0" bIns="0" rtlCol="0" anchor="ctr"/>
           <a:lstStyle/>
           <a:p>
-            <a:pPr indent="0" marL="0">
-              <a:buNone/>
-            </a:pPr>
-            <a:r>
-              <a:rPr lang="en-US" sz="1000" b="1" spc="400" kern="0" dirty="0">
+            <a:pPr marL="0" indent="0">
+              <a:buNone/>
+            </a:pPr>
+            <a:r>
+              <a:rPr lang="en-US" sz="1000" b="1" kern="0" spc="400" dirty="0">
                 <a:solidFill>
                   <a:srgbClr val="0D9488"/>
                 </a:solidFill>
@@ -11839,133 +11715,7 @@
       </p:sp>
       <p:pic>
         <p:nvPicPr>
-          <p:cNvPr id="9" name="Image 0" descr="preencoded.png">    </p:cNvPr>
-          <p:cNvPicPr>
-            <a:picLocks noChangeAspect="1"/>
-          </p:cNvPicPr>
-          <p:nvPr/>
-        </p:nvPicPr>
-        <p:blipFill>
-          <a:blip r:embed="rId1"/>
-          <a:stretch>
-            <a:fillRect/>
-          </a:stretch>
-        </p:blipFill>
-        <p:spPr>
-          <a:xfrm>
-            <a:off x="411480" y="1225296"/>
-            <a:ext cx="201168" cy="201168"/>
-          </a:xfrm>
-          <a:prstGeom prst="rect">
-            <a:avLst/>
-          </a:prstGeom>
-        </p:spPr>
-      </p:pic>
-      <p:sp>
-        <p:nvSpPr>
-          <p:cNvPr id="10" name="Text 7"/>
-          <p:cNvSpPr/>
-          <p:nvPr/>
-        </p:nvSpPr>
-        <p:spPr>
-          <a:xfrm>
-            <a:off x="713232" y="1188720"/>
-            <a:ext cx="3840480" cy="274320"/>
-          </a:xfrm>
-          <a:prstGeom prst="rect">
-            <a:avLst/>
-          </a:prstGeom>
-          <a:noFill/>
-          <a:ln/>
-        </p:spPr>
-        <p:txBody>
-          <a:bodyPr wrap="square" lIns="0" tIns="0" rIns="0" bIns="0" rtlCol="0" anchor="ctr"/>
-          <a:lstStyle/>
-          <a:p>
-            <a:pPr indent="0" marL="0">
-              <a:buNone/>
-            </a:pPr>
-            <a:r>
-              <a:rPr lang="en-US" sz="1150" dirty="0">
-                <a:solidFill>
-                  <a:srgbClr val="374151"/>
-                </a:solidFill>
-                <a:latin typeface="Calibri" pitchFamily="34" charset="0"/>
-                <a:ea typeface="Calibri" pitchFamily="34" charset="-122"/>
-                <a:cs typeface="Calibri" pitchFamily="34" charset="-120"/>
-              </a:rPr>
-              <a:t>Segmentation = per-pixel classification</a:t>
-            </a:r>
-            <a:endParaRPr lang="en-US" sz="1150" dirty="0"/>
-          </a:p>
-        </p:txBody>
-      </p:sp>
-      <p:pic>
-        <p:nvPicPr>
-          <p:cNvPr id="11" name="Image 1" descr="preencoded.png">    </p:cNvPr>
-          <p:cNvPicPr>
-            <a:picLocks noChangeAspect="1"/>
-          </p:cNvPicPr>
-          <p:nvPr/>
-        </p:nvPicPr>
-        <p:blipFill>
-          <a:blip r:embed="rId2"/>
-          <a:stretch>
-            <a:fillRect/>
-          </a:stretch>
-        </p:blipFill>
-        <p:spPr>
-          <a:xfrm>
-            <a:off x="411480" y="1636776"/>
-            <a:ext cx="201168" cy="201168"/>
-          </a:xfrm>
-          <a:prstGeom prst="rect">
-            <a:avLst/>
-          </a:prstGeom>
-        </p:spPr>
-      </p:pic>
-      <p:sp>
-        <p:nvSpPr>
-          <p:cNvPr id="12" name="Text 8"/>
-          <p:cNvSpPr/>
-          <p:nvPr/>
-        </p:nvSpPr>
-        <p:spPr>
-          <a:xfrm>
-            <a:off x="713232" y="1600200"/>
-            <a:ext cx="3840480" cy="274320"/>
-          </a:xfrm>
-          <a:prstGeom prst="rect">
-            <a:avLst/>
-          </a:prstGeom>
-          <a:noFill/>
-          <a:ln/>
-        </p:spPr>
-        <p:txBody>
-          <a:bodyPr wrap="square" lIns="0" tIns="0" rIns="0" bIns="0" rtlCol="0" anchor="ctr"/>
-          <a:lstStyle/>
-          <a:p>
-            <a:pPr indent="0" marL="0">
-              <a:buNone/>
-            </a:pPr>
-            <a:r>
-              <a:rPr lang="en-US" sz="1150" dirty="0">
-                <a:solidFill>
-                  <a:srgbClr val="374151"/>
-                </a:solidFill>
-                <a:latin typeface="Calibri" pitchFamily="34" charset="0"/>
-                <a:ea typeface="Calibri" pitchFamily="34" charset="-122"/>
-                <a:cs typeface="Calibri" pitchFamily="34" charset="-120"/>
-              </a:rPr>
-              <a:t>Semantic vs Instance vs Panoptic</a:t>
-            </a:r>
-            <a:endParaRPr lang="en-US" sz="1150" dirty="0"/>
-          </a:p>
-        </p:txBody>
-      </p:sp>
-      <p:pic>
-        <p:nvPicPr>
-          <p:cNvPr id="13" name="Image 2" descr="preencoded.png">    </p:cNvPr>
+          <p:cNvPr id="9" name="Image 0" descr="preencoded.png"/>
           <p:cNvPicPr>
             <a:picLocks noChangeAspect="1"/>
           </p:cNvPicPr>
@@ -11979,7 +11729,7 @@
         </p:blipFill>
         <p:spPr>
           <a:xfrm>
-            <a:off x="411480" y="2048256"/>
+            <a:off x="411480" y="1225296"/>
             <a:ext cx="201168" cy="201168"/>
           </a:xfrm>
           <a:prstGeom prst="rect">
@@ -11989,13 +11739,13 @@
       </p:pic>
       <p:sp>
         <p:nvSpPr>
-          <p:cNvPr id="14" name="Text 9"/>
-          <p:cNvSpPr/>
-          <p:nvPr/>
-        </p:nvSpPr>
-        <p:spPr>
-          <a:xfrm>
-            <a:off x="713232" y="2011680"/>
+          <p:cNvPr id="10" name="Text 7"/>
+          <p:cNvSpPr/>
+          <p:nvPr/>
+        </p:nvSpPr>
+        <p:spPr>
+          <a:xfrm>
+            <a:off x="713232" y="1188720"/>
             <a:ext cx="3840480" cy="274320"/>
           </a:xfrm>
           <a:prstGeom prst="rect">
@@ -12008,7 +11758,7 @@
           <a:bodyPr wrap="square" lIns="0" tIns="0" rIns="0" bIns="0" rtlCol="0" anchor="ctr"/>
           <a:lstStyle/>
           <a:p>
-            <a:pPr indent="0" marL="0">
+            <a:pPr marL="0" indent="0">
               <a:buNone/>
             </a:pPr>
             <a:r>
@@ -12020,7 +11770,7 @@
                 <a:ea typeface="Calibri" pitchFamily="34" charset="-122"/>
                 <a:cs typeface="Calibri" pitchFamily="34" charset="-120"/>
               </a:rPr>
-              <a:t>FCN — replace FC with 1×1 conv + upsample</a:t>
+              <a:t>Segmentation = per-pixel classification</a:t>
             </a:r>
             <a:endParaRPr lang="en-US" sz="1150" dirty="0"/>
           </a:p>
@@ -12028,21 +11778,21 @@
       </p:sp>
       <p:pic>
         <p:nvPicPr>
-          <p:cNvPr id="15" name="Image 3" descr="preencoded.png">    </p:cNvPr>
+          <p:cNvPr id="11" name="Image 1" descr="preencoded.png"/>
           <p:cNvPicPr>
             <a:picLocks noChangeAspect="1"/>
           </p:cNvPicPr>
           <p:nvPr/>
         </p:nvPicPr>
         <p:blipFill>
-          <a:blip r:embed="rId4"/>
+          <a:blip r:embed="rId3"/>
           <a:stretch>
             <a:fillRect/>
           </a:stretch>
         </p:blipFill>
         <p:spPr>
           <a:xfrm>
-            <a:off x="411480" y="2459736"/>
+            <a:off x="411480" y="1636776"/>
             <a:ext cx="201168" cy="201168"/>
           </a:xfrm>
           <a:prstGeom prst="rect">
@@ -12052,13 +11802,13 @@
       </p:pic>
       <p:sp>
         <p:nvSpPr>
-          <p:cNvPr id="16" name="Text 10"/>
-          <p:cNvSpPr/>
-          <p:nvPr/>
-        </p:nvSpPr>
-        <p:spPr>
-          <a:xfrm>
-            <a:off x="713232" y="2423160"/>
+          <p:cNvPr id="12" name="Text 8"/>
+          <p:cNvSpPr/>
+          <p:nvPr/>
+        </p:nvSpPr>
+        <p:spPr>
+          <a:xfrm>
+            <a:off x="713232" y="1600200"/>
             <a:ext cx="3840480" cy="274320"/>
           </a:xfrm>
           <a:prstGeom prst="rect">
@@ -12071,7 +11821,7 @@
           <a:bodyPr wrap="square" lIns="0" tIns="0" rIns="0" bIns="0" rtlCol="0" anchor="ctr"/>
           <a:lstStyle/>
           <a:p>
-            <a:pPr indent="0" marL="0">
+            <a:pPr marL="0" indent="0">
               <a:buNone/>
             </a:pPr>
             <a:r>
@@ -12083,7 +11833,7 @@
                 <a:ea typeface="Calibri" pitchFamily="34" charset="-122"/>
                 <a:cs typeface="Calibri" pitchFamily="34" charset="-120"/>
               </a:rPr>
-              <a:t>U-Net — encoder–decoder + skip connections</a:t>
+              <a:t>Semantic vs Instance vs Panoptic</a:t>
             </a:r>
             <a:endParaRPr lang="en-US" sz="1150" dirty="0"/>
           </a:p>
@@ -12091,21 +11841,21 @@
       </p:sp>
       <p:pic>
         <p:nvPicPr>
-          <p:cNvPr id="17" name="Image 4" descr="preencoded.png">    </p:cNvPr>
+          <p:cNvPr id="13" name="Image 2" descr="preencoded.png"/>
           <p:cNvPicPr>
             <a:picLocks noChangeAspect="1"/>
           </p:cNvPicPr>
           <p:nvPr/>
         </p:nvPicPr>
         <p:blipFill>
-          <a:blip r:embed="rId5"/>
+          <a:blip r:embed="rId3"/>
           <a:stretch>
             <a:fillRect/>
           </a:stretch>
         </p:blipFill>
         <p:spPr>
           <a:xfrm>
-            <a:off x="411480" y="2871216"/>
+            <a:off x="411480" y="2048256"/>
             <a:ext cx="201168" cy="201168"/>
           </a:xfrm>
           <a:prstGeom prst="rect">
@@ -12115,13 +11865,13 @@
       </p:pic>
       <p:sp>
         <p:nvSpPr>
-          <p:cNvPr id="18" name="Text 11"/>
-          <p:cNvSpPr/>
-          <p:nvPr/>
-        </p:nvSpPr>
-        <p:spPr>
-          <a:xfrm>
-            <a:off x="713232" y="2834640"/>
+          <p:cNvPr id="14" name="Text 9"/>
+          <p:cNvSpPr/>
+          <p:nvPr/>
+        </p:nvSpPr>
+        <p:spPr>
+          <a:xfrm>
+            <a:off x="713232" y="2011680"/>
             <a:ext cx="3840480" cy="274320"/>
           </a:xfrm>
           <a:prstGeom prst="rect">
@@ -12134,7 +11884,7 @@
           <a:bodyPr wrap="square" lIns="0" tIns="0" rIns="0" bIns="0" rtlCol="0" anchor="ctr"/>
           <a:lstStyle/>
           <a:p>
-            <a:pPr indent="0" marL="0">
+            <a:pPr marL="0" indent="0">
               <a:buNone/>
             </a:pPr>
             <a:r>
@@ -12146,7 +11896,7 @@
                 <a:ea typeface="Calibri" pitchFamily="34" charset="-122"/>
                 <a:cs typeface="Calibri" pitchFamily="34" charset="-120"/>
               </a:rPr>
-              <a:t>Loss &amp; metrics: Dice, IoU, mIoU</a:t>
+              <a:t>FCN — replace FC with 1×1 conv + upsample</a:t>
             </a:r>
             <a:endParaRPr lang="en-US" sz="1150" dirty="0"/>
           </a:p>
@@ -12154,21 +11904,21 @@
       </p:sp>
       <p:pic>
         <p:nvPicPr>
-          <p:cNvPr id="19" name="Image 5" descr="preencoded.png">    </p:cNvPr>
+          <p:cNvPr id="15" name="Image 3" descr="preencoded.png"/>
           <p:cNvPicPr>
             <a:picLocks noChangeAspect="1"/>
           </p:cNvPicPr>
           <p:nvPr/>
         </p:nvPicPr>
         <p:blipFill>
-          <a:blip r:embed="rId6"/>
+          <a:blip r:embed="rId3"/>
           <a:stretch>
             <a:fillRect/>
           </a:stretch>
         </p:blipFill>
         <p:spPr>
           <a:xfrm>
-            <a:off x="411480" y="3282696"/>
+            <a:off x="411480" y="2459736"/>
             <a:ext cx="201168" cy="201168"/>
           </a:xfrm>
           <a:prstGeom prst="rect">
@@ -12178,13 +11928,13 @@
       </p:pic>
       <p:sp>
         <p:nvSpPr>
-          <p:cNvPr id="20" name="Text 12"/>
-          <p:cNvSpPr/>
-          <p:nvPr/>
-        </p:nvSpPr>
-        <p:spPr>
-          <a:xfrm>
-            <a:off x="713232" y="3246120"/>
+          <p:cNvPr id="16" name="Text 10"/>
+          <p:cNvSpPr/>
+          <p:nvPr/>
+        </p:nvSpPr>
+        <p:spPr>
+          <a:xfrm>
+            <a:off x="713232" y="2423160"/>
             <a:ext cx="3840480" cy="274320"/>
           </a:xfrm>
           <a:prstGeom prst="rect">
@@ -12197,7 +11947,7 @@
           <a:bodyPr wrap="square" lIns="0" tIns="0" rIns="0" bIns="0" rtlCol="0" anchor="ctr"/>
           <a:lstStyle/>
           <a:p>
-            <a:pPr indent="0" marL="0">
+            <a:pPr marL="0" indent="0">
               <a:buNone/>
             </a:pPr>
             <a:r>
@@ -12209,7 +11959,7 @@
                 <a:ea typeface="Calibri" pitchFamily="34" charset="-122"/>
                 <a:cs typeface="Calibri" pitchFamily="34" charset="-120"/>
               </a:rPr>
-              <a:t>Mask R-CNN — two-stage with mask head</a:t>
+              <a:t>U-Net — encoder–decoder + skip connections</a:t>
             </a:r>
             <a:endParaRPr lang="en-US" sz="1150" dirty="0"/>
           </a:p>
@@ -12217,20 +11967,146 @@
       </p:sp>
       <p:pic>
         <p:nvPicPr>
-          <p:cNvPr id="21" name="Image 6" descr="preencoded.png">    </p:cNvPr>
+          <p:cNvPr id="17" name="Image 4" descr="preencoded.png"/>
           <p:cNvPicPr>
             <a:picLocks noChangeAspect="1"/>
           </p:cNvPicPr>
           <p:nvPr/>
         </p:nvPicPr>
         <p:blipFill>
-          <a:blip r:embed="rId7"/>
+          <a:blip r:embed="rId3"/>
           <a:stretch>
             <a:fillRect/>
           </a:stretch>
         </p:blipFill>
         <p:spPr>
           <a:xfrm>
+            <a:off x="411480" y="2871216"/>
+            <a:ext cx="201168" cy="201168"/>
+          </a:xfrm>
+          <a:prstGeom prst="rect">
+            <a:avLst/>
+          </a:prstGeom>
+        </p:spPr>
+      </p:pic>
+      <p:sp>
+        <p:nvSpPr>
+          <p:cNvPr id="18" name="Text 11"/>
+          <p:cNvSpPr/>
+          <p:nvPr/>
+        </p:nvSpPr>
+        <p:spPr>
+          <a:xfrm>
+            <a:off x="713232" y="2834640"/>
+            <a:ext cx="3840480" cy="274320"/>
+          </a:xfrm>
+          <a:prstGeom prst="rect">
+            <a:avLst/>
+          </a:prstGeom>
+          <a:noFill/>
+          <a:ln/>
+        </p:spPr>
+        <p:txBody>
+          <a:bodyPr wrap="square" lIns="0" tIns="0" rIns="0" bIns="0" rtlCol="0" anchor="ctr"/>
+          <a:lstStyle/>
+          <a:p>
+            <a:pPr marL="0" indent="0">
+              <a:buNone/>
+            </a:pPr>
+            <a:r>
+              <a:rPr lang="en-US" sz="1150" dirty="0">
+                <a:solidFill>
+                  <a:srgbClr val="374151"/>
+                </a:solidFill>
+                <a:latin typeface="Calibri" pitchFamily="34" charset="0"/>
+                <a:ea typeface="Calibri" pitchFamily="34" charset="-122"/>
+                <a:cs typeface="Calibri" pitchFamily="34" charset="-120"/>
+              </a:rPr>
+              <a:t>Loss &amp; metrics: Dice, IoU, mIoU</a:t>
+            </a:r>
+            <a:endParaRPr lang="en-US" sz="1150" dirty="0"/>
+          </a:p>
+        </p:txBody>
+      </p:sp>
+      <p:pic>
+        <p:nvPicPr>
+          <p:cNvPr id="19" name="Image 5" descr="preencoded.png"/>
+          <p:cNvPicPr>
+            <a:picLocks noChangeAspect="1"/>
+          </p:cNvPicPr>
+          <p:nvPr/>
+        </p:nvPicPr>
+        <p:blipFill>
+          <a:blip r:embed="rId3"/>
+          <a:stretch>
+            <a:fillRect/>
+          </a:stretch>
+        </p:blipFill>
+        <p:spPr>
+          <a:xfrm>
+            <a:off x="411480" y="3282696"/>
+            <a:ext cx="201168" cy="201168"/>
+          </a:xfrm>
+          <a:prstGeom prst="rect">
+            <a:avLst/>
+          </a:prstGeom>
+        </p:spPr>
+      </p:pic>
+      <p:sp>
+        <p:nvSpPr>
+          <p:cNvPr id="20" name="Text 12"/>
+          <p:cNvSpPr/>
+          <p:nvPr/>
+        </p:nvSpPr>
+        <p:spPr>
+          <a:xfrm>
+            <a:off x="713232" y="3246120"/>
+            <a:ext cx="3840480" cy="274320"/>
+          </a:xfrm>
+          <a:prstGeom prst="rect">
+            <a:avLst/>
+          </a:prstGeom>
+          <a:noFill/>
+          <a:ln/>
+        </p:spPr>
+        <p:txBody>
+          <a:bodyPr wrap="square" lIns="0" tIns="0" rIns="0" bIns="0" rtlCol="0" anchor="ctr"/>
+          <a:lstStyle/>
+          <a:p>
+            <a:pPr marL="0" indent="0">
+              <a:buNone/>
+            </a:pPr>
+            <a:r>
+              <a:rPr lang="en-US" sz="1150" dirty="0">
+                <a:solidFill>
+                  <a:srgbClr val="374151"/>
+                </a:solidFill>
+                <a:latin typeface="Calibri" pitchFamily="34" charset="0"/>
+                <a:ea typeface="Calibri" pitchFamily="34" charset="-122"/>
+                <a:cs typeface="Calibri" pitchFamily="34" charset="-120"/>
+              </a:rPr>
+              <a:t>Mask R-CNN — two-stage with mask head</a:t>
+            </a:r>
+            <a:endParaRPr lang="en-US" sz="1150" dirty="0"/>
+          </a:p>
+        </p:txBody>
+      </p:sp>
+      <p:pic>
+        <p:nvPicPr>
+          <p:cNvPr id="21" name="Image 6" descr="preencoded.png"/>
+          <p:cNvPicPr>
+            <a:picLocks noChangeAspect="1"/>
+          </p:cNvPicPr>
+          <p:nvPr/>
+        </p:nvPicPr>
+        <p:blipFill>
+          <a:blip r:embed="rId3"/>
+          <a:stretch>
+            <a:fillRect/>
+          </a:stretch>
+        </p:blipFill>
+        <p:spPr>
+          <a:xfrm>
             <a:off x="411480" y="3694176"/>
             <a:ext cx="201168" cy="201168"/>
           </a:xfrm>
@@ -12260,7 +12136,7 @@
           <a:bodyPr wrap="square" lIns="0" tIns="0" rIns="0" bIns="0" rtlCol="0" anchor="ctr"/>
           <a:lstStyle/>
           <a:p>
-            <a:pPr indent="0" marL="0">
+            <a:pPr marL="0" indent="0">
               <a:buNone/>
             </a:pPr>
             <a:r>
@@ -12299,11 +12175,11 @@
           <a:bodyPr wrap="square" lIns="0" tIns="0" rIns="0" bIns="0" rtlCol="0" anchor="ctr"/>
           <a:lstStyle/>
           <a:p>
-            <a:pPr indent="0" marL="0">
-              <a:buNone/>
-            </a:pPr>
-            <a:r>
-              <a:rPr lang="en-US" sz="1000" b="1" spc="400" kern="0" dirty="0">
+            <a:pPr marL="0" indent="0">
+              <a:buNone/>
+            </a:pPr>
+            <a:r>
+              <a:rPr lang="en-US" sz="1000" b="1" kern="0" spc="400" dirty="0">
                 <a:solidFill>
                   <a:srgbClr val="E11D48"/>
                 </a:solidFill>
@@ -12341,7 +12217,7 @@
             <a:prstDash val="solid"/>
           </a:ln>
           <a:effectLst>
-            <a:outerShdw sx="100000" sy="100000" kx="0" ky="0" algn="bl" rotWithShape="0" blurRad="101600" dist="25400" dir="5400000">
+            <a:outerShdw blurRad="101600" dist="25400" dir="5400000" algn="bl" rotWithShape="0">
               <a:srgbClr val="000000">
                 <a:alpha val="10000"/>
               </a:srgbClr>
@@ -12390,7 +12266,7 @@
           <a:bodyPr wrap="square" lIns="0" tIns="0" rIns="0" bIns="0" rtlCol="0" anchor="ctr"/>
           <a:lstStyle/>
           <a:p>
-            <a:pPr indent="0" marL="0">
+            <a:pPr marL="0" indent="0">
               <a:buNone/>
             </a:pPr>
             <a:r>
@@ -12429,7 +12305,7 @@
           <a:bodyPr wrap="square" lIns="0" tIns="0" rIns="0" bIns="0" rtlCol="0" anchor="ctr"/>
           <a:lstStyle/>
           <a:p>
-            <a:pPr indent="0" marL="0">
+            <a:pPr marL="0" indent="0">
               <a:buNone/>
             </a:pPr>
             <a:r>
@@ -12471,7 +12347,7 @@
             <a:prstDash val="solid"/>
           </a:ln>
           <a:effectLst>
-            <a:outerShdw sx="100000" sy="100000" kx="0" ky="0" algn="bl" rotWithShape="0" blurRad="101600" dist="25400" dir="5400000">
+            <a:outerShdw blurRad="101600" dist="25400" dir="5400000" algn="bl" rotWithShape="0">
               <a:srgbClr val="000000">
                 <a:alpha val="10000"/>
               </a:srgbClr>
@@ -12520,7 +12396,7 @@
           <a:bodyPr wrap="square" lIns="0" tIns="0" rIns="0" bIns="0" rtlCol="0" anchor="ctr"/>
           <a:lstStyle/>
           <a:p>
-            <a:pPr indent="0" marL="0">
+            <a:pPr marL="0" indent="0">
               <a:buNone/>
             </a:pPr>
             <a:r>
@@ -12559,7 +12435,7 @@
           <a:bodyPr wrap="square" lIns="0" tIns="0" rIns="0" bIns="0" rtlCol="0" anchor="ctr"/>
           <a:lstStyle/>
           <a:p>
-            <a:pPr indent="0" marL="0">
+            <a:pPr marL="0" indent="0">
               <a:buNone/>
             </a:pPr>
             <a:r>
@@ -12601,7 +12477,7 @@
             <a:prstDash val="solid"/>
           </a:ln>
           <a:effectLst>
-            <a:outerShdw sx="100000" sy="100000" kx="0" ky="0" algn="bl" rotWithShape="0" blurRad="101600" dist="25400" dir="5400000">
+            <a:outerShdw blurRad="101600" dist="25400" dir="5400000" algn="bl" rotWithShape="0">
               <a:srgbClr val="000000">
                 <a:alpha val="10000"/>
               </a:srgbClr>
@@ -12650,7 +12526,7 @@
           <a:bodyPr wrap="square" lIns="0" tIns="0" rIns="0" bIns="0" rtlCol="0" anchor="ctr"/>
           <a:lstStyle/>
           <a:p>
-            <a:pPr indent="0" marL="0">
+            <a:pPr marL="0" indent="0">
               <a:buNone/>
             </a:pPr>
             <a:r>
@@ -12689,7 +12565,7 @@
           <a:bodyPr wrap="square" lIns="0" tIns="0" rIns="0" bIns="0" rtlCol="0" anchor="ctr"/>
           <a:lstStyle/>
           <a:p>
-            <a:pPr indent="0" marL="0">
+            <a:pPr marL="0" indent="0">
               <a:buNone/>
             </a:pPr>
             <a:r>
@@ -12750,7 +12626,7 @@
           <a:bodyPr wrap="square" lIns="0" tIns="0" rIns="0" bIns="0" rtlCol="0" anchor="ctr"/>
           <a:lstStyle/>
           <a:p>
-            <a:pPr algn="ctr" indent="0" marL="0">
+            <a:pPr marL="0" indent="0" algn="ctr">
               <a:buNone/>
             </a:pPr>
             <a:r>
@@ -12784,6 +12660,7 @@
         <a:solidFill>
           <a:srgbClr val="F8FAFC"/>
         </a:solidFill>
+        <a:effectLst/>
       </p:bgPr>
     </p:bg>
     <p:spTree>
@@ -12861,7 +12738,7 @@
           <a:bodyPr wrap="square" lIns="0" tIns="0" rIns="0" bIns="0" rtlCol="0" anchor="ctr"/>
           <a:lstStyle/>
           <a:p>
-            <a:pPr indent="0" marL="0">
+            <a:pPr marL="0" indent="0">
               <a:buNone/>
             </a:pPr>
             <a:r>
@@ -12900,11 +12777,11 @@
           <a:bodyPr wrap="square" lIns="0" tIns="0" rIns="0" bIns="0" rtlCol="0" anchor="ctr"/>
           <a:lstStyle/>
           <a:p>
-            <a:pPr algn="r" indent="0" marL="0">
-              <a:buNone/>
-            </a:pPr>
-            <a:r>
-              <a:rPr lang="en-US" sz="900" b="1" spc="400" kern="0" dirty="0">
+            <a:pPr marL="0" indent="0" algn="r">
+              <a:buNone/>
+            </a:pPr>
+            <a:r>
+              <a:rPr lang="en-US" sz="900" b="1" kern="0" spc="400" dirty="0">
                 <a:solidFill>
                   <a:srgbClr val="BFDBFE"/>
                 </a:solidFill>
@@ -12959,7 +12836,7 @@
           <a:bodyPr wrap="square" lIns="0" tIns="0" rIns="0" bIns="0" rtlCol="0" anchor="ctr"/>
           <a:lstStyle/>
           <a:p>
-            <a:pPr indent="0" marL="0">
+            <a:pPr marL="0" indent="0">
               <a:buNone/>
             </a:pPr>
             <a:r>
@@ -13001,7 +12878,7 @@
             <a:prstDash val="solid"/>
           </a:ln>
           <a:effectLst>
-            <a:outerShdw sx="100000" sy="100000" kx="0" ky="0" algn="bl" rotWithShape="0" blurRad="101600" dist="25400" dir="5400000">
+            <a:outerShdw blurRad="101600" dist="25400" dir="5400000" algn="bl" rotWithShape="0">
               <a:srgbClr val="000000">
                 <a:alpha val="10000"/>
               </a:srgbClr>
@@ -13070,7 +12947,7 @@
           <a:bodyPr wrap="square" lIns="0" tIns="0" rIns="0" bIns="0" rtlCol="0" anchor="ctr"/>
           <a:lstStyle/>
           <a:p>
-            <a:pPr algn="ctr" indent="0" marL="0">
+            <a:pPr marL="0" indent="0" algn="ctr">
               <a:buNone/>
             </a:pPr>
             <a:r>
@@ -13109,7 +12986,7 @@
           <a:bodyPr wrap="square" lIns="0" tIns="0" rIns="0" bIns="0" rtlCol="0" anchor="ctr"/>
           <a:lstStyle/>
           <a:p>
-            <a:pPr indent="0" marL="0">
+            <a:pPr marL="0" indent="0">
               <a:buNone/>
             </a:pPr>
             <a:r>
@@ -13148,7 +13025,7 @@
           <a:bodyPr wrap="square" lIns="0" tIns="0" rIns="0" bIns="0" rtlCol="0" anchor="t"/>
           <a:lstStyle/>
           <a:p>
-            <a:pPr indent="0" marL="0">
+            <a:pPr marL="0" indent="0">
               <a:buNone/>
             </a:pPr>
             <a:r>
@@ -13190,7 +13067,7 @@
             <a:prstDash val="solid"/>
           </a:ln>
           <a:effectLst>
-            <a:outerShdw sx="100000" sy="100000" kx="0" ky="0" algn="bl" rotWithShape="0" blurRad="101600" dist="25400" dir="5400000">
+            <a:outerShdw blurRad="101600" dist="25400" dir="5400000" algn="bl" rotWithShape="0">
               <a:srgbClr val="000000">
                 <a:alpha val="10000"/>
               </a:srgbClr>
@@ -13259,7 +13136,7 @@
           <a:bodyPr wrap="square" lIns="0" tIns="0" rIns="0" bIns="0" rtlCol="0" anchor="ctr"/>
           <a:lstStyle/>
           <a:p>
-            <a:pPr algn="ctr" indent="0" marL="0">
+            <a:pPr marL="0" indent="0" algn="ctr">
               <a:buNone/>
             </a:pPr>
             <a:r>
@@ -13298,7 +13175,7 @@
           <a:bodyPr wrap="square" lIns="0" tIns="0" rIns="0" bIns="0" rtlCol="0" anchor="ctr"/>
           <a:lstStyle/>
           <a:p>
-            <a:pPr indent="0" marL="0">
+            <a:pPr marL="0" indent="0">
               <a:buNone/>
             </a:pPr>
             <a:r>
@@ -13337,7 +13214,7 @@
           <a:bodyPr wrap="square" lIns="0" tIns="0" rIns="0" bIns="0" rtlCol="0" anchor="t"/>
           <a:lstStyle/>
           <a:p>
-            <a:pPr indent="0" marL="0">
+            <a:pPr marL="0" indent="0">
               <a:buNone/>
             </a:pPr>
             <a:r>
@@ -13379,7 +13256,7 @@
             <a:prstDash val="solid"/>
           </a:ln>
           <a:effectLst>
-            <a:outerShdw sx="100000" sy="100000" kx="0" ky="0" algn="bl" rotWithShape="0" blurRad="101600" dist="25400" dir="5400000">
+            <a:outerShdw blurRad="101600" dist="25400" dir="5400000" algn="bl" rotWithShape="0">
               <a:srgbClr val="000000">
                 <a:alpha val="10000"/>
               </a:srgbClr>
@@ -13448,7 +13325,7 @@
           <a:bodyPr wrap="square" lIns="0" tIns="0" rIns="0" bIns="0" rtlCol="0" anchor="ctr"/>
           <a:lstStyle/>
           <a:p>
-            <a:pPr algn="ctr" indent="0" marL="0">
+            <a:pPr marL="0" indent="0" algn="ctr">
               <a:buNone/>
             </a:pPr>
             <a:r>
@@ -13487,7 +13364,7 @@
           <a:bodyPr wrap="square" lIns="0" tIns="0" rIns="0" bIns="0" rtlCol="0" anchor="ctr"/>
           <a:lstStyle/>
           <a:p>
-            <a:pPr indent="0" marL="0">
+            <a:pPr marL="0" indent="0">
               <a:buNone/>
             </a:pPr>
             <a:r>
@@ -13526,7 +13403,7 @@
           <a:bodyPr wrap="square" lIns="0" tIns="0" rIns="0" bIns="0" rtlCol="0" anchor="t"/>
           <a:lstStyle/>
           <a:p>
-            <a:pPr indent="0" marL="0">
+            <a:pPr marL="0" indent="0">
               <a:buNone/>
             </a:pPr>
             <a:r>
@@ -13568,7 +13445,7 @@
             <a:prstDash val="solid"/>
           </a:ln>
           <a:effectLst>
-            <a:outerShdw sx="100000" sy="100000" kx="0" ky="0" algn="bl" rotWithShape="0" blurRad="101600" dist="25400" dir="5400000">
+            <a:outerShdw blurRad="101600" dist="25400" dir="5400000" algn="bl" rotWithShape="0">
               <a:srgbClr val="000000">
                 <a:alpha val="10000"/>
               </a:srgbClr>
@@ -13637,7 +13514,7 @@
           <a:bodyPr wrap="square" lIns="0" tIns="0" rIns="0" bIns="0" rtlCol="0" anchor="ctr"/>
           <a:lstStyle/>
           <a:p>
-            <a:pPr algn="ctr" indent="0" marL="0">
+            <a:pPr marL="0" indent="0" algn="ctr">
               <a:buNone/>
             </a:pPr>
             <a:r>
@@ -13676,7 +13553,7 @@
           <a:bodyPr wrap="square" lIns="0" tIns="0" rIns="0" bIns="0" rtlCol="0" anchor="ctr"/>
           <a:lstStyle/>
           <a:p>
-            <a:pPr indent="0" marL="0">
+            <a:pPr marL="0" indent="0">
               <a:buNone/>
             </a:pPr>
             <a:r>
@@ -13715,7 +13592,7 @@
           <a:bodyPr wrap="square" lIns="0" tIns="0" rIns="0" bIns="0" rtlCol="0" anchor="t"/>
           <a:lstStyle/>
           <a:p>
-            <a:pPr indent="0" marL="0">
+            <a:pPr marL="0" indent="0">
               <a:buNone/>
             </a:pPr>
             <a:r>
@@ -13757,7 +13634,7 @@
             <a:prstDash val="solid"/>
           </a:ln>
           <a:effectLst>
-            <a:outerShdw sx="100000" sy="100000" kx="0" ky="0" algn="bl" rotWithShape="0" blurRad="101600" dist="25400" dir="5400000">
+            <a:outerShdw blurRad="101600" dist="25400" dir="5400000" algn="bl" rotWithShape="0">
               <a:srgbClr val="000000">
                 <a:alpha val="10000"/>
               </a:srgbClr>
@@ -13826,7 +13703,7 @@
           <a:bodyPr wrap="square" lIns="0" tIns="0" rIns="0" bIns="0" rtlCol="0" anchor="ctr"/>
           <a:lstStyle/>
           <a:p>
-            <a:pPr algn="ctr" indent="0" marL="0">
+            <a:pPr marL="0" indent="0" algn="ctr">
               <a:buNone/>
             </a:pPr>
             <a:r>
@@ -13865,7 +13742,7 @@
           <a:bodyPr wrap="square" lIns="0" tIns="0" rIns="0" bIns="0" rtlCol="0" anchor="ctr"/>
           <a:lstStyle/>
           <a:p>
-            <a:pPr indent="0" marL="0">
+            <a:pPr marL="0" indent="0">
               <a:buNone/>
             </a:pPr>
             <a:r>
@@ -13904,7 +13781,7 @@
           <a:bodyPr wrap="square" lIns="0" tIns="0" rIns="0" bIns="0" rtlCol="0" anchor="t"/>
           <a:lstStyle/>
           <a:p>
-            <a:pPr indent="0" marL="0">
+            <a:pPr marL="0" indent="0">
               <a:buNone/>
             </a:pPr>
             <a:r>
@@ -13946,7 +13823,7 @@
             <a:prstDash val="solid"/>
           </a:ln>
           <a:effectLst>
-            <a:outerShdw sx="100000" sy="100000" kx="0" ky="0" algn="bl" rotWithShape="0" blurRad="101600" dist="25400" dir="5400000">
+            <a:outerShdw blurRad="101600" dist="25400" dir="5400000" algn="bl" rotWithShape="0">
               <a:srgbClr val="000000">
                 <a:alpha val="10000"/>
               </a:srgbClr>
@@ -14015,7 +13892,7 @@
           <a:bodyPr wrap="square" lIns="0" tIns="0" rIns="0" bIns="0" rtlCol="0" anchor="ctr"/>
           <a:lstStyle/>
           <a:p>
-            <a:pPr algn="ctr" indent="0" marL="0">
+            <a:pPr marL="0" indent="0" algn="ctr">
               <a:buNone/>
             </a:pPr>
             <a:r>
@@ -14054,7 +13931,7 @@
           <a:bodyPr wrap="square" lIns="0" tIns="0" rIns="0" bIns="0" rtlCol="0" anchor="ctr"/>
           <a:lstStyle/>
           <a:p>
-            <a:pPr indent="0" marL="0">
+            <a:pPr marL="0" indent="0">
               <a:buNone/>
             </a:pPr>
             <a:r>
@@ -14093,7 +13970,7 @@
           <a:bodyPr wrap="square" lIns="0" tIns="0" rIns="0" bIns="0" rtlCol="0" anchor="t"/>
           <a:lstStyle/>
           <a:p>
-            <a:pPr indent="0" marL="0">
+            <a:pPr marL="0" indent="0">
               <a:buNone/>
             </a:pPr>
             <a:r>
@@ -14127,6 +14004,7 @@
         <a:solidFill>
           <a:srgbClr val="F8FAFC"/>
         </a:solidFill>
+        <a:effectLst/>
       </p:bgPr>
     </p:bg>
     <p:spTree>
@@ -14204,7 +14082,7 @@
           <a:bodyPr wrap="square" lIns="0" tIns="0" rIns="0" bIns="0" rtlCol="0" anchor="ctr"/>
           <a:lstStyle/>
           <a:p>
-            <a:pPr indent="0" marL="0">
+            <a:pPr marL="0" indent="0">
               <a:buNone/>
             </a:pPr>
             <a:r>
@@ -14243,11 +14121,11 @@
           <a:bodyPr wrap="square" lIns="0" tIns="0" rIns="0" bIns="0" rtlCol="0" anchor="ctr"/>
           <a:lstStyle/>
           <a:p>
-            <a:pPr algn="r" indent="0" marL="0">
-              <a:buNone/>
-            </a:pPr>
-            <a:r>
-              <a:rPr lang="en-US" sz="900" b="1" spc="400" kern="0" dirty="0">
+            <a:pPr marL="0" indent="0" algn="r">
+              <a:buNone/>
+            </a:pPr>
+            <a:r>
+              <a:rPr lang="en-US" sz="900" b="1" kern="0" spc="400" dirty="0">
                 <a:solidFill>
                   <a:srgbClr val="BFDBFE"/>
                 </a:solidFill>
@@ -14302,7 +14180,7 @@
           <a:bodyPr wrap="square" lIns="0" tIns="0" rIns="0" bIns="0" rtlCol="0" anchor="ctr"/>
           <a:lstStyle/>
           <a:p>
-            <a:pPr indent="0" marL="0">
+            <a:pPr marL="0" indent="0">
               <a:buNone/>
             </a:pPr>
             <a:r>
@@ -14344,7 +14222,7 @@
             <a:prstDash val="solid"/>
           </a:ln>
           <a:effectLst>
-            <a:outerShdw sx="100000" sy="100000" kx="0" ky="0" algn="bl" rotWithShape="0" blurRad="101600" dist="25400" dir="5400000">
+            <a:outerShdw blurRad="101600" dist="25400" dir="5400000" algn="bl" rotWithShape="0">
               <a:srgbClr val="000000">
                 <a:alpha val="10000"/>
               </a:srgbClr>
@@ -14393,7 +14271,7 @@
           <a:bodyPr wrap="square" lIns="0" tIns="0" rIns="0" bIns="0" rtlCol="0" anchor="ctr"/>
           <a:lstStyle/>
           <a:p>
-            <a:pPr algn="ctr" indent="0" marL="0">
+            <a:pPr marL="0" indent="0" algn="ctr">
               <a:buNone/>
             </a:pPr>
             <a:r>
@@ -14432,7 +14310,7 @@
           <a:bodyPr wrap="square" lIns="0" tIns="0" rIns="0" bIns="0" rtlCol="0" anchor="t"/>
           <a:lstStyle/>
           <a:p>
-            <a:pPr algn="ctr" indent="0" marL="0">
+            <a:pPr marL="0" indent="0" algn="ctr">
               <a:buNone/>
             </a:pPr>
             <a:r>
@@ -14449,7 +14327,7 @@
             <a:endParaRPr lang="en-US" sz="1100" dirty="0"/>
           </a:p>
           <a:p>
-            <a:pPr algn="ctr" indent="0" marL="0">
+            <a:pPr marL="0" indent="0" algn="ctr">
               <a:buNone/>
             </a:pPr>
             <a:r>
@@ -14511,11 +14389,11 @@
           <a:bodyPr wrap="square" lIns="0" tIns="0" rIns="0" bIns="0" rtlCol="0" anchor="ctr"/>
           <a:lstStyle/>
           <a:p>
-            <a:pPr algn="ctr" indent="0" marL="0">
-              <a:buNone/>
-            </a:pPr>
-            <a:r>
-              <a:rPr lang="en-US" sz="800" b="1" spc="300" kern="0" dirty="0">
+            <a:pPr marL="0" indent="0" algn="ctr">
+              <a:buNone/>
+            </a:pPr>
+            <a:r>
+              <a:rPr lang="en-US" sz="800" b="1" kern="0" spc="300" dirty="0">
                 <a:solidFill>
                   <a:srgbClr val="64748B"/>
                 </a:solidFill>
@@ -14550,7 +14428,7 @@
           <a:bodyPr wrap="square" lIns="0" tIns="0" rIns="0" bIns="0" rtlCol="0" anchor="t"/>
           <a:lstStyle/>
           <a:p>
-            <a:pPr algn="ctr" indent="0" marL="0">
+            <a:pPr marL="0" indent="0" algn="ctr">
               <a:buNone/>
             </a:pPr>
             <a:r>
@@ -14616,7 +14494,7 @@
           <a:bodyPr wrap="square" lIns="0" tIns="0" rIns="0" bIns="0" rtlCol="0" anchor="ctr"/>
           <a:lstStyle/>
           <a:p>
-            <a:pPr algn="ctr" indent="0" marL="0">
+            <a:pPr marL="0" indent="0" algn="ctr">
               <a:buNone/>
             </a:pPr>
             <a:r>
@@ -14658,7 +14536,7 @@
             <a:prstDash val="solid"/>
           </a:ln>
           <a:effectLst>
-            <a:outerShdw sx="100000" sy="100000" kx="0" ky="0" algn="bl" rotWithShape="0" blurRad="101600" dist="25400" dir="5400000">
+            <a:outerShdw blurRad="101600" dist="25400" dir="5400000" algn="bl" rotWithShape="0">
               <a:srgbClr val="000000">
                 <a:alpha val="10000"/>
               </a:srgbClr>
@@ -14707,7 +14585,7 @@
           <a:bodyPr wrap="square" lIns="0" tIns="0" rIns="0" bIns="0" rtlCol="0" anchor="ctr"/>
           <a:lstStyle/>
           <a:p>
-            <a:pPr algn="ctr" indent="0" marL="0">
+            <a:pPr marL="0" indent="0" algn="ctr">
               <a:buNone/>
             </a:pPr>
             <a:r>
@@ -14746,7 +14624,7 @@
           <a:bodyPr wrap="square" lIns="0" tIns="0" rIns="0" bIns="0" rtlCol="0" anchor="t"/>
           <a:lstStyle/>
           <a:p>
-            <a:pPr algn="ctr" indent="0" marL="0">
+            <a:pPr marL="0" indent="0" algn="ctr">
               <a:buNone/>
             </a:pPr>
             <a:r>
@@ -14763,7 +14641,7 @@
             <a:endParaRPr lang="en-US" sz="1100" dirty="0"/>
           </a:p>
           <a:p>
-            <a:pPr algn="ctr" indent="0" marL="0">
+            <a:pPr marL="0" indent="0" algn="ctr">
               <a:buNone/>
             </a:pPr>
             <a:r>
@@ -14825,11 +14703,11 @@
           <a:bodyPr wrap="square" lIns="0" tIns="0" rIns="0" bIns="0" rtlCol="0" anchor="ctr"/>
           <a:lstStyle/>
           <a:p>
-            <a:pPr algn="ctr" indent="0" marL="0">
-              <a:buNone/>
-            </a:pPr>
-            <a:r>
-              <a:rPr lang="en-US" sz="800" b="1" spc="300" kern="0" dirty="0">
+            <a:pPr marL="0" indent="0" algn="ctr">
+              <a:buNone/>
+            </a:pPr>
+            <a:r>
+              <a:rPr lang="en-US" sz="800" b="1" kern="0" spc="300" dirty="0">
                 <a:solidFill>
                   <a:srgbClr val="64748B"/>
                 </a:solidFill>
@@ -14864,7 +14742,7 @@
           <a:bodyPr wrap="square" lIns="0" tIns="0" rIns="0" bIns="0" rtlCol="0" anchor="t"/>
           <a:lstStyle/>
           <a:p>
-            <a:pPr algn="ctr" indent="0" marL="0">
+            <a:pPr marL="0" indent="0" algn="ctr">
               <a:buNone/>
             </a:pPr>
             <a:r>
@@ -14930,7 +14808,7 @@
           <a:bodyPr wrap="square" lIns="0" tIns="0" rIns="0" bIns="0" rtlCol="0" anchor="ctr"/>
           <a:lstStyle/>
           <a:p>
-            <a:pPr algn="ctr" indent="0" marL="0">
+            <a:pPr marL="0" indent="0" algn="ctr">
               <a:buNone/>
             </a:pPr>
             <a:r>
@@ -14972,7 +14850,7 @@
             <a:prstDash val="solid"/>
           </a:ln>
           <a:effectLst>
-            <a:outerShdw sx="100000" sy="100000" kx="0" ky="0" algn="bl" rotWithShape="0" blurRad="101600" dist="25400" dir="5400000">
+            <a:outerShdw blurRad="101600" dist="25400" dir="5400000" algn="bl" rotWithShape="0">
               <a:srgbClr val="000000">
                 <a:alpha val="10000"/>
               </a:srgbClr>
@@ -15021,7 +14899,7 @@
           <a:bodyPr wrap="square" lIns="0" tIns="0" rIns="0" bIns="0" rtlCol="0" anchor="ctr"/>
           <a:lstStyle/>
           <a:p>
-            <a:pPr algn="ctr" indent="0" marL="0">
+            <a:pPr marL="0" indent="0" algn="ctr">
               <a:buNone/>
             </a:pPr>
             <a:r>
@@ -15060,7 +14938,7 @@
           <a:bodyPr wrap="square" lIns="0" tIns="0" rIns="0" bIns="0" rtlCol="0" anchor="t"/>
           <a:lstStyle/>
           <a:p>
-            <a:pPr algn="ctr" indent="0" marL="0">
+            <a:pPr marL="0" indent="0" algn="ctr">
               <a:buNone/>
             </a:pPr>
             <a:r>
@@ -15077,7 +14955,7 @@
             <a:endParaRPr lang="en-US" sz="1100" dirty="0"/>
           </a:p>
           <a:p>
-            <a:pPr algn="ctr" indent="0" marL="0">
+            <a:pPr marL="0" indent="0" algn="ctr">
               <a:buNone/>
             </a:pPr>
             <a:r>
@@ -15139,11 +15017,11 @@
           <a:bodyPr wrap="square" lIns="0" tIns="0" rIns="0" bIns="0" rtlCol="0" anchor="ctr"/>
           <a:lstStyle/>
           <a:p>
-            <a:pPr algn="ctr" indent="0" marL="0">
-              <a:buNone/>
-            </a:pPr>
-            <a:r>
-              <a:rPr lang="en-US" sz="800" b="1" spc="300" kern="0" dirty="0">
+            <a:pPr marL="0" indent="0" algn="ctr">
+              <a:buNone/>
+            </a:pPr>
+            <a:r>
+              <a:rPr lang="en-US" sz="800" b="1" kern="0" spc="300" dirty="0">
                 <a:solidFill>
                   <a:srgbClr val="64748B"/>
                 </a:solidFill>
@@ -15178,7 +15056,7 @@
           <a:bodyPr wrap="square" lIns="0" tIns="0" rIns="0" bIns="0" rtlCol="0" anchor="t"/>
           <a:lstStyle/>
           <a:p>
-            <a:pPr algn="ctr" indent="0" marL="0">
+            <a:pPr marL="0" indent="0" algn="ctr">
               <a:buNone/>
             </a:pPr>
             <a:r>
@@ -15244,7 +15122,7 @@
           <a:bodyPr wrap="square" lIns="0" tIns="0" rIns="0" bIns="0" rtlCol="0" anchor="ctr"/>
           <a:lstStyle/>
           <a:p>
-            <a:pPr algn="ctr" indent="0" marL="0">
+            <a:pPr marL="0" indent="0" algn="ctr">
               <a:buNone/>
             </a:pPr>
             <a:r>
@@ -15286,7 +15164,7 @@
             <a:prstDash val="solid"/>
           </a:ln>
           <a:effectLst>
-            <a:outerShdw sx="100000" sy="100000" kx="0" ky="0" algn="bl" rotWithShape="0" blurRad="101600" dist="25400" dir="5400000">
+            <a:outerShdw blurRad="101600" dist="25400" dir="5400000" algn="bl" rotWithShape="0">
               <a:srgbClr val="000000">
                 <a:alpha val="10000"/>
               </a:srgbClr>
@@ -15335,7 +15213,7 @@
           <a:bodyPr wrap="square" lIns="0" tIns="0" rIns="0" bIns="0" rtlCol="0" anchor="ctr"/>
           <a:lstStyle/>
           <a:p>
-            <a:pPr algn="ctr" indent="0" marL="0">
+            <a:pPr marL="0" indent="0" algn="ctr">
               <a:buNone/>
             </a:pPr>
             <a:r>
@@ -15374,7 +15252,7 @@
           <a:bodyPr wrap="square" lIns="0" tIns="0" rIns="0" bIns="0" rtlCol="0" anchor="t"/>
           <a:lstStyle/>
           <a:p>
-            <a:pPr algn="ctr" indent="0" marL="0">
+            <a:pPr marL="0" indent="0" algn="ctr">
               <a:buNone/>
             </a:pPr>
             <a:r>
@@ -15391,7 +15269,7 @@
             <a:endParaRPr lang="en-US" sz="1100" dirty="0"/>
           </a:p>
           <a:p>
-            <a:pPr algn="ctr" indent="0" marL="0">
+            <a:pPr marL="0" indent="0" algn="ctr">
               <a:buNone/>
             </a:pPr>
             <a:r>
@@ -15453,11 +15331,11 @@
           <a:bodyPr wrap="square" lIns="0" tIns="0" rIns="0" bIns="0" rtlCol="0" anchor="ctr"/>
           <a:lstStyle/>
           <a:p>
-            <a:pPr algn="ctr" indent="0" marL="0">
-              <a:buNone/>
-            </a:pPr>
-            <a:r>
-              <a:rPr lang="en-US" sz="800" b="1" spc="300" kern="0" dirty="0">
+            <a:pPr marL="0" indent="0" algn="ctr">
+              <a:buNone/>
+            </a:pPr>
+            <a:r>
+              <a:rPr lang="en-US" sz="800" b="1" kern="0" spc="300" dirty="0">
                 <a:solidFill>
                   <a:srgbClr val="64748B"/>
                 </a:solidFill>
@@ -15492,7 +15370,7 @@
           <a:bodyPr wrap="square" lIns="0" tIns="0" rIns="0" bIns="0" rtlCol="0" anchor="t"/>
           <a:lstStyle/>
           <a:p>
-            <a:pPr algn="ctr" indent="0" marL="0">
+            <a:pPr marL="0" indent="0" algn="ctr">
               <a:buNone/>
             </a:pPr>
             <a:r>
@@ -15558,7 +15436,7 @@
           <a:bodyPr wrap="square" lIns="0" tIns="0" rIns="0" bIns="0" rtlCol="0" anchor="ctr"/>
           <a:lstStyle/>
           <a:p>
-            <a:pPr algn="ctr" indent="0" marL="0">
+            <a:pPr marL="0" indent="0" algn="ctr">
               <a:buNone/>
             </a:pPr>
             <a:r>
@@ -15619,7 +15497,7 @@
           <a:bodyPr wrap="square" lIns="0" tIns="0" rIns="0" bIns="0" rtlCol="0" anchor="ctr"/>
           <a:lstStyle/>
           <a:p>
-            <a:pPr algn="ctr" indent="0" marL="0">
+            <a:pPr marL="0" indent="0" algn="ctr">
               <a:buNone/>
             </a:pPr>
             <a:r>
@@ -15653,6 +15531,7 @@
         <a:solidFill>
           <a:srgbClr val="F8FAFC"/>
         </a:solidFill>
+        <a:effectLst/>
       </p:bgPr>
     </p:bg>
     <p:spTree>
@@ -15730,7 +15609,7 @@
           <a:bodyPr wrap="square" lIns="0" tIns="0" rIns="0" bIns="0" rtlCol="0" anchor="ctr"/>
           <a:lstStyle/>
           <a:p>
-            <a:pPr indent="0" marL="0">
+            <a:pPr marL="0" indent="0">
               <a:buNone/>
             </a:pPr>
             <a:r>
@@ -15769,11 +15648,11 @@
           <a:bodyPr wrap="square" lIns="0" tIns="0" rIns="0" bIns="0" rtlCol="0" anchor="ctr"/>
           <a:lstStyle/>
           <a:p>
-            <a:pPr algn="r" indent="0" marL="0">
-              <a:buNone/>
-            </a:pPr>
-            <a:r>
-              <a:rPr lang="en-US" sz="900" b="1" spc="400" kern="0" dirty="0">
+            <a:pPr marL="0" indent="0" algn="r">
+              <a:buNone/>
+            </a:pPr>
+            <a:r>
+              <a:rPr lang="en-US" sz="900" b="1" kern="0" spc="400" dirty="0">
                 <a:solidFill>
                   <a:srgbClr val="BFDBFE"/>
                 </a:solidFill>
@@ -15828,7 +15707,7 @@
           <a:bodyPr wrap="square" lIns="0" tIns="0" rIns="0" bIns="0" rtlCol="0" anchor="ctr"/>
           <a:lstStyle/>
           <a:p>
-            <a:pPr indent="0" marL="0">
+            <a:pPr marL="0" indent="0">
               <a:buNone/>
             </a:pPr>
             <a:r>
@@ -15870,7 +15749,7 @@
             <a:prstDash val="solid"/>
           </a:ln>
           <a:effectLst>
-            <a:outerShdw sx="100000" sy="100000" kx="0" ky="0" algn="bl" rotWithShape="0" blurRad="101600" dist="25400" dir="5400000">
+            <a:outerShdw blurRad="101600" dist="25400" dir="5400000" algn="bl" rotWithShape="0">
               <a:srgbClr val="000000">
                 <a:alpha val="10000"/>
               </a:srgbClr>
@@ -15919,7 +15798,7 @@
           <a:bodyPr wrap="square" lIns="0" tIns="0" rIns="0" bIns="0" rtlCol="0" anchor="ctr"/>
           <a:lstStyle/>
           <a:p>
-            <a:pPr indent="0" marL="0">
+            <a:pPr marL="0" indent="0">
               <a:buNone/>
             </a:pPr>
             <a:r>
@@ -15958,7 +15837,7 @@
           <a:bodyPr wrap="square" lIns="0" tIns="0" rIns="0" bIns="0" rtlCol="0" anchor="ctr"/>
           <a:lstStyle/>
           <a:p>
-            <a:pPr indent="0" marL="0">
+            <a:pPr marL="0" indent="0">
               <a:spcAft>
                 <a:spcPts val="200"/>
               </a:spcAft>
@@ -15975,12 +15854,6 @@
               </a:rPr>
               <a:t>Assign a class label to </a:t>
             </a:r>
-            <a:pPr indent="0" marL="0">
-              <a:spcAft>
-                <a:spcPts val="200"/>
-              </a:spcAft>
-              <a:buNone/>
-            </a:pPr>
             <a:r>
               <a:rPr lang="en-US" sz="1300" b="1" dirty="0">
                 <a:solidFill>
@@ -15992,12 +15865,6 @@
               </a:rPr>
               <a:t>every pixel</a:t>
             </a:r>
-            <a:pPr indent="0" marL="0">
-              <a:spcAft>
-                <a:spcPts val="200"/>
-              </a:spcAft>
-              <a:buNone/>
-            </a:pPr>
             <a:r>
               <a:rPr lang="en-US" sz="1300" dirty="0">
                 <a:solidFill>
@@ -16054,7 +15921,7 @@
           <a:bodyPr wrap="square" lIns="0" tIns="0" rIns="0" bIns="0" rtlCol="0" anchor="ctr"/>
           <a:lstStyle/>
           <a:p>
-            <a:pPr indent="0" marL="0">
+            <a:pPr marL="0" indent="0">
               <a:buNone/>
             </a:pPr>
             <a:r>
@@ -16093,7 +15960,7 @@
           <a:bodyPr wrap="square" lIns="0" tIns="0" rIns="0" bIns="0" rtlCol="0" anchor="ctr"/>
           <a:lstStyle/>
           <a:p>
-            <a:pPr indent="0" marL="0">
+            <a:pPr marL="0" indent="0">
               <a:buNone/>
             </a:pPr>
             <a:r>
@@ -16152,7 +16019,7 @@
           <a:bodyPr wrap="square" lIns="0" tIns="0" rIns="0" bIns="0" rtlCol="0" anchor="ctr"/>
           <a:lstStyle/>
           <a:p>
-            <a:pPr indent="0" marL="0">
+            <a:pPr marL="0" indent="0">
               <a:buNone/>
             </a:pPr>
             <a:r>
@@ -16191,7 +16058,7 @@
           <a:bodyPr wrap="square" lIns="0" tIns="0" rIns="0" bIns="0" rtlCol="0" anchor="ctr"/>
           <a:lstStyle/>
           <a:p>
-            <a:pPr indent="0" marL="0">
+            <a:pPr marL="0" indent="0">
               <a:buNone/>
             </a:pPr>
             <a:r>
@@ -16250,7 +16117,7 @@
           <a:bodyPr wrap="square" lIns="0" tIns="0" rIns="0" bIns="0" rtlCol="0" anchor="ctr"/>
           <a:lstStyle/>
           <a:p>
-            <a:pPr indent="0" marL="0">
+            <a:pPr marL="0" indent="0">
               <a:buNone/>
             </a:pPr>
             <a:r>
@@ -16289,7 +16156,7 @@
           <a:bodyPr wrap="square" lIns="0" tIns="0" rIns="0" bIns="0" rtlCol="0" anchor="ctr"/>
           <a:lstStyle/>
           <a:p>
-            <a:pPr indent="0" marL="0">
+            <a:pPr marL="0" indent="0">
               <a:buNone/>
             </a:pPr>
             <a:r>
@@ -16348,7 +16215,7 @@
           <a:bodyPr wrap="square" lIns="0" tIns="0" rIns="0" bIns="0" rtlCol="0" anchor="ctr"/>
           <a:lstStyle/>
           <a:p>
-            <a:pPr indent="0" marL="0">
+            <a:pPr marL="0" indent="0">
               <a:buNone/>
             </a:pPr>
             <a:r>
@@ -16387,7 +16254,7 @@
           <a:bodyPr wrap="square" lIns="0" tIns="0" rIns="0" bIns="0" rtlCol="0" anchor="ctr"/>
           <a:lstStyle/>
           <a:p>
-            <a:pPr indent="0" marL="0">
+            <a:pPr marL="0" indent="0">
               <a:buNone/>
             </a:pPr>
             <a:r>
@@ -16413,7 +16280,7 @@
         </p:nvSpPr>
         <p:spPr>
           <a:xfrm>
-            <a:off x="4617720" y="914400"/>
+            <a:off x="4679418" y="914400"/>
             <a:ext cx="2011680" cy="228600"/>
           </a:xfrm>
           <a:prstGeom prst="rect">
@@ -16426,11 +16293,11 @@
           <a:bodyPr wrap="square" lIns="0" tIns="0" rIns="0" bIns="0" rtlCol="0" anchor="ctr"/>
           <a:lstStyle/>
           <a:p>
-            <a:pPr algn="ctr" indent="0" marL="0">
-              <a:buNone/>
-            </a:pPr>
-            <a:r>
-              <a:rPr lang="en-US" sz="900" b="1" spc="400" kern="0" dirty="0">
+            <a:pPr marL="0" indent="0" algn="ctr">
+              <a:buNone/>
+            </a:pPr>
+            <a:r>
+              <a:rPr lang="en-US" sz="900" b="1" kern="0" spc="400" dirty="0">
                 <a:solidFill>
                   <a:srgbClr val="64748B"/>
                 </a:solidFill>
@@ -16439,6 +16306,104 @@
                 <a:cs typeface="Calibri" pitchFamily="34" charset="-120"/>
               </a:rPr>
               <a:t>IMAGE</a:t>
+            </a:r>
+            <a:endParaRPr lang="en-US" sz="900" dirty="0"/>
+          </a:p>
+        </p:txBody>
+      </p:sp>
+      <p:sp>
+        <p:nvSpPr>
+          <p:cNvPr id="26" name="Text 23"/>
+          <p:cNvSpPr/>
+          <p:nvPr/>
+        </p:nvSpPr>
+        <p:spPr>
+          <a:xfrm>
+            <a:off x="6766560" y="914400"/>
+            <a:ext cx="2011680" cy="228600"/>
+          </a:xfrm>
+          <a:prstGeom prst="rect">
+            <a:avLst/>
+          </a:prstGeom>
+          <a:noFill/>
+          <a:ln/>
+        </p:spPr>
+        <p:txBody>
+          <a:bodyPr wrap="square" lIns="0" tIns="0" rIns="0" bIns="0" rtlCol="0" anchor="ctr"/>
+          <a:lstStyle/>
+          <a:p>
+            <a:pPr marL="0" indent="0" algn="ctr">
+              <a:buNone/>
+            </a:pPr>
+            <a:r>
+              <a:rPr lang="en-US" sz="900" b="1" kern="0" spc="400" dirty="0">
+                <a:solidFill>
+                  <a:srgbClr val="64748B"/>
+                </a:solidFill>
+                <a:latin typeface="Calibri" pitchFamily="34" charset="0"/>
+                <a:ea typeface="Calibri" pitchFamily="34" charset="-122"/>
+                <a:cs typeface="Calibri" pitchFamily="34" charset="-120"/>
+              </a:rPr>
+              <a:t>MASK</a:t>
+            </a:r>
+            <a:endParaRPr lang="en-US" sz="900" dirty="0"/>
+          </a:p>
+        </p:txBody>
+      </p:sp>
+      <p:sp>
+        <p:nvSpPr>
+          <p:cNvPr id="28" name="Shape 24"/>
+          <p:cNvSpPr/>
+          <p:nvPr/>
+        </p:nvSpPr>
+        <p:spPr>
+          <a:xfrm rot="5400000">
+            <a:off x="6647688" y="1874520"/>
+            <a:ext cx="146304" cy="128016"/>
+          </a:xfrm>
+          <a:prstGeom prst="line">
+            <a:avLst/>
+          </a:prstGeom>
+          <a:solidFill>
+            <a:srgbClr val="0D9488"/>
+          </a:solidFill>
+          <a:ln/>
+        </p:spPr>
+      </p:sp>
+      <p:sp>
+        <p:nvSpPr>
+          <p:cNvPr id="29" name="Text 25"/>
+          <p:cNvSpPr/>
+          <p:nvPr/>
+        </p:nvSpPr>
+        <p:spPr>
+          <a:xfrm>
+            <a:off x="4617720" y="2834640"/>
+            <a:ext cx="4160520" cy="228600"/>
+          </a:xfrm>
+          <a:prstGeom prst="rect">
+            <a:avLst/>
+          </a:prstGeom>
+          <a:noFill/>
+          <a:ln/>
+        </p:spPr>
+        <p:txBody>
+          <a:bodyPr wrap="square" lIns="0" tIns="0" rIns="0" bIns="0" rtlCol="0" anchor="ctr"/>
+          <a:lstStyle/>
+          <a:p>
+            <a:pPr marL="0" indent="0" algn="ctr">
+              <a:buNone/>
+            </a:pPr>
+            <a:r>
+              <a:rPr lang="en-US" sz="900" b="1" kern="0" spc="400" dirty="0">
+                <a:solidFill>
+                  <a:srgbClr val="64748B"/>
+                </a:solidFill>
+                <a:latin typeface="Calibri" pitchFamily="34" charset="0"/>
+                <a:ea typeface="Calibri" pitchFamily="34" charset="-122"/>
+                <a:cs typeface="Calibri" pitchFamily="34" charset="-120"/>
+              </a:rPr>
+              <a:t>OVERLAY</a:t>
             </a:r>
             <a:endParaRPr lang="en-US" sz="900" dirty="0"/>
           </a:p>
@@ -16446,165 +16411,88 @@
       </p:sp>
       <p:pic>
         <p:nvPicPr>
-          <p:cNvPr id="25" name="Image 0" descr="/sessions/cool-beautiful-archimedes/mnt/outputs/session11_images/dbc.jpg">    </p:cNvPr>
+          <p:cNvPr id="34" name="Picture 33">
+            <a:extLst>
+              <a:ext uri="{FF2B5EF4-FFF2-40B4-BE49-F238E27FC236}">
+                <a16:creationId xmlns:a16="http://schemas.microsoft.com/office/drawing/2014/main" id="{D01EC8AD-03E0-894A-4F7B-D511CF7534A2}"/>
+              </a:ext>
+            </a:extLst>
+          </p:cNvPr>
           <p:cNvPicPr>
             <a:picLocks noChangeAspect="1"/>
           </p:cNvPicPr>
           <p:nvPr/>
         </p:nvPicPr>
         <p:blipFill>
-          <a:blip r:embed="rId1"/>
-          <a:srcRect l="0" r="0" t="0" b="0"/>
-          <a:stretch/>
+          <a:blip r:embed="rId3"/>
+          <a:stretch>
+            <a:fillRect/>
+          </a:stretch>
         </p:blipFill>
         <p:spPr>
           <a:xfrm>
-            <a:off x="4617720" y="1161288"/>
-            <a:ext cx="2011680" cy="1554480"/>
+            <a:off x="4789943" y="1233058"/>
+            <a:ext cx="1840970" cy="1217534"/>
           </a:xfrm>
           <a:prstGeom prst="rect">
             <a:avLst/>
           </a:prstGeom>
         </p:spPr>
       </p:pic>
-      <p:sp>
-        <p:nvSpPr>
-          <p:cNvPr id="26" name="Text 23"/>
-          <p:cNvSpPr/>
-          <p:nvPr/>
-        </p:nvSpPr>
-        <p:spPr>
-          <a:xfrm>
-            <a:off x="6766560" y="914400"/>
-            <a:ext cx="2011680" cy="228600"/>
-          </a:xfrm>
-          <a:prstGeom prst="rect">
-            <a:avLst/>
-          </a:prstGeom>
-          <a:noFill/>
-          <a:ln/>
-        </p:spPr>
-        <p:txBody>
-          <a:bodyPr wrap="square" lIns="0" tIns="0" rIns="0" bIns="0" rtlCol="0" anchor="ctr"/>
-          <a:lstStyle/>
-          <a:p>
-            <a:pPr algn="ctr" indent="0" marL="0">
-              <a:buNone/>
-            </a:pPr>
-            <a:r>
-              <a:rPr lang="en-US" sz="900" b="1" spc="400" kern="0" dirty="0">
-                <a:solidFill>
-                  <a:srgbClr val="64748B"/>
-                </a:solidFill>
-                <a:latin typeface="Calibri" pitchFamily="34" charset="0"/>
-                <a:ea typeface="Calibri" pitchFamily="34" charset="-122"/>
-                <a:cs typeface="Calibri" pitchFamily="34" charset="-120"/>
-              </a:rPr>
-              <a:t>MASK</a:t>
-            </a:r>
-            <a:endParaRPr lang="en-US" sz="900" dirty="0"/>
-          </a:p>
-        </p:txBody>
-      </p:sp>
       <p:pic>
         <p:nvPicPr>
-          <p:cNvPr id="27" name="Image 1" descr="/sessions/cool-beautiful-archimedes/mnt/outputs/session11_images/dbc_semantic.png">    </p:cNvPr>
+          <p:cNvPr id="36" name="Picture 35">
+            <a:extLst>
+              <a:ext uri="{FF2B5EF4-FFF2-40B4-BE49-F238E27FC236}">
+                <a16:creationId xmlns:a16="http://schemas.microsoft.com/office/drawing/2014/main" id="{01F392B1-1918-626E-BE21-20E4648A0380}"/>
+              </a:ext>
+            </a:extLst>
+          </p:cNvPr>
           <p:cNvPicPr>
             <a:picLocks noChangeAspect="1"/>
           </p:cNvPicPr>
           <p:nvPr/>
         </p:nvPicPr>
         <p:blipFill>
-          <a:blip r:embed="rId2"/>
-          <a:srcRect l="0" r="0" t="0" b="0"/>
-          <a:stretch/>
+          <a:blip r:embed="rId4"/>
+          <a:stretch>
+            <a:fillRect/>
+          </a:stretch>
         </p:blipFill>
         <p:spPr>
           <a:xfrm>
-            <a:off x="6766560" y="1161288"/>
-            <a:ext cx="2011680" cy="1554480"/>
+            <a:off x="6855356" y="1250608"/>
+            <a:ext cx="1840969" cy="1199984"/>
           </a:xfrm>
           <a:prstGeom prst="rect">
             <a:avLst/>
           </a:prstGeom>
         </p:spPr>
       </p:pic>
-      <p:sp>
-        <p:nvSpPr>
-          <p:cNvPr id="28" name="Shape 24"/>
-          <p:cNvSpPr/>
-          <p:nvPr/>
-        </p:nvSpPr>
-        <p:spPr>
-          <a:xfrm rot="5400000">
-            <a:off x="6647688" y="1874520"/>
-            <a:ext cx="146304" cy="128016"/>
-          </a:xfrm>
-          <a:prstGeom prst="rightTriangle">
-            <a:avLst/>
-          </a:prstGeom>
-          <a:solidFill>
-            <a:srgbClr val="0D9488"/>
-          </a:solidFill>
-          <a:ln/>
-        </p:spPr>
-      </p:sp>
-      <p:sp>
-        <p:nvSpPr>
-          <p:cNvPr id="29" name="Text 25"/>
-          <p:cNvSpPr/>
-          <p:nvPr/>
-        </p:nvSpPr>
-        <p:spPr>
-          <a:xfrm>
-            <a:off x="4617720" y="2834640"/>
-            <a:ext cx="4160520" cy="228600"/>
-          </a:xfrm>
-          <a:prstGeom prst="rect">
-            <a:avLst/>
-          </a:prstGeom>
-          <a:noFill/>
-          <a:ln/>
-        </p:spPr>
-        <p:txBody>
-          <a:bodyPr wrap="square" lIns="0" tIns="0" rIns="0" bIns="0" rtlCol="0" anchor="ctr"/>
-          <a:lstStyle/>
-          <a:p>
-            <a:pPr algn="ctr" indent="0" marL="0">
-              <a:buNone/>
-            </a:pPr>
-            <a:r>
-              <a:rPr lang="en-US" sz="900" b="1" spc="400" kern="0" dirty="0">
-                <a:solidFill>
-                  <a:srgbClr val="64748B"/>
-                </a:solidFill>
-                <a:latin typeface="Calibri" pitchFamily="34" charset="0"/>
-                <a:ea typeface="Calibri" pitchFamily="34" charset="-122"/>
-                <a:cs typeface="Calibri" pitchFamily="34" charset="-120"/>
-              </a:rPr>
-              <a:t>OVERLAY</a:t>
-            </a:r>
-            <a:endParaRPr lang="en-US" sz="900" dirty="0"/>
-          </a:p>
-        </p:txBody>
-      </p:sp>
       <p:pic>
         <p:nvPicPr>
-          <p:cNvPr id="30" name="Image 2" descr="/sessions/cool-beautiful-archimedes/mnt/outputs/session11_images/dbc_semantic_overlay.jpg">    </p:cNvPr>
+          <p:cNvPr id="38" name="Picture 37">
+            <a:extLst>
+              <a:ext uri="{FF2B5EF4-FFF2-40B4-BE49-F238E27FC236}">
+                <a16:creationId xmlns:a16="http://schemas.microsoft.com/office/drawing/2014/main" id="{985AEA67-274E-3802-C9F5-550F4F674A92}"/>
+              </a:ext>
+            </a:extLst>
+          </p:cNvPr>
           <p:cNvPicPr>
             <a:picLocks noChangeAspect="1"/>
           </p:cNvPicPr>
           <p:nvPr/>
         </p:nvPicPr>
         <p:blipFill>
-          <a:blip r:embed="rId3"/>
-          <a:srcRect l="0" r="0" t="0" b="0"/>
-          <a:stretch/>
+          <a:blip r:embed="rId5"/>
+          <a:stretch>
+            <a:fillRect/>
+          </a:stretch>
         </p:blipFill>
         <p:spPr>
           <a:xfrm>
-            <a:off x="4617720" y="3090672"/>
-            <a:ext cx="4160520" cy="1481328"/>
+            <a:off x="5607267" y="3100613"/>
+            <a:ext cx="2227146" cy="1471387"/>
           </a:xfrm>
           <a:prstGeom prst="rect">
             <a:avLst/>
@@ -16627,6 +16515,7 @@
         <a:solidFill>
           <a:srgbClr val="F8FAFC"/>
         </a:solidFill>
+        <a:effectLst/>
       </p:bgPr>
     </p:bg>
     <p:spTree>
@@ -16704,7 +16593,7 @@
           <a:bodyPr wrap="square" lIns="0" tIns="0" rIns="0" bIns="0" rtlCol="0" anchor="ctr"/>
           <a:lstStyle/>
           <a:p>
-            <a:pPr indent="0" marL="0">
+            <a:pPr marL="0" indent="0">
               <a:buNone/>
             </a:pPr>
             <a:r>
@@ -16743,11 +16632,11 @@
           <a:bodyPr wrap="square" lIns="0" tIns="0" rIns="0" bIns="0" rtlCol="0" anchor="ctr"/>
           <a:lstStyle/>
           <a:p>
-            <a:pPr algn="r" indent="0" marL="0">
-              <a:buNone/>
-            </a:pPr>
-            <a:r>
-              <a:rPr lang="en-US" sz="900" b="1" spc="400" kern="0" dirty="0">
+            <a:pPr marL="0" indent="0" algn="r">
+              <a:buNone/>
+            </a:pPr>
+            <a:r>
+              <a:rPr lang="en-US" sz="900" b="1" kern="0" spc="400" dirty="0">
                 <a:solidFill>
                   <a:srgbClr val="BFDBFE"/>
                 </a:solidFill>
@@ -16802,7 +16691,7 @@
           <a:bodyPr wrap="square" lIns="0" tIns="0" rIns="0" bIns="0" rtlCol="0" anchor="ctr"/>
           <a:lstStyle/>
           <a:p>
-            <a:pPr indent="0" marL="0">
+            <a:pPr marL="0" indent="0">
               <a:buNone/>
             </a:pPr>
             <a:r>
@@ -16844,7 +16733,7 @@
             <a:prstDash val="solid"/>
           </a:ln>
           <a:effectLst>
-            <a:outerShdw sx="100000" sy="100000" kx="0" ky="0" algn="bl" rotWithShape="0" blurRad="101600" dist="25400" dir="5400000">
+            <a:outerShdw blurRad="101600" dist="25400" dir="5400000" algn="bl" rotWithShape="0">
               <a:srgbClr val="000000">
                 <a:alpha val="10000"/>
               </a:srgbClr>
@@ -16893,7 +16782,7 @@
           <a:bodyPr wrap="square" lIns="0" tIns="0" rIns="0" bIns="0" rtlCol="0" anchor="ctr"/>
           <a:lstStyle/>
           <a:p>
-            <a:pPr indent="0" marL="0">
+            <a:pPr marL="0" indent="0">
               <a:buNone/>
             </a:pPr>
             <a:r>
@@ -16932,7 +16821,7 @@
           <a:bodyPr wrap="square" lIns="0" tIns="0" rIns="0" bIns="0" rtlCol="0" anchor="ctr"/>
           <a:lstStyle/>
           <a:p>
-            <a:pPr indent="0" marL="0">
+            <a:pPr marL="0" indent="0">
               <a:buNone/>
             </a:pPr>
             <a:r>
@@ -16950,29 +16839,6 @@
           </a:p>
         </p:txBody>
       </p:sp>
-      <p:pic>
-        <p:nvPicPr>
-          <p:cNvPr id="12" name="Image 0" descr="/sessions/cool-beautiful-archimedes/mnt/outputs/session11_images/street_semantic_overlay.jpg">    </p:cNvPr>
-          <p:cNvPicPr>
-            <a:picLocks noChangeAspect="1"/>
-          </p:cNvPicPr>
-          <p:nvPr/>
-        </p:nvPicPr>
-        <p:blipFill>
-          <a:blip r:embed="rId1"/>
-          <a:srcRect l="0" r="0" t="0" b="0"/>
-          <a:stretch/>
-        </p:blipFill>
-        <p:spPr>
-          <a:xfrm>
-            <a:off x="521208" y="1554480"/>
-            <a:ext cx="2514600" cy="1371600"/>
-          </a:xfrm>
-          <a:prstGeom prst="rect">
-            <a:avLst/>
-          </a:prstGeom>
-        </p:spPr>
-      </p:pic>
       <p:sp>
         <p:nvSpPr>
           <p:cNvPr id="13" name="Text 10"/>
@@ -17010,7 +16876,29 @@
                 <a:ea typeface="Calibri" pitchFamily="34" charset="-122"/>
                 <a:cs typeface="Calibri" pitchFamily="34" charset="-120"/>
               </a:rPr>
-              <a:t>All cars share one colour</a:t>
+              <a:t>All </a:t>
+            </a:r>
+            <a:r>
+              <a:rPr lang="en-US" sz="1050" dirty="0" err="1">
+                <a:solidFill>
+                  <a:srgbClr val="374151"/>
+                </a:solidFill>
+                <a:latin typeface="Calibri" pitchFamily="34" charset="0"/>
+                <a:ea typeface="Calibri" pitchFamily="34" charset="-122"/>
+                <a:cs typeface="Calibri" pitchFamily="34" charset="-120"/>
+              </a:rPr>
+              <a:t>sheeps</a:t>
+            </a:r>
+            <a:r>
+              <a:rPr lang="en-US" sz="1050" dirty="0">
+                <a:solidFill>
+                  <a:srgbClr val="374151"/>
+                </a:solidFill>
+                <a:latin typeface="Calibri" pitchFamily="34" charset="0"/>
+                <a:ea typeface="Calibri" pitchFamily="34" charset="-122"/>
+                <a:cs typeface="Calibri" pitchFamily="34" charset="-120"/>
+              </a:rPr>
+              <a:t> share one colour</a:t>
             </a:r>
             <a:endParaRPr lang="en-US" sz="1050" dirty="0"/>
           </a:p>
@@ -17103,7 +16991,7 @@
             <a:prstDash val="solid"/>
           </a:ln>
           <a:effectLst>
-            <a:outerShdw sx="100000" sy="100000" kx="0" ky="0" algn="bl" rotWithShape="0" blurRad="101600" dist="25400" dir="5400000">
+            <a:outerShdw blurRad="101600" dist="25400" dir="5400000" algn="bl" rotWithShape="0">
               <a:srgbClr val="000000">
                 <a:alpha val="10000"/>
               </a:srgbClr>
@@ -17152,7 +17040,7 @@
           <a:bodyPr wrap="square" lIns="0" tIns="0" rIns="0" bIns="0" rtlCol="0" anchor="ctr"/>
           <a:lstStyle/>
           <a:p>
-            <a:pPr indent="0" marL="0">
+            <a:pPr marL="0" indent="0">
               <a:buNone/>
             </a:pPr>
             <a:r>
@@ -17191,7 +17079,7 @@
           <a:bodyPr wrap="square" lIns="0" tIns="0" rIns="0" bIns="0" rtlCol="0" anchor="ctr"/>
           <a:lstStyle/>
           <a:p>
-            <a:pPr indent="0" marL="0">
+            <a:pPr marL="0" indent="0">
               <a:buNone/>
             </a:pPr>
             <a:r>
@@ -17209,29 +17097,6 @@
           </a:p>
         </p:txBody>
       </p:sp>
-      <p:pic>
-        <p:nvPicPr>
-          <p:cNvPr id="18" name="Image 1" descr="/sessions/cool-beautiful-archimedes/mnt/outputs/session11_images/street_instance_overlay.jpg">    </p:cNvPr>
-          <p:cNvPicPr>
-            <a:picLocks noChangeAspect="1"/>
-          </p:cNvPicPr>
-          <p:nvPr/>
-        </p:nvPicPr>
-        <p:blipFill>
-          <a:blip r:embed="rId2"/>
-          <a:srcRect l="0" r="0" t="0" b="0"/>
-          <a:stretch/>
-        </p:blipFill>
-        <p:spPr>
-          <a:xfrm>
-            <a:off x="3419856" y="1554480"/>
-            <a:ext cx="2514600" cy="1371600"/>
-          </a:xfrm>
-          <a:prstGeom prst="rect">
-            <a:avLst/>
-          </a:prstGeom>
-        </p:spPr>
-      </p:pic>
       <p:sp>
         <p:nvSpPr>
           <p:cNvPr id="19" name="Text 15"/>
@@ -17269,7 +17134,7 @@
                 <a:ea typeface="Calibri" pitchFamily="34" charset="-122"/>
                 <a:cs typeface="Calibri" pitchFamily="34" charset="-120"/>
               </a:rPr>
-              <a:t>Each car gets its own mask</a:t>
+              <a:t>Each sheep gets its own mask</a:t>
             </a:r>
             <a:endParaRPr lang="en-US" sz="1050" dirty="0"/>
           </a:p>
@@ -17362,7 +17227,7 @@
             <a:prstDash val="solid"/>
           </a:ln>
           <a:effectLst>
-            <a:outerShdw sx="100000" sy="100000" kx="0" ky="0" algn="bl" rotWithShape="0" blurRad="101600" dist="25400" dir="5400000">
+            <a:outerShdw blurRad="101600" dist="25400" dir="5400000" algn="bl" rotWithShape="0">
               <a:srgbClr val="000000">
                 <a:alpha val="10000"/>
               </a:srgbClr>
@@ -17411,7 +17276,7 @@
           <a:bodyPr wrap="square" lIns="0" tIns="0" rIns="0" bIns="0" rtlCol="0" anchor="ctr"/>
           <a:lstStyle/>
           <a:p>
-            <a:pPr indent="0" marL="0">
+            <a:pPr marL="0" indent="0">
               <a:buNone/>
             </a:pPr>
             <a:r>
@@ -17450,7 +17315,7 @@
           <a:bodyPr wrap="square" lIns="0" tIns="0" rIns="0" bIns="0" rtlCol="0" anchor="ctr"/>
           <a:lstStyle/>
           <a:p>
-            <a:pPr indent="0" marL="0">
+            <a:pPr marL="0" indent="0">
               <a:buNone/>
             </a:pPr>
             <a:r>
@@ -17470,7 +17335,7 @@
       </p:sp>
       <p:pic>
         <p:nvPicPr>
-          <p:cNvPr id="24" name="Image 2" descr="/sessions/cool-beautiful-archimedes/mnt/outputs/session11_images/street_semantic_overlay.jpg">    </p:cNvPr>
+          <p:cNvPr id="24" name="Image 2" descr="/sessions/cool-beautiful-archimedes/mnt/outputs/session11_images/street_semantic_overlay.jpg"/>
           <p:cNvPicPr>
             <a:picLocks noChangeAspect="1"/>
           </p:cNvPicPr>
@@ -17478,7 +17343,7 @@
         </p:nvPicPr>
         <p:blipFill>
           <a:blip r:embed="rId3"/>
-          <a:srcRect l="0" r="0" t="0" b="0"/>
+          <a:srcRect/>
           <a:stretch/>
         </p:blipFill>
         <p:spPr>
@@ -17618,7 +17483,7 @@
           <a:bodyPr wrap="square" lIns="0" tIns="0" rIns="0" bIns="0" rtlCol="0" anchor="ctr"/>
           <a:lstStyle/>
           <a:p>
-            <a:pPr indent="0" marL="0">
+            <a:pPr marL="0" indent="0">
               <a:buNone/>
             </a:pPr>
             <a:r>
@@ -17636,6 +17501,66 @@
           </a:p>
         </p:txBody>
       </p:sp>
+      <p:pic>
+        <p:nvPicPr>
+          <p:cNvPr id="28" name="Picture 27">
+            <a:extLst>
+              <a:ext uri="{FF2B5EF4-FFF2-40B4-BE49-F238E27FC236}">
+                <a16:creationId xmlns:a16="http://schemas.microsoft.com/office/drawing/2014/main" id="{5D488A2D-DEDB-12CB-04F3-B2BEFC973850}"/>
+              </a:ext>
+            </a:extLst>
+          </p:cNvPr>
+          <p:cNvPicPr>
+            <a:picLocks noChangeAspect="1"/>
+          </p:cNvPicPr>
+          <p:nvPr/>
+        </p:nvPicPr>
+        <p:blipFill>
+          <a:blip r:embed="rId4"/>
+          <a:stretch>
+            <a:fillRect/>
+          </a:stretch>
+        </p:blipFill>
+        <p:spPr>
+          <a:xfrm>
+            <a:off x="488785" y="1845853"/>
+            <a:ext cx="2579446" cy="988787"/>
+          </a:xfrm>
+          <a:prstGeom prst="rect">
+            <a:avLst/>
+          </a:prstGeom>
+        </p:spPr>
+      </p:pic>
+      <p:pic>
+        <p:nvPicPr>
+          <p:cNvPr id="30" name="Picture 29">
+            <a:extLst>
+              <a:ext uri="{FF2B5EF4-FFF2-40B4-BE49-F238E27FC236}">
+                <a16:creationId xmlns:a16="http://schemas.microsoft.com/office/drawing/2014/main" id="{79BD931D-B730-DA68-7945-4CDF6F4B1F9F}"/>
+              </a:ext>
+            </a:extLst>
+          </p:cNvPr>
+          <p:cNvPicPr>
+            <a:picLocks noChangeAspect="1"/>
+          </p:cNvPicPr>
+          <p:nvPr/>
+        </p:nvPicPr>
+        <p:blipFill>
+          <a:blip r:embed="rId5"/>
+          <a:stretch>
+            <a:fillRect/>
+          </a:stretch>
+        </p:blipFill>
+        <p:spPr>
+          <a:xfrm>
+            <a:off x="3419856" y="1845853"/>
+            <a:ext cx="2572279" cy="988787"/>
+          </a:xfrm>
+          <a:prstGeom prst="rect">
+            <a:avLst/>
+          </a:prstGeom>
+        </p:spPr>
+      </p:pic>
     </p:spTree>
   </p:cSld>
   <p:clrMapOvr>
@@ -17652,6 +17577,7 @@
         <a:solidFill>
           <a:srgbClr val="F8FAFC"/>
         </a:solidFill>
+        <a:effectLst/>
       </p:bgPr>
     </p:bg>
     <p:spTree>
@@ -17729,7 +17655,7 @@
           <a:bodyPr wrap="square" lIns="0" tIns="0" rIns="0" bIns="0" rtlCol="0" anchor="ctr"/>
           <a:lstStyle/>
           <a:p>
-            <a:pPr indent="0" marL="0">
+            <a:pPr marL="0" indent="0">
               <a:buNone/>
             </a:pPr>
             <a:r>
@@ -17768,11 +17694,11 @@
           <a:bodyPr wrap="square" lIns="0" tIns="0" rIns="0" bIns="0" rtlCol="0" anchor="ctr"/>
           <a:lstStyle/>
           <a:p>
-            <a:pPr algn="r" indent="0" marL="0">
-              <a:buNone/>
-            </a:pPr>
-            <a:r>
-              <a:rPr lang="en-US" sz="900" b="1" spc="400" kern="0" dirty="0">
+            <a:pPr marL="0" indent="0" algn="r">
+              <a:buNone/>
+            </a:pPr>
+            <a:r>
+              <a:rPr lang="en-US" sz="900" b="1" kern="0" spc="400" dirty="0">
                 <a:solidFill>
                   <a:srgbClr val="BFDBFE"/>
                 </a:solidFill>
@@ -17827,7 +17753,7 @@
           <a:bodyPr wrap="square" lIns="0" tIns="0" rIns="0" bIns="0" rtlCol="0" anchor="ctr"/>
           <a:lstStyle/>
           <a:p>
-            <a:pPr indent="0" marL="0">
+            <a:pPr marL="0" indent="0">
               <a:buNone/>
             </a:pPr>
             <a:r>
@@ -17869,7 +17795,7 @@
             <a:prstDash val="solid"/>
           </a:ln>
           <a:effectLst>
-            <a:outerShdw sx="100000" sy="100000" kx="0" ky="0" algn="bl" rotWithShape="0" blurRad="101600" dist="25400" dir="5400000">
+            <a:outerShdw blurRad="101600" dist="25400" dir="5400000" algn="bl" rotWithShape="0">
               <a:srgbClr val="000000">
                 <a:alpha val="10000"/>
               </a:srgbClr>
@@ -17919,14 +17845,14 @@
       </p:sp>
       <p:pic>
         <p:nvPicPr>
-          <p:cNvPr id="11" name="Image 0" descr="preencoded.png">    </p:cNvPr>
+          <p:cNvPr id="11" name="Image 0" descr="preencoded.png"/>
           <p:cNvPicPr>
             <a:picLocks noChangeAspect="1"/>
           </p:cNvPicPr>
           <p:nvPr/>
         </p:nvPicPr>
         <p:blipFill>
-          <a:blip r:embed="rId1"/>
+          <a:blip r:embed="rId3"/>
           <a:stretch>
             <a:fillRect/>
           </a:stretch>
@@ -17962,7 +17888,7 @@
           <a:bodyPr wrap="square" lIns="0" tIns="0" rIns="0" bIns="0" rtlCol="0" anchor="ctr"/>
           <a:lstStyle/>
           <a:p>
-            <a:pPr indent="0" marL="0">
+            <a:pPr marL="0" indent="0">
               <a:buNone/>
             </a:pPr>
             <a:r>
@@ -18001,7 +17927,7 @@
           <a:bodyPr wrap="square" lIns="0" tIns="0" rIns="0" bIns="0" rtlCol="0" anchor="t"/>
           <a:lstStyle/>
           <a:p>
-            <a:pPr indent="0" marL="0">
+            <a:pPr marL="0" indent="0">
               <a:buNone/>
             </a:pPr>
             <a:r>
@@ -18043,7 +17969,7 @@
             <a:prstDash val="solid"/>
           </a:ln>
           <a:effectLst>
-            <a:outerShdw sx="100000" sy="100000" kx="0" ky="0" algn="bl" rotWithShape="0" blurRad="101600" dist="25400" dir="5400000">
+            <a:outerShdw blurRad="101600" dist="25400" dir="5400000" algn="bl" rotWithShape="0">
               <a:srgbClr val="000000">
                 <a:alpha val="10000"/>
               </a:srgbClr>
@@ -18093,14 +18019,14 @@
       </p:sp>
       <p:pic>
         <p:nvPicPr>
-          <p:cNvPr id="17" name="Image 1" descr="preencoded.png">    </p:cNvPr>
+          <p:cNvPr id="17" name="Image 1" descr="preencoded.png"/>
           <p:cNvPicPr>
             <a:picLocks noChangeAspect="1"/>
           </p:cNvPicPr>
           <p:nvPr/>
         </p:nvPicPr>
         <p:blipFill>
-          <a:blip r:embed="rId2"/>
+          <a:blip r:embed="rId4"/>
           <a:stretch>
             <a:fillRect/>
           </a:stretch>
@@ -18136,7 +18062,7 @@
           <a:bodyPr wrap="square" lIns="0" tIns="0" rIns="0" bIns="0" rtlCol="0" anchor="ctr"/>
           <a:lstStyle/>
           <a:p>
-            <a:pPr indent="0" marL="0">
+            <a:pPr marL="0" indent="0">
               <a:buNone/>
             </a:pPr>
             <a:r>
@@ -18175,7 +18101,7 @@
           <a:bodyPr wrap="square" lIns="0" tIns="0" rIns="0" bIns="0" rtlCol="0" anchor="t"/>
           <a:lstStyle/>
           <a:p>
-            <a:pPr indent="0" marL="0">
+            <a:pPr marL="0" indent="0">
               <a:buNone/>
             </a:pPr>
             <a:r>
@@ -18217,7 +18143,7 @@
             <a:prstDash val="solid"/>
           </a:ln>
           <a:effectLst>
-            <a:outerShdw sx="100000" sy="100000" kx="0" ky="0" algn="bl" rotWithShape="0" blurRad="101600" dist="25400" dir="5400000">
+            <a:outerShdw blurRad="101600" dist="25400" dir="5400000" algn="bl" rotWithShape="0">
               <a:srgbClr val="000000">
                 <a:alpha val="10000"/>
               </a:srgbClr>
@@ -18267,14 +18193,14 @@
       </p:sp>
       <p:pic>
         <p:nvPicPr>
-          <p:cNvPr id="23" name="Image 2" descr="preencoded.png">    </p:cNvPr>
+          <p:cNvPr id="23" name="Image 2" descr="preencoded.png"/>
           <p:cNvPicPr>
             <a:picLocks noChangeAspect="1"/>
           </p:cNvPicPr>
           <p:nvPr/>
         </p:nvPicPr>
         <p:blipFill>
-          <a:blip r:embed="rId3"/>
+          <a:blip r:embed="rId5"/>
           <a:stretch>
             <a:fillRect/>
           </a:stretch>
@@ -18310,7 +18236,7 @@
           <a:bodyPr wrap="square" lIns="0" tIns="0" rIns="0" bIns="0" rtlCol="0" anchor="ctr"/>
           <a:lstStyle/>
           <a:p>
-            <a:pPr indent="0" marL="0">
+            <a:pPr marL="0" indent="0">
               <a:buNone/>
             </a:pPr>
             <a:r>
@@ -18349,7 +18275,7 @@
           <a:bodyPr wrap="square" lIns="0" tIns="0" rIns="0" bIns="0" rtlCol="0" anchor="t"/>
           <a:lstStyle/>
           <a:p>
-            <a:pPr indent="0" marL="0">
+            <a:pPr marL="0" indent="0">
               <a:buNone/>
             </a:pPr>
             <a:r>
@@ -18391,7 +18317,7 @@
             <a:prstDash val="solid"/>
           </a:ln>
           <a:effectLst>
-            <a:outerShdw sx="100000" sy="100000" kx="0" ky="0" algn="bl" rotWithShape="0" blurRad="101600" dist="25400" dir="5400000">
+            <a:outerShdw blurRad="101600" dist="25400" dir="5400000" algn="bl" rotWithShape="0">
               <a:srgbClr val="000000">
                 <a:alpha val="10000"/>
               </a:srgbClr>
@@ -18441,14 +18367,14 @@
       </p:sp>
       <p:pic>
         <p:nvPicPr>
-          <p:cNvPr id="29" name="Image 3" descr="preencoded.png">    </p:cNvPr>
+          <p:cNvPr id="29" name="Image 3" descr="preencoded.png"/>
           <p:cNvPicPr>
             <a:picLocks noChangeAspect="1"/>
           </p:cNvPicPr>
           <p:nvPr/>
         </p:nvPicPr>
         <p:blipFill>
-          <a:blip r:embed="rId4"/>
+          <a:blip r:embed="rId6"/>
           <a:stretch>
             <a:fillRect/>
           </a:stretch>
@@ -18484,7 +18410,7 @@
           <a:bodyPr wrap="square" lIns="0" tIns="0" rIns="0" bIns="0" rtlCol="0" anchor="ctr"/>
           <a:lstStyle/>
           <a:p>
-            <a:pPr indent="0" marL="0">
+            <a:pPr marL="0" indent="0">
               <a:buNone/>
             </a:pPr>
             <a:r>
@@ -18523,7 +18449,7 @@
           <a:bodyPr wrap="square" lIns="0" tIns="0" rIns="0" bIns="0" rtlCol="0" anchor="t"/>
           <a:lstStyle/>
           <a:p>
-            <a:pPr indent="0" marL="0">
+            <a:pPr marL="0" indent="0">
               <a:buNone/>
             </a:pPr>
             <a:r>
@@ -18565,7 +18491,7 @@
             <a:prstDash val="solid"/>
           </a:ln>
           <a:effectLst>
-            <a:outerShdw sx="100000" sy="100000" kx="0" ky="0" algn="bl" rotWithShape="0" blurRad="101600" dist="25400" dir="5400000">
+            <a:outerShdw blurRad="101600" dist="25400" dir="5400000" algn="bl" rotWithShape="0">
               <a:srgbClr val="000000">
                 <a:alpha val="10000"/>
               </a:srgbClr>
@@ -18615,14 +18541,14 @@
       </p:sp>
       <p:pic>
         <p:nvPicPr>
-          <p:cNvPr id="35" name="Image 4" descr="preencoded.png">    </p:cNvPr>
+          <p:cNvPr id="35" name="Image 4" descr="preencoded.png"/>
           <p:cNvPicPr>
             <a:picLocks noChangeAspect="1"/>
           </p:cNvPicPr>
           <p:nvPr/>
         </p:nvPicPr>
         <p:blipFill>
-          <a:blip r:embed="rId5"/>
+          <a:blip r:embed="rId7"/>
           <a:stretch>
             <a:fillRect/>
           </a:stretch>
@@ -18658,7 +18584,7 @@
           <a:bodyPr wrap="square" lIns="0" tIns="0" rIns="0" bIns="0" rtlCol="0" anchor="ctr"/>
           <a:lstStyle/>
           <a:p>
-            <a:pPr indent="0" marL="0">
+            <a:pPr marL="0" indent="0">
               <a:buNone/>
             </a:pPr>
             <a:r>
@@ -18697,7 +18623,7 @@
           <a:bodyPr wrap="square" lIns="0" tIns="0" rIns="0" bIns="0" rtlCol="0" anchor="t"/>
           <a:lstStyle/>
           <a:p>
-            <a:pPr indent="0" marL="0">
+            <a:pPr marL="0" indent="0">
               <a:buNone/>
             </a:pPr>
             <a:r>
@@ -18739,7 +18665,7 @@
             <a:prstDash val="solid"/>
           </a:ln>
           <a:effectLst>
-            <a:outerShdw sx="100000" sy="100000" kx="0" ky="0" algn="bl" rotWithShape="0" blurRad="101600" dist="25400" dir="5400000">
+            <a:outerShdw blurRad="101600" dist="25400" dir="5400000" algn="bl" rotWithShape="0">
               <a:srgbClr val="000000">
                 <a:alpha val="10000"/>
               </a:srgbClr>
@@ -18789,14 +18715,14 @@
       </p:sp>
       <p:pic>
         <p:nvPicPr>
-          <p:cNvPr id="41" name="Image 5" descr="preencoded.png">    </p:cNvPr>
+          <p:cNvPr id="41" name="Image 5" descr="preencoded.png"/>
           <p:cNvPicPr>
             <a:picLocks noChangeAspect="1"/>
           </p:cNvPicPr>
           <p:nvPr/>
         </p:nvPicPr>
         <p:blipFill>
-          <a:blip r:embed="rId6"/>
+          <a:blip r:embed="rId8"/>
           <a:stretch>
             <a:fillRect/>
           </a:stretch>
@@ -18832,7 +18758,7 @@
           <a:bodyPr wrap="square" lIns="0" tIns="0" rIns="0" bIns="0" rtlCol="0" anchor="ctr"/>
           <a:lstStyle/>
           <a:p>
-            <a:pPr indent="0" marL="0">
+            <a:pPr marL="0" indent="0">
               <a:buNone/>
             </a:pPr>
             <a:r>
@@ -18871,7 +18797,7 @@
           <a:bodyPr wrap="square" lIns="0" tIns="0" rIns="0" bIns="0" rtlCol="0" anchor="t"/>
           <a:lstStyle/>
           <a:p>
-            <a:pPr indent="0" marL="0">
+            <a:pPr marL="0" indent="0">
               <a:buNone/>
             </a:pPr>
             <a:r>
@@ -18905,6 +18831,7 @@
         <a:solidFill>
           <a:srgbClr val="081930"/>
         </a:solidFill>
+        <a:effectLst/>
       </p:bgPr>
     </p:bg>
     <p:spTree>
@@ -18962,11 +18889,11 @@
           <a:bodyPr wrap="square" lIns="0" tIns="0" rIns="0" bIns="0" rtlCol="0" anchor="ctr"/>
           <a:lstStyle/>
           <a:p>
-            <a:pPr indent="0" marL="0">
-              <a:buNone/>
-            </a:pPr>
-            <a:r>
-              <a:rPr lang="en-US" sz="1400" b="1" spc="600" kern="0" dirty="0">
+            <a:pPr marL="0" indent="0">
+              <a:buNone/>
+            </a:pPr>
+            <a:r>
+              <a:rPr lang="en-US" sz="1400" b="1" kern="0" spc="600" dirty="0">
                 <a:solidFill>
                   <a:srgbClr val="0D9488"/>
                 </a:solidFill>
@@ -19001,7 +18928,7 @@
           <a:bodyPr wrap="square" lIns="0" tIns="0" rIns="0" bIns="0" rtlCol="0" anchor="ctr"/>
           <a:lstStyle/>
           <a:p>
-            <a:pPr indent="0" marL="0">
+            <a:pPr marL="0" indent="0">
               <a:buNone/>
             </a:pPr>
             <a:r>
@@ -19018,7 +18945,7 @@
             <a:endParaRPr lang="en-US" sz="4600" dirty="0"/>
           </a:p>
           <a:p>
-            <a:pPr indent="0" marL="0">
+            <a:pPr marL="0" indent="0">
               <a:buNone/>
             </a:pPr>
             <a:r>
@@ -19057,7 +18984,7 @@
           <a:bodyPr wrap="square" lIns="0" tIns="0" rIns="0" bIns="0" rtlCol="0" anchor="ctr"/>
           <a:lstStyle/>
           <a:p>
-            <a:pPr indent="0" marL="0">
+            <a:pPr marL="0" indent="0">
               <a:buNone/>
             </a:pPr>
             <a:r>
@@ -19072,71 +18999,78 @@
               <a:t>Per-pixel class labels — FCN &amp; U-Net</a:t>
             </a:r>
             <a:endParaRPr lang="en-US" sz="1600" dirty="0"/>
+          </a:p>
+        </p:txBody>
+      </p:sp>
+      <p:sp>
+        <p:nvSpPr>
+          <p:cNvPr id="7" name="Text 4"/>
+          <p:cNvSpPr/>
+          <p:nvPr/>
+        </p:nvSpPr>
+        <p:spPr>
+          <a:xfrm>
+            <a:off x="6126480" y="3703320"/>
+            <a:ext cx="2651760" cy="274320"/>
+          </a:xfrm>
+          <a:prstGeom prst="rect">
+            <a:avLst/>
+          </a:prstGeom>
+          <a:noFill/>
+          <a:ln/>
+        </p:spPr>
+        <p:txBody>
+          <a:bodyPr wrap="square" lIns="0" tIns="0" rIns="0" bIns="0" rtlCol="0" anchor="ctr"/>
+          <a:lstStyle/>
+          <a:p>
+            <a:pPr marL="0" indent="0" algn="ctr">
+              <a:buNone/>
+            </a:pPr>
+            <a:r>
+              <a:rPr lang="en-US" sz="1000" i="1" dirty="0">
+                <a:solidFill>
+                  <a:srgbClr val="94A3B8"/>
+                </a:solidFill>
+                <a:latin typeface="Calibri" pitchFamily="34" charset="0"/>
+                <a:ea typeface="Calibri" pitchFamily="34" charset="-122"/>
+                <a:cs typeface="Calibri" pitchFamily="34" charset="-120"/>
+              </a:rPr>
+              <a:t>Brain MRI — multi-class semantic mask</a:t>
+            </a:r>
+            <a:endParaRPr lang="en-US" sz="1000" dirty="0"/>
           </a:p>
         </p:txBody>
       </p:sp>
       <p:pic>
         <p:nvPicPr>
-          <p:cNvPr id="6" name="Image 0" descr="/sessions/cool-beautiful-archimedes/mnt/outputs/session11_images/brain_overlay.jpg">    </p:cNvPr>
+          <p:cNvPr id="9" name="Picture 8">
+            <a:extLst>
+              <a:ext uri="{FF2B5EF4-FFF2-40B4-BE49-F238E27FC236}">
+                <a16:creationId xmlns:a16="http://schemas.microsoft.com/office/drawing/2014/main" id="{6888CCD9-5EBF-AFA3-0DD6-446080F14047}"/>
+              </a:ext>
+            </a:extLst>
+          </p:cNvPr>
           <p:cNvPicPr>
             <a:picLocks noChangeAspect="1"/>
           </p:cNvPicPr>
           <p:nvPr/>
         </p:nvPicPr>
         <p:blipFill>
-          <a:blip r:embed="rId1"/>
-          <a:srcRect l="0" r="0" t="0" b="0"/>
-          <a:stretch/>
+          <a:blip r:embed="rId3"/>
+          <a:stretch>
+            <a:fillRect/>
+          </a:stretch>
         </p:blipFill>
         <p:spPr>
           <a:xfrm>
-            <a:off x="6126480" y="1005840"/>
-            <a:ext cx="2651760" cy="2651760"/>
+            <a:off x="6400800" y="1205694"/>
+            <a:ext cx="2082394" cy="2510689"/>
           </a:xfrm>
           <a:prstGeom prst="rect">
             <a:avLst/>
           </a:prstGeom>
         </p:spPr>
       </p:pic>
-      <p:sp>
-        <p:nvSpPr>
-          <p:cNvPr id="7" name="Text 4"/>
-          <p:cNvSpPr/>
-          <p:nvPr/>
-        </p:nvSpPr>
-        <p:spPr>
-          <a:xfrm>
-            <a:off x="6126480" y="3703320"/>
-            <a:ext cx="2651760" cy="274320"/>
-          </a:xfrm>
-          <a:prstGeom prst="rect">
-            <a:avLst/>
-          </a:prstGeom>
-          <a:noFill/>
-          <a:ln/>
-        </p:spPr>
-        <p:txBody>
-          <a:bodyPr wrap="square" lIns="0" tIns="0" rIns="0" bIns="0" rtlCol="0" anchor="ctr"/>
-          <a:lstStyle/>
-          <a:p>
-            <a:pPr algn="ctr" indent="0" marL="0">
-              <a:buNone/>
-            </a:pPr>
-            <a:r>
-              <a:rPr lang="en-US" sz="1000" i="1" dirty="0">
-                <a:solidFill>
-                  <a:srgbClr val="94A3B8"/>
-                </a:solidFill>
-                <a:latin typeface="Calibri" pitchFamily="34" charset="0"/>
-                <a:ea typeface="Calibri" pitchFamily="34" charset="-122"/>
-                <a:cs typeface="Calibri" pitchFamily="34" charset="-120"/>
-              </a:rPr>
-              <a:t>Brain MRI — multi-class semantic mask</a:t>
-            </a:r>
-            <a:endParaRPr lang="en-US" sz="1000" dirty="0"/>
-          </a:p>
-        </p:txBody>
-      </p:sp>
     </p:spTree>
   </p:cSld>
   <p:clrMapOvr>
@@ -19153,6 +19087,7 @@
         <a:solidFill>
           <a:srgbClr val="F8FAFC"/>
         </a:solidFill>
+        <a:effectLst/>
       </p:bgPr>
     </p:bg>
     <p:spTree>
@@ -19230,7 +19165,7 @@
           <a:bodyPr wrap="square" lIns="0" tIns="0" rIns="0" bIns="0" rtlCol="0" anchor="ctr"/>
           <a:lstStyle/>
           <a:p>
-            <a:pPr indent="0" marL="0">
+            <a:pPr marL="0" indent="0">
               <a:buNone/>
             </a:pPr>
             <a:r>
@@ -19269,11 +19204,11 @@
           <a:bodyPr wrap="square" lIns="0" tIns="0" rIns="0" bIns="0" rtlCol="0" anchor="ctr"/>
           <a:lstStyle/>
           <a:p>
-            <a:pPr algn="r" indent="0" marL="0">
-              <a:buNone/>
-            </a:pPr>
-            <a:r>
-              <a:rPr lang="en-US" sz="900" b="1" spc="400" kern="0" dirty="0">
+            <a:pPr marL="0" indent="0" algn="r">
+              <a:buNone/>
+            </a:pPr>
+            <a:r>
+              <a:rPr lang="en-US" sz="900" b="1" kern="0" spc="400" dirty="0">
                 <a:solidFill>
                   <a:srgbClr val="BFDBFE"/>
                 </a:solidFill>
@@ -19328,7 +19263,7 @@
           <a:bodyPr wrap="square" lIns="0" tIns="0" rIns="0" bIns="0" rtlCol="0" anchor="ctr"/>
           <a:lstStyle/>
           <a:p>
-            <a:pPr indent="0" marL="0">
+            <a:pPr marL="0" indent="0">
               <a:buNone/>
             </a:pPr>
             <a:r>
@@ -19370,7 +19305,7 @@
             <a:prstDash val="solid"/>
           </a:ln>
           <a:effectLst>
-            <a:outerShdw sx="100000" sy="100000" kx="0" ky="0" algn="bl" rotWithShape="0" blurRad="101600" dist="25400" dir="5400000">
+            <a:outerShdw blurRad="101600" dist="25400" dir="5400000" algn="bl" rotWithShape="0">
               <a:srgbClr val="000000">
                 <a:alpha val="10000"/>
               </a:srgbClr>
@@ -19419,7 +19354,7 @@
           <a:bodyPr wrap="square" lIns="0" tIns="0" rIns="0" bIns="0" rtlCol="0" anchor="ctr"/>
           <a:lstStyle/>
           <a:p>
-            <a:pPr indent="0" marL="0">
+            <a:pPr marL="0" indent="0">
               <a:buNone/>
             </a:pPr>
             <a:r>
@@ -19483,7 +19418,7 @@
           <a:bodyPr wrap="square" lIns="0" tIns="0" rIns="0" bIns="0" rtlCol="0" anchor="ctr"/>
           <a:lstStyle/>
           <a:p>
-            <a:pPr algn="ctr" indent="0" marL="0">
+            <a:pPr marL="0" indent="0" algn="ctr">
               <a:buNone/>
             </a:pPr>
             <a:r>
@@ -19547,7 +19482,7 @@
           <a:bodyPr wrap="square" lIns="0" tIns="0" rIns="0" bIns="0" rtlCol="0" anchor="ctr"/>
           <a:lstStyle/>
           <a:p>
-            <a:pPr algn="ctr" indent="0" marL="0">
+            <a:pPr marL="0" indent="0" algn="ctr">
               <a:buNone/>
             </a:pPr>
             <a:r>
@@ -19611,7 +19546,7 @@
           <a:bodyPr wrap="square" lIns="0" tIns="0" rIns="0" bIns="0" rtlCol="0" anchor="ctr"/>
           <a:lstStyle/>
           <a:p>
-            <a:pPr algn="ctr" indent="0" marL="0">
+            <a:pPr marL="0" indent="0" algn="ctr">
               <a:buNone/>
             </a:pPr>
             <a:r>
@@ -19675,7 +19610,7 @@
           <a:bodyPr wrap="square" lIns="0" tIns="0" rIns="0" bIns="0" rtlCol="0" anchor="ctr"/>
           <a:lstStyle/>
           <a:p>
-            <a:pPr algn="ctr" indent="0" marL="0">
+            <a:pPr marL="0" indent="0" algn="ctr">
               <a:buNone/>
             </a:pPr>
             <a:r>
@@ -19739,7 +19674,7 @@
           <a:bodyPr wrap="square" lIns="0" tIns="0" rIns="0" bIns="0" rtlCol="0" anchor="ctr"/>
           <a:lstStyle/>
           <a:p>
-            <a:pPr algn="ctr" indent="0" marL="0">
+            <a:pPr marL="0" indent="0" algn="ctr">
               <a:buNone/>
             </a:pPr>
             <a:r>
@@ -19803,7 +19738,7 @@
           <a:bodyPr wrap="square" lIns="0" tIns="0" rIns="0" bIns="0" rtlCol="0" anchor="ctr"/>
           <a:lstStyle/>
           <a:p>
-            <a:pPr algn="ctr" indent="0" marL="0">
+            <a:pPr marL="0" indent="0" algn="ctr">
               <a:buNone/>
             </a:pPr>
             <a:r>
@@ -19867,7 +19802,7 @@
           <a:bodyPr wrap="square" lIns="0" tIns="0" rIns="0" bIns="0" rtlCol="0" anchor="ctr"/>
           <a:lstStyle/>
           <a:p>
-            <a:pPr algn="ctr" indent="0" marL="0">
+            <a:pPr marL="0" indent="0" algn="ctr">
               <a:buNone/>
             </a:pPr>
             <a:r>
@@ -19906,7 +19841,7 @@
           <a:bodyPr wrap="square" lIns="0" tIns="0" rIns="0" bIns="0" rtlCol="0" anchor="ctr"/>
           <a:lstStyle/>
           <a:p>
-            <a:pPr indent="0" marL="0">
+            <a:pPr marL="0" indent="0">
               <a:buNone/>
             </a:pPr>
             <a:r>
@@ -19926,14 +19861,14 @@
       </p:sp>
       <p:pic>
         <p:nvPicPr>
-          <p:cNvPr id="26" name="Image 0" descr="preencoded.png">    </p:cNvPr>
+          <p:cNvPr id="26" name="Image 0" descr="preencoded.png"/>
           <p:cNvPicPr>
             <a:picLocks noChangeAspect="1"/>
           </p:cNvPicPr>
           <p:nvPr/>
         </p:nvPicPr>
         <p:blipFill>
-          <a:blip r:embed="rId1"/>
+          <a:blip r:embed="rId3"/>
           <a:stretch>
             <a:fillRect/>
           </a:stretch>
@@ -19972,7 +19907,7 @@
             <a:prstDash val="solid"/>
           </a:ln>
           <a:effectLst>
-            <a:outerShdw sx="100000" sy="100000" kx="0" ky="0" algn="bl" rotWithShape="0" blurRad="101600" dist="25400" dir="5400000">
+            <a:outerShdw blurRad="101600" dist="25400" dir="5400000" algn="bl" rotWithShape="0">
               <a:srgbClr val="000000">
                 <a:alpha val="10000"/>
               </a:srgbClr>
@@ -20021,7 +19956,7 @@
           <a:bodyPr wrap="square" lIns="0" tIns="0" rIns="0" bIns="0" rtlCol="0" anchor="ctr"/>
           <a:lstStyle/>
           <a:p>
-            <a:pPr indent="0" marL="0">
+            <a:pPr marL="0" indent="0">
               <a:buNone/>
             </a:pPr>
             <a:r>
@@ -20085,7 +20020,7 @@
           <a:bodyPr wrap="square" lIns="0" tIns="0" rIns="0" bIns="0" rtlCol="0" anchor="ctr"/>
           <a:lstStyle/>
           <a:p>
-            <a:pPr algn="ctr" indent="0" marL="0">
+            <a:pPr marL="0" indent="0" algn="ctr">
               <a:buNone/>
             </a:pPr>
             <a:r>
@@ -20149,7 +20084,7 @@
           <a:bodyPr wrap="square" lIns="0" tIns="0" rIns="0" bIns="0" rtlCol="0" anchor="ctr"/>
           <a:lstStyle/>
           <a:p>
-            <a:pPr algn="ctr" indent="0" marL="0">
+            <a:pPr marL="0" indent="0" algn="ctr">
               <a:buNone/>
             </a:pPr>
             <a:r>
@@ -20213,7 +20148,7 @@
           <a:bodyPr wrap="square" lIns="0" tIns="0" rIns="0" bIns="0" rtlCol="0" anchor="ctr"/>
           <a:lstStyle/>
           <a:p>
-            <a:pPr algn="ctr" indent="0" marL="0">
+            <a:pPr marL="0" indent="0" algn="ctr">
               <a:buNone/>
             </a:pPr>
             <a:r>
@@ -20277,7 +20212,7 @@
           <a:bodyPr wrap="square" lIns="0" tIns="0" rIns="0" bIns="0" rtlCol="0" anchor="ctr"/>
           <a:lstStyle/>
           <a:p>
-            <a:pPr algn="ctr" indent="0" marL="0">
+            <a:pPr marL="0" indent="0" algn="ctr">
               <a:buNone/>
             </a:pPr>
             <a:r>
@@ -20341,7 +20276,7 @@
           <a:bodyPr wrap="square" lIns="0" tIns="0" rIns="0" bIns="0" rtlCol="0" anchor="ctr"/>
           <a:lstStyle/>
           <a:p>
-            <a:pPr algn="ctr" indent="0" marL="0">
+            <a:pPr marL="0" indent="0" algn="ctr">
               <a:buNone/>
             </a:pPr>
             <a:r>
@@ -20405,7 +20340,7 @@
           <a:bodyPr wrap="square" lIns="0" tIns="0" rIns="0" bIns="0" rtlCol="0" anchor="ctr"/>
           <a:lstStyle/>
           <a:p>
-            <a:pPr algn="ctr" indent="0" marL="0">
+            <a:pPr marL="0" indent="0" algn="ctr">
               <a:buNone/>
             </a:pPr>
             <a:r>
@@ -20469,7 +20404,7 @@
           <a:bodyPr wrap="square" lIns="0" tIns="0" rIns="0" bIns="0" rtlCol="0" anchor="ctr"/>
           <a:lstStyle/>
           <a:p>
-            <a:pPr algn="ctr" indent="0" marL="0">
+            <a:pPr marL="0" indent="0" algn="ctr">
               <a:buNone/>
             </a:pPr>
             <a:r>
@@ -20508,7 +20443,7 @@
           <a:bodyPr wrap="square" lIns="0" tIns="0" rIns="0" bIns="0" rtlCol="0" anchor="ctr"/>
           <a:lstStyle/>
           <a:p>
-            <a:pPr indent="0" marL="0">
+            <a:pPr marL="0" indent="0">
               <a:buNone/>
             </a:pPr>
             <a:r>
@@ -20528,14 +20463,14 @@
       </p:sp>
       <p:pic>
         <p:nvPicPr>
-          <p:cNvPr id="45" name="Image 1" descr="preencoded.png">    </p:cNvPr>
+          <p:cNvPr id="45" name="Image 1" descr="preencoded.png"/>
           <p:cNvPicPr>
             <a:picLocks noChangeAspect="1"/>
           </p:cNvPicPr>
           <p:nvPr/>
         </p:nvPicPr>
         <p:blipFill>
-          <a:blip r:embed="rId2"/>
+          <a:blip r:embed="rId4"/>
           <a:stretch>
             <a:fillRect/>
           </a:stretch>
@@ -20593,7 +20528,7 @@
           <a:bodyPr wrap="square" lIns="0" tIns="0" rIns="0" bIns="0" rtlCol="0" anchor="ctr"/>
           <a:lstStyle/>
           <a:p>
-            <a:pPr algn="ctr" indent="0" marL="0">
+            <a:pPr marL="0" indent="0" algn="ctr">
               <a:buNone/>
             </a:pPr>
             <a:r>
@@ -20627,6 +20562,7 @@
         <a:solidFill>
           <a:srgbClr val="F8FAFC"/>
         </a:solidFill>
+        <a:effectLst/>
       </p:bgPr>
     </p:bg>
     <p:spTree>
@@ -20704,7 +20640,7 @@
           <a:bodyPr wrap="square" lIns="0" tIns="0" rIns="0" bIns="0" rtlCol="0" anchor="ctr"/>
           <a:lstStyle/>
           <a:p>
-            <a:pPr indent="0" marL="0">
+            <a:pPr marL="0" indent="0">
               <a:buNone/>
             </a:pPr>
             <a:r>
@@ -20743,11 +20679,11 @@
           <a:bodyPr wrap="square" lIns="0" tIns="0" rIns="0" bIns="0" rtlCol="0" anchor="ctr"/>
           <a:lstStyle/>
           <a:p>
-            <a:pPr algn="r" indent="0" marL="0">
-              <a:buNone/>
-            </a:pPr>
-            <a:r>
-              <a:rPr lang="en-US" sz="900" b="1" spc="400" kern="0" dirty="0">
+            <a:pPr marL="0" indent="0" algn="r">
+              <a:buNone/>
+            </a:pPr>
+            <a:r>
+              <a:rPr lang="en-US" sz="900" b="1" kern="0" spc="400" dirty="0">
                 <a:solidFill>
                   <a:srgbClr val="BFDBFE"/>
                 </a:solidFill>
@@ -20802,7 +20738,7 @@
           <a:bodyPr wrap="square" lIns="0" tIns="0" rIns="0" bIns="0" rtlCol="0" anchor="ctr"/>
           <a:lstStyle/>
           <a:p>
-            <a:pPr indent="0" marL="0">
+            <a:pPr marL="0" indent="0">
               <a:buNone/>
             </a:pPr>
             <a:r>
@@ -20866,7 +20802,7 @@
           <a:bodyPr wrap="square" lIns="0" tIns="0" rIns="0" bIns="0" rtlCol="0" anchor="ctr"/>
           <a:lstStyle/>
           <a:p>
-            <a:pPr algn="ctr" indent="0" marL="0">
+            <a:pPr marL="0" indent="0" algn="ctr">
               <a:buNone/>
             </a:pPr>
             <a:r>
@@ -20883,7 +20819,7 @@
             <a:endParaRPr lang="en-US" sz="800" dirty="0"/>
           </a:p>
           <a:p>
-            <a:pPr algn="ctr" indent="0" marL="0">
+            <a:pPr marL="0" indent="0" algn="ctr">
               <a:buNone/>
             </a:pPr>
             <a:r>
@@ -20947,7 +20883,7 @@
           <a:bodyPr wrap="square" lIns="0" tIns="0" rIns="0" bIns="0" rtlCol="0" anchor="ctr"/>
           <a:lstStyle/>
           <a:p>
-            <a:pPr algn="ctr" indent="0" marL="0">
+            <a:pPr marL="0" indent="0" algn="ctr">
               <a:buNone/>
             </a:pPr>
             <a:r>
@@ -20964,7 +20900,7 @@
             <a:endParaRPr lang="en-US" sz="800" dirty="0"/>
           </a:p>
           <a:p>
-            <a:pPr algn="ctr" indent="0" marL="0">
+            <a:pPr marL="0" indent="0" algn="ctr">
               <a:buNone/>
             </a:pPr>
             <a:r>
@@ -21028,7 +20964,7 @@
           <a:bodyPr wrap="square" lIns="0" tIns="0" rIns="0" bIns="0" rtlCol="0" anchor="ctr"/>
           <a:lstStyle/>
           <a:p>
-            <a:pPr algn="ctr" indent="0" marL="0">
+            <a:pPr marL="0" indent="0" algn="ctr">
               <a:buNone/>
             </a:pPr>
             <a:r>
@@ -21045,7 +20981,7 @@
             <a:endParaRPr lang="en-US" sz="800" dirty="0"/>
           </a:p>
           <a:p>
-            <a:pPr algn="ctr" indent="0" marL="0">
+            <a:pPr marL="0" indent="0" algn="ctr">
               <a:buNone/>
             </a:pPr>
             <a:r>
@@ -21109,7 +21045,7 @@
           <a:bodyPr wrap="square" lIns="0" tIns="0" rIns="0" bIns="0" rtlCol="0" anchor="ctr"/>
           <a:lstStyle/>
           <a:p>
-            <a:pPr algn="ctr" indent="0" marL="0">
+            <a:pPr marL="0" indent="0" algn="ctr">
               <a:buNone/>
             </a:pPr>
             <a:r>
@@ -21126,7 +21062,7 @@
             <a:endParaRPr lang="en-US" sz="800" dirty="0"/>
           </a:p>
           <a:p>
-            <a:pPr algn="ctr" indent="0" marL="0">
+            <a:pPr marL="0" indent="0" algn="ctr">
               <a:buNone/>
             </a:pPr>
             <a:r>
@@ -21190,7 +21126,7 @@
           <a:bodyPr wrap="square" lIns="0" tIns="0" rIns="0" bIns="0" rtlCol="0" anchor="ctr"/>
           <a:lstStyle/>
           <a:p>
-            <a:pPr algn="ctr" indent="0" marL="0">
+            <a:pPr marL="0" indent="0" algn="ctr">
               <a:buNone/>
             </a:pPr>
             <a:r>
@@ -21254,7 +21190,7 @@
           <a:bodyPr wrap="square" lIns="0" tIns="0" rIns="0" bIns="0" rtlCol="0" anchor="ctr"/>
           <a:lstStyle/>
           <a:p>
-            <a:pPr algn="ctr" indent="0" marL="0">
+            <a:pPr marL="0" indent="0" algn="ctr">
               <a:buNone/>
             </a:pPr>
             <a:r>
@@ -21271,7 +21207,7 @@
             <a:endParaRPr lang="en-US" sz="800" dirty="0"/>
           </a:p>
           <a:p>
-            <a:pPr algn="ctr" indent="0" marL="0">
+            <a:pPr marL="0" indent="0" algn="ctr">
               <a:buNone/>
             </a:pPr>
             <a:r>
@@ -21335,7 +21271,7 @@
           <a:bodyPr wrap="square" lIns="0" tIns="0" rIns="0" bIns="0" rtlCol="0" anchor="ctr"/>
           <a:lstStyle/>
           <a:p>
-            <a:pPr algn="ctr" indent="0" marL="0">
+            <a:pPr marL="0" indent="0" algn="ctr">
               <a:buNone/>
             </a:pPr>
             <a:r>
@@ -21352,7 +21288,7 @@
             <a:endParaRPr lang="en-US" sz="800" dirty="0"/>
           </a:p>
           <a:p>
-            <a:pPr algn="ctr" indent="0" marL="0">
+            <a:pPr marL="0" indent="0" algn="ctr">
               <a:buNone/>
             </a:pPr>
             <a:r>
@@ -21416,7 +21352,7 @@
           <a:bodyPr wrap="square" lIns="0" tIns="0" rIns="0" bIns="0" rtlCol="0" anchor="ctr"/>
           <a:lstStyle/>
           <a:p>
-            <a:pPr algn="ctr" indent="0" marL="0">
+            <a:pPr marL="0" indent="0" algn="ctr">
               <a:buNone/>
             </a:pPr>
             <a:r>
@@ -21433,7 +21369,7 @@
             <a:endParaRPr lang="en-US" sz="800" dirty="0"/>
           </a:p>
           <a:p>
-            <a:pPr algn="ctr" indent="0" marL="0">
+            <a:pPr marL="0" indent="0" algn="ctr">
               <a:buNone/>
             </a:pPr>
             <a:r>
@@ -21497,7 +21433,7 @@
           <a:bodyPr wrap="square" lIns="0" tIns="0" rIns="0" bIns="0" rtlCol="0" anchor="ctr"/>
           <a:lstStyle/>
           <a:p>
-            <a:pPr algn="ctr" indent="0" marL="0">
+            <a:pPr marL="0" indent="0" algn="ctr">
               <a:buNone/>
             </a:pPr>
             <a:r>
@@ -21514,7 +21450,7 @@
             <a:endParaRPr lang="en-US" sz="800" dirty="0"/>
           </a:p>
           <a:p>
-            <a:pPr algn="ctr" indent="0" marL="0">
+            <a:pPr marL="0" indent="0" algn="ctr">
               <a:buNone/>
             </a:pPr>
             <a:r>
@@ -21649,7 +21585,7 @@
           <a:bodyPr wrap="square" lIns="0" tIns="0" rIns="0" bIns="0" rtlCol="0" anchor="ctr"/>
           <a:lstStyle/>
           <a:p>
-            <a:pPr algn="ctr" indent="0" marL="0">
+            <a:pPr marL="0" indent="0" algn="ctr">
               <a:buNone/>
             </a:pPr>
             <a:r>
@@ -21710,7 +21646,7 @@
           <a:bodyPr wrap="square" lIns="0" tIns="0" rIns="0" bIns="0" rtlCol="0" anchor="ctr"/>
           <a:lstStyle/>
           <a:p>
-            <a:pPr algn="ctr" indent="0" marL="0">
+            <a:pPr marL="0" indent="0" algn="ctr">
               <a:buNone/>
             </a:pPr>
             <a:r>
@@ -21771,7 +21707,7 @@
           <a:bodyPr wrap="square" lIns="0" tIns="0" rIns="0" bIns="0" rtlCol="0" anchor="ctr"/>
           <a:lstStyle/>
           <a:p>
-            <a:pPr algn="ctr" indent="0" marL="0">
+            <a:pPr marL="0" indent="0" algn="ctr">
               <a:buNone/>
             </a:pPr>
             <a:r>
@@ -21832,7 +21768,7 @@
           <a:bodyPr wrap="square" lIns="0" tIns="0" rIns="0" bIns="0" rtlCol="0" anchor="ctr"/>
           <a:lstStyle/>
           <a:p>
-            <a:pPr algn="ctr" indent="0" marL="0">
+            <a:pPr marL="0" indent="0" algn="ctr">
               <a:buNone/>
             </a:pPr>
             <a:r>
@@ -21871,7 +21807,7 @@
           <a:bodyPr wrap="square" lIns="0" tIns="0" rIns="0" bIns="0" rtlCol="0" anchor="ctr"/>
           <a:lstStyle/>
           <a:p>
-            <a:pPr algn="ctr" indent="0" marL="0">
+            <a:pPr marL="0" indent="0" algn="ctr">
               <a:buNone/>
             </a:pPr>
             <a:r>
@@ -22190,4 +22126,319 @@
     </a:ext>
   </a:extLst>
 </a:theme>
+</file>
+
+<file path=ppt/theme/theme2.xml><?xml version="1.0" encoding="utf-8"?>
+<a:theme xmlns:a="http://schemas.openxmlformats.org/drawingml/2006/main" name="Office Theme">
+  <a:themeElements>
+    <a:clrScheme name="Office">
+      <a:dk1>
+        <a:sysClr val="windowText" lastClr="000000"/>
+      </a:dk1>
+      <a:lt1>
+        <a:sysClr val="window" lastClr="FFFFFF"/>
+      </a:lt1>
+      <a:dk2>
+        <a:srgbClr val="0E2841"/>
+      </a:dk2>
+      <a:lt2>
+        <a:srgbClr val="E8E8E8"/>
+      </a:lt2>
+      <a:accent1>
+        <a:srgbClr val="156082"/>
+      </a:accent1>
+      <a:accent2>
+        <a:srgbClr val="E97132"/>
+      </a:accent2>
+      <a:accent3>
+        <a:srgbClr val="196B24"/>
+      </a:accent3>
+      <a:accent4>
+        <a:srgbClr val="0F9ED5"/>
+      </a:accent4>
+      <a:accent5>
+        <a:srgbClr val="A02B93"/>
+      </a:accent5>
+      <a:accent6>
+        <a:srgbClr val="4EA72E"/>
+      </a:accent6>
+      <a:hlink>
+        <a:srgbClr val="467886"/>
+      </a:hlink>
+      <a:folHlink>
+        <a:srgbClr val="96607D"/>
+      </a:folHlink>
+    </a:clrScheme>
+    <a:fontScheme name="Office">
+      <a:majorFont>
+        <a:latin typeface="Aptos Display" panose="02110004020202020204"/>
+        <a:ea typeface=""/>
+        <a:cs typeface=""/>
+        <a:font script="Jpan" typeface="游ゴシック Light"/>
+        <a:font script="Hang" typeface="맑은 고딕"/>
+        <a:font script="Hans" typeface="等线 Light"/>
+        <a:font script="Hant" typeface="新細明體"/>
+        <a:font script="Arab" typeface="Times New Roman"/>
+        <a:font script="Hebr" typeface="Times New Roman"/>
+        <a:font script="Thai" typeface="Angsana New"/>
+        <a:font script="Ethi" typeface="Nyala"/>
+        <a:font script="Beng" typeface="Vrinda"/>
+        <a:font script="Gujr" typeface="Shruti"/>
+        <a:font script="Khmr" typeface="MoolBoran"/>
+        <a:font script="Knda" typeface="Tunga"/>
+        <a:font script="Guru" typeface="Raavi"/>
+        <a:font script="Cans" typeface="Euphemia"/>
+        <a:font script="Cher" typeface="Plantagenet Cherokee"/>
+        <a:font script="Yiii" typeface="Microsoft Yi Baiti"/>
+        <a:font script="Tibt" typeface="Microsoft Himalaya"/>
+        <a:font script="Thaa" typeface="MV Boli"/>
+        <a:font script="Deva" typeface="Mangal"/>
+        <a:font script="Telu" typeface="Gautami"/>
+        <a:font script="Taml" typeface="Latha"/>
+        <a:font script="Syrc" typeface="Estrangelo Edessa"/>
+        <a:font script="Orya" typeface="Kalinga"/>
+        <a:font script="Mlym" typeface="Kartika"/>
+        <a:font script="Laoo" typeface="DokChampa"/>
+        <a:font script="Sinh" typeface="Iskoola Pota"/>
+        <a:font script="Mong" typeface="Mongolian Baiti"/>
+        <a:font script="Viet" typeface="Times New Roman"/>
+        <a:font script="Uigh" typeface="Microsoft Uighur"/>
+        <a:font script="Geor" typeface="Sylfaen"/>
+        <a:font script="Armn" typeface="Arial"/>
+        <a:font script="Bugi" typeface="Leelawadee UI"/>
+        <a:font script="Bopo" typeface="Microsoft JhengHei"/>
+        <a:font script="Java" typeface="Javanese Text"/>
+        <a:font script="Lisu" typeface="Segoe UI"/>
+        <a:font script="Mymr" typeface="Myanmar Text"/>
+        <a:font script="Nkoo" typeface="Ebrima"/>
+        <a:font script="Olck" typeface="Nirmala UI"/>
+        <a:font script="Osma" typeface="Ebrima"/>
+        <a:font script="Phag" typeface="Phagspa"/>
+        <a:font script="Syrn" typeface="Estrangelo Edessa"/>
+        <a:font script="Syrj" typeface="Estrangelo Edessa"/>
+        <a:font script="Syre" typeface="Estrangelo Edessa"/>
+        <a:font script="Sora" typeface="Nirmala UI"/>
+        <a:font script="Tale" typeface="Microsoft Tai Le"/>
+        <a:font script="Talu" typeface="Microsoft New Tai Lue"/>
+        <a:font script="Tfng" typeface="Ebrima"/>
+      </a:majorFont>
+      <a:minorFont>
+        <a:latin typeface="Aptos" panose="02110004020202020204"/>
+        <a:ea typeface=""/>
+        <a:cs typeface=""/>
+        <a:font script="Jpan" typeface="游ゴシック"/>
+        <a:font script="Hang" typeface="맑은 고딕"/>
+        <a:font script="Hans" typeface="等线"/>
+        <a:font script="Hant" typeface="新細明體"/>
+        <a:font script="Arab" typeface="Arial"/>
+        <a:font script="Hebr" typeface="Arial"/>
+        <a:font script="Thai" typeface="Cordia New"/>
+        <a:font script="Ethi" typeface="Nyala"/>
+        <a:font script="Beng" typeface="Vrinda"/>
+        <a:font script="Gujr" typeface="Shruti"/>
+        <a:font script="Khmr" typeface="DaunPenh"/>
+        <a:font script="Knda" typeface="Tunga"/>
+        <a:font script="Guru" typeface="Raavi"/>
+        <a:font script="Cans" typeface="Euphemia"/>
+        <a:font script="Cher" typeface="Plantagenet Cherokee"/>
+        <a:font script="Yiii" typeface="Microsoft Yi Baiti"/>
+        <a:font script="Tibt" typeface="Microsoft Himalaya"/>
+        <a:font script="Thaa" typeface="MV Boli"/>
+        <a:font script="Deva" typeface="Mangal"/>
+        <a:font script="Telu" typeface="Gautami"/>
+        <a:font script="Taml" typeface="Latha"/>
+        <a:font script="Syrc" typeface="Estrangelo Edessa"/>
+        <a:font script="Orya" typeface="Kalinga"/>
+        <a:font script="Mlym" typeface="Kartika"/>
+        <a:font script="Laoo" typeface="DokChampa"/>
+        <a:font script="Sinh" typeface="Iskoola Pota"/>
+        <a:font script="Mong" typeface="Mongolian Baiti"/>
+        <a:font script="Viet" typeface="Arial"/>
+        <a:font script="Uigh" typeface="Microsoft Uighur"/>
+        <a:font script="Geor" typeface="Sylfaen"/>
+        <a:font script="Armn" typeface="Arial"/>
+        <a:font script="Bugi" typeface="Leelawadee UI"/>
+        <a:font script="Bopo" typeface="Microsoft JhengHei"/>
+        <a:font script="Java" typeface="Javanese Text"/>
+        <a:font script="Lisu" typeface="Segoe UI"/>
+        <a:font script="Mymr" typeface="Myanmar Text"/>
+        <a:font script="Nkoo" typeface="Ebrima"/>
+        <a:font script="Olck" typeface="Nirmala UI"/>
+        <a:font script="Osma" typeface="Ebrima"/>
+        <a:font script="Phag" typeface="Phagspa"/>
+        <a:font script="Syrn" typeface="Estrangelo Edessa"/>
+        <a:font script="Syrj" typeface="Estrangelo Edessa"/>
+        <a:font script="Syre" typeface="Estrangelo Edessa"/>
+        <a:font script="Sora" typeface="Nirmala UI"/>
+        <a:font script="Tale" typeface="Microsoft Tai Le"/>
+        <a:font script="Talu" typeface="Microsoft New Tai Lue"/>
+        <a:font script="Tfng" typeface="Ebrima"/>
+      </a:minorFont>
+    </a:fontScheme>
+    <a:fmtScheme name="Office">
+      <a:fillStyleLst>
+        <a:solidFill>
+          <a:schemeClr val="phClr"/>
+        </a:solidFill>
+        <a:gradFill rotWithShape="1">
+          <a:gsLst>
+            <a:gs pos="0">
+              <a:schemeClr val="phClr">
+                <a:lumMod val="110000"/>
+                <a:satMod val="105000"/>
+                <a:tint val="67000"/>
+              </a:schemeClr>
+            </a:gs>
+            <a:gs pos="50000">
+              <a:schemeClr val="phClr">
+                <a:lumMod val="105000"/>
+                <a:satMod val="103000"/>
+                <a:tint val="73000"/>
+              </a:schemeClr>
+            </a:gs>
+            <a:gs pos="100000">
+              <a:schemeClr val="phClr">
+                <a:lumMod val="105000"/>
+                <a:satMod val="109000"/>
+                <a:tint val="81000"/>
+              </a:schemeClr>
+            </a:gs>
+          </a:gsLst>
+          <a:lin ang="5400000" scaled="0"/>
+        </a:gradFill>
+        <a:gradFill rotWithShape="1">
+          <a:gsLst>
+            <a:gs pos="0">
+              <a:schemeClr val="phClr">
+                <a:satMod val="103000"/>
+                <a:lumMod val="102000"/>
+                <a:tint val="94000"/>
+              </a:schemeClr>
+            </a:gs>
+            <a:gs pos="50000">
+              <a:schemeClr val="phClr">
+                <a:satMod val="110000"/>
+                <a:lumMod val="100000"/>
+                <a:shade val="100000"/>
+              </a:schemeClr>
+            </a:gs>
+            <a:gs pos="100000">
+              <a:schemeClr val="phClr">
+                <a:lumMod val="99000"/>
+                <a:satMod val="120000"/>
+                <a:shade val="78000"/>
+              </a:schemeClr>
+            </a:gs>
+          </a:gsLst>
+          <a:lin ang="5400000" scaled="0"/>
+        </a:gradFill>
+      </a:fillStyleLst>
+      <a:lnStyleLst>
+        <a:ln w="12700" cap="flat" cmpd="sng" algn="ctr">
+          <a:solidFill>
+            <a:schemeClr val="phClr"/>
+          </a:solidFill>
+          <a:prstDash val="solid"/>
+          <a:miter lim="800000"/>
+        </a:ln>
+        <a:ln w="19050" cap="flat" cmpd="sng" algn="ctr">
+          <a:solidFill>
+            <a:schemeClr val="phClr"/>
+          </a:solidFill>
+          <a:prstDash val="solid"/>
+          <a:miter lim="800000"/>
+        </a:ln>
+        <a:ln w="25400" cap="flat" cmpd="sng" algn="ctr">
+          <a:solidFill>
+            <a:schemeClr val="phClr"/>
+          </a:solidFill>
+          <a:prstDash val="solid"/>
+          <a:miter lim="800000"/>
+        </a:ln>
+      </a:lnStyleLst>
+      <a:effectStyleLst>
+        <a:effectStyle>
+          <a:effectLst/>
+        </a:effectStyle>
+        <a:effectStyle>
+          <a:effectLst/>
+        </a:effectStyle>
+        <a:effectStyle>
+          <a:effectLst>
+            <a:outerShdw blurRad="57150" dist="19050" dir="5400000" algn="ctr" rotWithShape="0">
+              <a:srgbClr val="000000">
+                <a:alpha val="63000"/>
+              </a:srgbClr>
+            </a:outerShdw>
+          </a:effectLst>
+        </a:effectStyle>
+      </a:effectStyleLst>
+      <a:bgFillStyleLst>
+        <a:solidFill>
+          <a:schemeClr val="phClr"/>
+        </a:solidFill>
+        <a:solidFill>
+          <a:schemeClr val="phClr">
+            <a:tint val="95000"/>
+            <a:satMod val="170000"/>
+          </a:schemeClr>
+        </a:solidFill>
+        <a:gradFill rotWithShape="1">
+          <a:gsLst>
+            <a:gs pos="0">
+              <a:schemeClr val="phClr">
+                <a:tint val="93000"/>
+                <a:satMod val="150000"/>
+                <a:shade val="98000"/>
+                <a:lumMod val="102000"/>
+              </a:schemeClr>
+            </a:gs>
+            <a:gs pos="50000">
+              <a:schemeClr val="phClr">
+                <a:tint val="98000"/>
+                <a:satMod val="130000"/>
+                <a:shade val="90000"/>
+                <a:lumMod val="103000"/>
+              </a:schemeClr>
+            </a:gs>
+            <a:gs pos="100000">
+              <a:schemeClr val="phClr">
+                <a:shade val="63000"/>
+                <a:satMod val="120000"/>
+              </a:schemeClr>
+            </a:gs>
+          </a:gsLst>
+          <a:lin ang="5400000" scaled="0"/>
+        </a:gradFill>
+      </a:bgFillStyleLst>
+    </a:fmtScheme>
+  </a:themeElements>
+  <a:objectDefaults>
+    <a:lnDef>
+      <a:spPr/>
+      <a:bodyPr/>
+      <a:lstStyle/>
+      <a:style>
+        <a:lnRef idx="2">
+          <a:schemeClr val="accent1"/>
+        </a:lnRef>
+        <a:fillRef idx="0">
+          <a:schemeClr val="accent1"/>
+        </a:fillRef>
+        <a:effectRef idx="1">
+          <a:schemeClr val="accent1"/>
+        </a:effectRef>
+        <a:fontRef idx="minor">
+          <a:schemeClr val="tx1"/>
+        </a:fontRef>
+      </a:style>
+    </a:lnDef>
+  </a:objectDefaults>
+  <a:extraClrSchemeLst/>
+  <a:extLst>
+    <a:ext uri="{05A4C25C-085E-4340-85A3-A5531E510DB2}">
+      <thm15:themeFamily xmlns:thm15="http://schemas.microsoft.com/office/thememl/2012/main" name="Office Theme" id="{2E142A2C-CD16-42D6-873A-C26D2A0506FA}" vid="{1BDDFF52-6CD6-40A5-AB3C-68EB2F1E4D0A}"/>
+    </a:ext>
+  </a:extLst>
+</a:theme>
 </file>